--- a/presentation/Results_Ranked_Slides.pptx
+++ b/presentation/Results_Ranked_Slides.pptx
@@ -7966,7 +7966,7 @@
         </p:nvGraphicFramePr>
         <p:xfrm>
           <a:off x="640080" y="1143000"/>
-          <a:ext cx="7863840" cy="2304288"/>
+          <a:ext cx="7863840" cy="2688336"/>
         </p:xfrm>
         <a:graphic>
           <a:graphicData uri="http://schemas.openxmlformats.org/drawingml/2006/table">
@@ -9070,7 +9070,7 @@
                       <a:tailEnd type="none" w="med" len="med"/>
                     </a:lnB>
                     <a:solidFill>
-                      <a:srgbClr val="D6EAF8"/>
+                      <a:srgbClr val="FDEBD0"/>
                     </a:solidFill>
                   </a:tcPr>
                 </a:tc>
@@ -9091,7 +9091,7 @@
                           <a:ea typeface="Arial" pitchFamily="34" charset="-122"/>
                           <a:cs typeface="Arial" pitchFamily="34" charset="-120"/>
                         </a:rPr>
-                        <a:t>MiniLM</a:t>
+                        <a:t>Qwen3.6 27B</a:t>
                       </a:r>
                       <a:endParaRPr lang="en-US" sz="1600" dirty="0">
                         <a:latin typeface="Arial" charset="0"/>
@@ -9138,7 +9138,7 @@
                       <a:tailEnd type="none" w="med" len="med"/>
                     </a:lnB>
                     <a:solidFill>
-                      <a:srgbClr val="D6EAF8"/>
+                      <a:srgbClr val="FDEBD0"/>
                     </a:solidFill>
                   </a:tcPr>
                 </a:tc>
@@ -9159,7 +9159,7 @@
                           <a:ea typeface="Arial" pitchFamily="34" charset="-122"/>
                           <a:cs typeface="Arial" pitchFamily="34" charset="-120"/>
                         </a:rPr>
-                        <a:t>Fine-Tuned</a:t>
+                        <a:t>Zero-Shot</a:t>
                       </a:r>
                       <a:endParaRPr lang="en-US" sz="1600" dirty="0">
                         <a:latin typeface="Arial" charset="0"/>
@@ -9206,7 +9206,7 @@
                       <a:tailEnd type="none" w="med" len="med"/>
                     </a:lnB>
                     <a:solidFill>
-                      <a:srgbClr val="D6EAF8"/>
+                      <a:srgbClr val="FDEBD0"/>
                     </a:solidFill>
                   </a:tcPr>
                 </a:tc>
@@ -9227,7 +9227,7 @@
                           <a:ea typeface="Arial" pitchFamily="34" charset="-122"/>
                           <a:cs typeface="Arial" pitchFamily="34" charset="-120"/>
                         </a:rPr>
-                        <a:t>0.367</a:t>
+                        <a:t>0.490</a:t>
                       </a:r>
                       <a:endParaRPr lang="en-US" sz="1600" dirty="0">
                         <a:latin typeface="Arial" charset="0"/>
@@ -9274,7 +9274,7 @@
                       <a:tailEnd type="none" w="med" len="med"/>
                     </a:lnB>
                     <a:solidFill>
-                      <a:srgbClr val="D6EAF8"/>
+                      <a:srgbClr val="FDEBD0"/>
                     </a:solidFill>
                   </a:tcPr>
                 </a:tc>
@@ -9295,7 +9295,7 @@
                           <a:ea typeface="Arial" pitchFamily="34" charset="-122"/>
                           <a:cs typeface="Arial" pitchFamily="34" charset="-120"/>
                         </a:rPr>
-                        <a:t>0.579</a:t>
+                        <a:t>0.632</a:t>
                       </a:r>
                       <a:endParaRPr lang="en-US" sz="1600" dirty="0">
                         <a:latin typeface="Arial" charset="0"/>
@@ -9342,7 +9342,7 @@
                       <a:tailEnd type="none" w="med" len="med"/>
                     </a:lnB>
                     <a:solidFill>
-                      <a:srgbClr val="D6EAF8"/>
+                      <a:srgbClr val="FDEBD0"/>
                     </a:solidFill>
                   </a:tcPr>
                 </a:tc>
@@ -9433,7 +9433,7 @@
                           <a:ea typeface="Arial" pitchFamily="34" charset="-122"/>
                           <a:cs typeface="Arial" pitchFamily="34" charset="-120"/>
                         </a:rPr>
-                        <a:t>RoBERTa</a:t>
+                        <a:t>MiniLM</a:t>
                       </a:r>
                       <a:endParaRPr lang="en-US" sz="1600" dirty="0">
                         <a:latin typeface="Arial" charset="0"/>
@@ -9708,6 +9708,348 @@
                           <a:cs typeface="Arial" pitchFamily="34" charset="-120"/>
                         </a:rPr>
                         <a:t>5</a:t>
+                      </a:r>
+                      <a:endParaRPr lang="en-US" sz="1600" dirty="0">
+                        <a:latin typeface="Arial" charset="0"/>
+                        <a:ea typeface="Arial" charset="0"/>
+                        <a:cs typeface="Arial" charset="0"/>
+                      </a:endParaRPr>
+                    </a:p>
+                  </a:txBody>
+                  <a:tcPr marL="91440" marR="91440" marT="45720" marB="45720" anchor="ctr">
+                    <a:lnL w="6350" cap="flat" cmpd="sng" algn="ctr">
+                      <a:solidFill>
+                        <a:srgbClr val="FFFFFF"/>
+                      </a:solidFill>
+                      <a:prstDash val="solid"/>
+                      <a:round/>
+                      <a:headEnd type="none" w="med" len="med"/>
+                      <a:tailEnd type="none" w="med" len="med"/>
+                    </a:lnL>
+                    <a:lnR w="6350" cap="flat" cmpd="sng" algn="ctr">
+                      <a:solidFill>
+                        <a:srgbClr val="FFFFFF"/>
+                      </a:solidFill>
+                      <a:prstDash val="solid"/>
+                      <a:round/>
+                      <a:headEnd type="none" w="med" len="med"/>
+                      <a:tailEnd type="none" w="med" len="med"/>
+                    </a:lnR>
+                    <a:lnT w="6350" cap="flat" cmpd="sng" algn="ctr">
+                      <a:solidFill>
+                        <a:srgbClr val="FFFFFF"/>
+                      </a:solidFill>
+                      <a:prstDash val="solid"/>
+                      <a:round/>
+                      <a:headEnd type="none" w="med" len="med"/>
+                      <a:tailEnd type="none" w="med" len="med"/>
+                    </a:lnT>
+                    <a:lnB w="6350" cap="flat" cmpd="sng" algn="ctr">
+                      <a:solidFill>
+                        <a:srgbClr val="FFFFFF"/>
+                      </a:solidFill>
+                      <a:prstDash val="solid"/>
+                      <a:round/>
+                      <a:headEnd type="none" w="med" len="med"/>
+                      <a:tailEnd type="none" w="med" len="med"/>
+                    </a:lnB>
+                    <a:solidFill>
+                      <a:srgbClr val="D6EAF8"/>
+                    </a:solidFill>
+                  </a:tcPr>
+                </a:tc>
+                <a:tc>
+                  <a:txBody>
+                    <a:bodyPr/>
+                    <a:lstStyle/>
+                    <a:p>
+                      <a:pPr algn="ctr" indent="0" marL="0">
+                        <a:buNone/>
+                      </a:pPr>
+                      <a:r>
+                        <a:rPr lang="en-US" sz="1600" dirty="0">
+                          <a:solidFill>
+                            <a:srgbClr val="1F2937"/>
+                          </a:solidFill>
+                          <a:latin typeface="Arial" pitchFamily="34" charset="0"/>
+                          <a:ea typeface="Arial" pitchFamily="34" charset="-122"/>
+                          <a:cs typeface="Arial" pitchFamily="34" charset="-120"/>
+                        </a:rPr>
+                        <a:t>RoBERTa</a:t>
+                      </a:r>
+                      <a:endParaRPr lang="en-US" sz="1600" dirty="0">
+                        <a:latin typeface="Arial" charset="0"/>
+                        <a:ea typeface="Arial" charset="0"/>
+                        <a:cs typeface="Arial" charset="0"/>
+                      </a:endParaRPr>
+                    </a:p>
+                  </a:txBody>
+                  <a:tcPr marL="91440" marR="91440" marT="45720" marB="45720" anchor="ctr">
+                    <a:lnL w="6350" cap="flat" cmpd="sng" algn="ctr">
+                      <a:solidFill>
+                        <a:srgbClr val="FFFFFF"/>
+                      </a:solidFill>
+                      <a:prstDash val="solid"/>
+                      <a:round/>
+                      <a:headEnd type="none" w="med" len="med"/>
+                      <a:tailEnd type="none" w="med" len="med"/>
+                    </a:lnL>
+                    <a:lnR w="6350" cap="flat" cmpd="sng" algn="ctr">
+                      <a:solidFill>
+                        <a:srgbClr val="FFFFFF"/>
+                      </a:solidFill>
+                      <a:prstDash val="solid"/>
+                      <a:round/>
+                      <a:headEnd type="none" w="med" len="med"/>
+                      <a:tailEnd type="none" w="med" len="med"/>
+                    </a:lnR>
+                    <a:lnT w="6350" cap="flat" cmpd="sng" algn="ctr">
+                      <a:solidFill>
+                        <a:srgbClr val="FFFFFF"/>
+                      </a:solidFill>
+                      <a:prstDash val="solid"/>
+                      <a:round/>
+                      <a:headEnd type="none" w="med" len="med"/>
+                      <a:tailEnd type="none" w="med" len="med"/>
+                    </a:lnT>
+                    <a:lnB w="6350" cap="flat" cmpd="sng" algn="ctr">
+                      <a:solidFill>
+                        <a:srgbClr val="FFFFFF"/>
+                      </a:solidFill>
+                      <a:prstDash val="solid"/>
+                      <a:round/>
+                      <a:headEnd type="none" w="med" len="med"/>
+                      <a:tailEnd type="none" w="med" len="med"/>
+                    </a:lnB>
+                    <a:solidFill>
+                      <a:srgbClr val="D6EAF8"/>
+                    </a:solidFill>
+                  </a:tcPr>
+                </a:tc>
+                <a:tc>
+                  <a:txBody>
+                    <a:bodyPr/>
+                    <a:lstStyle/>
+                    <a:p>
+                      <a:pPr algn="ctr" indent="0" marL="0">
+                        <a:buNone/>
+                      </a:pPr>
+                      <a:r>
+                        <a:rPr lang="en-US" sz="1600" dirty="0">
+                          <a:solidFill>
+                            <a:srgbClr val="1F2937"/>
+                          </a:solidFill>
+                          <a:latin typeface="Arial" pitchFamily="34" charset="0"/>
+                          <a:ea typeface="Arial" pitchFamily="34" charset="-122"/>
+                          <a:cs typeface="Arial" pitchFamily="34" charset="-120"/>
+                        </a:rPr>
+                        <a:t>Fine-Tuned</a:t>
+                      </a:r>
+                      <a:endParaRPr lang="en-US" sz="1600" dirty="0">
+                        <a:latin typeface="Arial" charset="0"/>
+                        <a:ea typeface="Arial" charset="0"/>
+                        <a:cs typeface="Arial" charset="0"/>
+                      </a:endParaRPr>
+                    </a:p>
+                  </a:txBody>
+                  <a:tcPr marL="91440" marR="91440" marT="45720" marB="45720" anchor="ctr">
+                    <a:lnL w="6350" cap="flat" cmpd="sng" algn="ctr">
+                      <a:solidFill>
+                        <a:srgbClr val="FFFFFF"/>
+                      </a:solidFill>
+                      <a:prstDash val="solid"/>
+                      <a:round/>
+                      <a:headEnd type="none" w="med" len="med"/>
+                      <a:tailEnd type="none" w="med" len="med"/>
+                    </a:lnL>
+                    <a:lnR w="6350" cap="flat" cmpd="sng" algn="ctr">
+                      <a:solidFill>
+                        <a:srgbClr val="FFFFFF"/>
+                      </a:solidFill>
+                      <a:prstDash val="solid"/>
+                      <a:round/>
+                      <a:headEnd type="none" w="med" len="med"/>
+                      <a:tailEnd type="none" w="med" len="med"/>
+                    </a:lnR>
+                    <a:lnT w="6350" cap="flat" cmpd="sng" algn="ctr">
+                      <a:solidFill>
+                        <a:srgbClr val="FFFFFF"/>
+                      </a:solidFill>
+                      <a:prstDash val="solid"/>
+                      <a:round/>
+                      <a:headEnd type="none" w="med" len="med"/>
+                      <a:tailEnd type="none" w="med" len="med"/>
+                    </a:lnT>
+                    <a:lnB w="6350" cap="flat" cmpd="sng" algn="ctr">
+                      <a:solidFill>
+                        <a:srgbClr val="FFFFFF"/>
+                      </a:solidFill>
+                      <a:prstDash val="solid"/>
+                      <a:round/>
+                      <a:headEnd type="none" w="med" len="med"/>
+                      <a:tailEnd type="none" w="med" len="med"/>
+                    </a:lnB>
+                    <a:solidFill>
+                      <a:srgbClr val="D6EAF8"/>
+                    </a:solidFill>
+                  </a:tcPr>
+                </a:tc>
+                <a:tc>
+                  <a:txBody>
+                    <a:bodyPr/>
+                    <a:lstStyle/>
+                    <a:p>
+                      <a:pPr algn="ctr" indent="0" marL="0">
+                        <a:buNone/>
+                      </a:pPr>
+                      <a:r>
+                        <a:rPr lang="en-US" sz="1600" dirty="0">
+                          <a:solidFill>
+                            <a:srgbClr val="1F2937"/>
+                          </a:solidFill>
+                          <a:latin typeface="Arial" pitchFamily="34" charset="0"/>
+                          <a:ea typeface="Arial" pitchFamily="34" charset="-122"/>
+                          <a:cs typeface="Arial" pitchFamily="34" charset="-120"/>
+                        </a:rPr>
+                        <a:t>0.367</a:t>
+                      </a:r>
+                      <a:endParaRPr lang="en-US" sz="1600" dirty="0">
+                        <a:latin typeface="Arial" charset="0"/>
+                        <a:ea typeface="Arial" charset="0"/>
+                        <a:cs typeface="Arial" charset="0"/>
+                      </a:endParaRPr>
+                    </a:p>
+                  </a:txBody>
+                  <a:tcPr marL="91440" marR="91440" marT="45720" marB="45720" anchor="ctr">
+                    <a:lnL w="6350" cap="flat" cmpd="sng" algn="ctr">
+                      <a:solidFill>
+                        <a:srgbClr val="FFFFFF"/>
+                      </a:solidFill>
+                      <a:prstDash val="solid"/>
+                      <a:round/>
+                      <a:headEnd type="none" w="med" len="med"/>
+                      <a:tailEnd type="none" w="med" len="med"/>
+                    </a:lnL>
+                    <a:lnR w="6350" cap="flat" cmpd="sng" algn="ctr">
+                      <a:solidFill>
+                        <a:srgbClr val="FFFFFF"/>
+                      </a:solidFill>
+                      <a:prstDash val="solid"/>
+                      <a:round/>
+                      <a:headEnd type="none" w="med" len="med"/>
+                      <a:tailEnd type="none" w="med" len="med"/>
+                    </a:lnR>
+                    <a:lnT w="6350" cap="flat" cmpd="sng" algn="ctr">
+                      <a:solidFill>
+                        <a:srgbClr val="FFFFFF"/>
+                      </a:solidFill>
+                      <a:prstDash val="solid"/>
+                      <a:round/>
+                      <a:headEnd type="none" w="med" len="med"/>
+                      <a:tailEnd type="none" w="med" len="med"/>
+                    </a:lnT>
+                    <a:lnB w="6350" cap="flat" cmpd="sng" algn="ctr">
+                      <a:solidFill>
+                        <a:srgbClr val="FFFFFF"/>
+                      </a:solidFill>
+                      <a:prstDash val="solid"/>
+                      <a:round/>
+                      <a:headEnd type="none" w="med" len="med"/>
+                      <a:tailEnd type="none" w="med" len="med"/>
+                    </a:lnB>
+                    <a:solidFill>
+                      <a:srgbClr val="D6EAF8"/>
+                    </a:solidFill>
+                  </a:tcPr>
+                </a:tc>
+                <a:tc>
+                  <a:txBody>
+                    <a:bodyPr/>
+                    <a:lstStyle/>
+                    <a:p>
+                      <a:pPr algn="ctr" indent="0" marL="0">
+                        <a:buNone/>
+                      </a:pPr>
+                      <a:r>
+                        <a:rPr lang="en-US" sz="1600" dirty="0">
+                          <a:solidFill>
+                            <a:srgbClr val="1F2937"/>
+                          </a:solidFill>
+                          <a:latin typeface="Arial" pitchFamily="34" charset="0"/>
+                          <a:ea typeface="Arial" pitchFamily="34" charset="-122"/>
+                          <a:cs typeface="Arial" pitchFamily="34" charset="-120"/>
+                        </a:rPr>
+                        <a:t>0.579</a:t>
+                      </a:r>
+                      <a:endParaRPr lang="en-US" sz="1600" dirty="0">
+                        <a:latin typeface="Arial" charset="0"/>
+                        <a:ea typeface="Arial" charset="0"/>
+                        <a:cs typeface="Arial" charset="0"/>
+                      </a:endParaRPr>
+                    </a:p>
+                  </a:txBody>
+                  <a:tcPr marL="91440" marR="91440" marT="45720" marB="45720" anchor="ctr">
+                    <a:lnL w="6350" cap="flat" cmpd="sng" algn="ctr">
+                      <a:solidFill>
+                        <a:srgbClr val="FFFFFF"/>
+                      </a:solidFill>
+                      <a:prstDash val="solid"/>
+                      <a:round/>
+                      <a:headEnd type="none" w="med" len="med"/>
+                      <a:tailEnd type="none" w="med" len="med"/>
+                    </a:lnL>
+                    <a:lnR w="6350" cap="flat" cmpd="sng" algn="ctr">
+                      <a:solidFill>
+                        <a:srgbClr val="FFFFFF"/>
+                      </a:solidFill>
+                      <a:prstDash val="solid"/>
+                      <a:round/>
+                      <a:headEnd type="none" w="med" len="med"/>
+                      <a:tailEnd type="none" w="med" len="med"/>
+                    </a:lnR>
+                    <a:lnT w="6350" cap="flat" cmpd="sng" algn="ctr">
+                      <a:solidFill>
+                        <a:srgbClr val="FFFFFF"/>
+                      </a:solidFill>
+                      <a:prstDash val="solid"/>
+                      <a:round/>
+                      <a:headEnd type="none" w="med" len="med"/>
+                      <a:tailEnd type="none" w="med" len="med"/>
+                    </a:lnT>
+                    <a:lnB w="6350" cap="flat" cmpd="sng" algn="ctr">
+                      <a:solidFill>
+                        <a:srgbClr val="FFFFFF"/>
+                      </a:solidFill>
+                      <a:prstDash val="solid"/>
+                      <a:round/>
+                      <a:headEnd type="none" w="med" len="med"/>
+                      <a:tailEnd type="none" w="med" len="med"/>
+                    </a:lnB>
+                    <a:solidFill>
+                      <a:srgbClr val="D6EAF8"/>
+                    </a:solidFill>
+                  </a:tcPr>
+                </a:tc>
+              </a:tr>
+              <a:tr h="384048">
+                <a:tc>
+                  <a:txBody>
+                    <a:bodyPr/>
+                    <a:lstStyle/>
+                    <a:p>
+                      <a:pPr algn="ctr" indent="0" marL="0">
+                        <a:buNone/>
+                      </a:pPr>
+                      <a:r>
+                        <a:rPr lang="en-US" sz="1600" dirty="0">
+                          <a:solidFill>
+                            <a:srgbClr val="1F2937"/>
+                          </a:solidFill>
+                          <a:latin typeface="Arial" pitchFamily="34" charset="0"/>
+                          <a:ea typeface="Arial" pitchFamily="34" charset="-122"/>
+                          <a:cs typeface="Arial" pitchFamily="34" charset="-120"/>
+                        </a:rPr>
+                        <a:t>6</a:t>
                       </a:r>
                       <a:endParaRPr lang="en-US" sz="1600" dirty="0">
                         <a:latin typeface="Arial" charset="0"/>
@@ -10043,7 +10385,7 @@
         </p:nvSpPr>
         <p:spPr>
           <a:xfrm>
-            <a:off x="640080" y="3511296"/>
+            <a:off x="640080" y="3895344"/>
             <a:ext cx="7863840" cy="320040"/>
           </a:xfrm>
           <a:prstGeom prst="rect">
@@ -19632,7 +19974,7 @@
         </p:nvGraphicFramePr>
         <p:xfrm>
           <a:off x="640080" y="1143000"/>
-          <a:ext cx="7863840" cy="2304288"/>
+          <a:ext cx="7863840" cy="3072384"/>
         </p:xfrm>
         <a:graphic>
           <a:graphicData uri="http://schemas.openxmlformats.org/drawingml/2006/table">
@@ -19655,7 +19997,7 @@
                         <a:buNone/>
                       </a:pPr>
                       <a:r>
-                        <a:rPr lang="he-IL" altLang="en-US" sz="1600" b="1" dirty="0">
+                        <a:rPr lang="he-IL" altLang="en-US" sz="1300" b="1" dirty="0">
                           <a:solidFill>
                             <a:srgbClr val="FFFFFF"/>
                           </a:solidFill>
@@ -19665,7 +20007,7 @@
                         </a:rPr>
                         <a:t>דירוג</a:t>
                       </a:r>
-                      <a:endParaRPr lang="he-IL" sz="1600" dirty="0">
+                      <a:endParaRPr lang="he-IL" sz="1300" dirty="0">
                         <a:latin typeface="Arial" charset="0"/>
                         <a:ea typeface="Arial" charset="0"/>
                         <a:cs typeface="Arial" charset="0"/>
@@ -19723,7 +20065,7 @@
                         <a:buNone/>
                       </a:pPr>
                       <a:r>
-                        <a:rPr lang="he-IL" altLang="en-US" sz="1600" b="1" dirty="0">
+                        <a:rPr lang="he-IL" altLang="en-US" sz="1300" b="1" dirty="0">
                           <a:solidFill>
                             <a:srgbClr val="FFFFFF"/>
                           </a:solidFill>
@@ -19733,7 +20075,7 @@
                         </a:rPr>
                         <a:t>מודל</a:t>
                       </a:r>
-                      <a:endParaRPr lang="he-IL" sz="1600" dirty="0">
+                      <a:endParaRPr lang="he-IL" sz="1300" dirty="0">
                         <a:latin typeface="Arial" charset="0"/>
                         <a:ea typeface="Arial" charset="0"/>
                         <a:cs typeface="Arial" charset="0"/>
@@ -19791,7 +20133,7 @@
                         <a:buNone/>
                       </a:pPr>
                       <a:r>
-                        <a:rPr lang="he-IL" altLang="en-US" sz="1600" b="1" dirty="0">
+                        <a:rPr lang="he-IL" altLang="en-US" sz="1300" b="1" dirty="0">
                           <a:solidFill>
                             <a:srgbClr val="FFFFFF"/>
                           </a:solidFill>
@@ -19801,7 +20143,7 @@
                         </a:rPr>
                         <a:t>גישה</a:t>
                       </a:r>
-                      <a:endParaRPr lang="he-IL" sz="1600" dirty="0">
+                      <a:endParaRPr lang="he-IL" sz="1300" dirty="0">
                         <a:latin typeface="Arial" charset="0"/>
                         <a:ea typeface="Arial" charset="0"/>
                         <a:cs typeface="Arial" charset="0"/>
@@ -19859,7 +20201,7 @@
                         <a:buNone/>
                       </a:pPr>
                       <a:r>
-                        <a:rPr lang="en-US" sz="1600" b="1" dirty="0">
+                        <a:rPr lang="en-US" sz="1300" b="1" dirty="0">
                           <a:solidFill>
                             <a:srgbClr val="FFFFFF"/>
                           </a:solidFill>
@@ -19869,7 +20211,7 @@
                         </a:rPr>
                         <a:t>F1-Macro</a:t>
                       </a:r>
-                      <a:endParaRPr lang="en-US" sz="1600" dirty="0">
+                      <a:endParaRPr lang="en-US" sz="1300" dirty="0">
                         <a:latin typeface="Arial" charset="0"/>
                         <a:ea typeface="Arial" charset="0"/>
                         <a:cs typeface="Arial" charset="0"/>
@@ -19927,7 +20269,7 @@
                         <a:buNone/>
                       </a:pPr>
                       <a:r>
-                        <a:rPr lang="en-US" sz="1600" b="1" dirty="0">
+                        <a:rPr lang="en-US" sz="1300" b="1" dirty="0">
                           <a:solidFill>
                             <a:srgbClr val="FFFFFF"/>
                           </a:solidFill>
@@ -19937,7 +20279,7 @@
                         </a:rPr>
                         <a:t>Accuracy</a:t>
                       </a:r>
-                      <a:endParaRPr lang="en-US" sz="1600" dirty="0">
+                      <a:endParaRPr lang="en-US" sz="1300" dirty="0">
                         <a:latin typeface="Arial" charset="0"/>
                         <a:ea typeface="Arial" charset="0"/>
                         <a:cs typeface="Arial" charset="0"/>
@@ -19997,7 +20339,7 @@
                         <a:buNone/>
                       </a:pPr>
                       <a:r>
-                        <a:rPr lang="en-US" sz="1600" b="1" dirty="0">
+                        <a:rPr lang="en-US" sz="1300" b="1" dirty="0">
                           <a:solidFill>
                             <a:srgbClr val="1F2937"/>
                           </a:solidFill>
@@ -20007,7 +20349,7 @@
                         </a:rPr>
                         <a:t>1 🏆</a:t>
                       </a:r>
-                      <a:endParaRPr lang="en-US" sz="1600" dirty="0">
+                      <a:endParaRPr lang="en-US" sz="1300" dirty="0">
                         <a:latin typeface="Arial" charset="0"/>
                         <a:ea typeface="Arial" charset="0"/>
                         <a:cs typeface="Arial" charset="0"/>
@@ -20065,7 +20407,7 @@
                         <a:buNone/>
                       </a:pPr>
                       <a:r>
-                        <a:rPr lang="en-US" sz="1600" b="1" dirty="0">
+                        <a:rPr lang="en-US" sz="1300" b="1" dirty="0">
                           <a:solidFill>
                             <a:srgbClr val="1F2937"/>
                           </a:solidFill>
@@ -20075,7 +20417,7 @@
                         </a:rPr>
                         <a:t>BERTweet</a:t>
                       </a:r>
-                      <a:endParaRPr lang="en-US" sz="1600" dirty="0">
+                      <a:endParaRPr lang="en-US" sz="1300" dirty="0">
                         <a:latin typeface="Arial" charset="0"/>
                         <a:ea typeface="Arial" charset="0"/>
                         <a:cs typeface="Arial" charset="0"/>
@@ -20133,7 +20475,7 @@
                         <a:buNone/>
                       </a:pPr>
                       <a:r>
-                        <a:rPr lang="en-US" sz="1600" b="1" dirty="0">
+                        <a:rPr lang="en-US" sz="1300" b="1" dirty="0">
                           <a:solidFill>
                             <a:srgbClr val="1F2937"/>
                           </a:solidFill>
@@ -20143,7 +20485,7 @@
                         </a:rPr>
                         <a:t>Fine-Tuned</a:t>
                       </a:r>
-                      <a:endParaRPr lang="en-US" sz="1600" dirty="0">
+                      <a:endParaRPr lang="en-US" sz="1300" dirty="0">
                         <a:latin typeface="Arial" charset="0"/>
                         <a:ea typeface="Arial" charset="0"/>
                         <a:cs typeface="Arial" charset="0"/>
@@ -20201,7 +20543,7 @@
                         <a:buNone/>
                       </a:pPr>
                       <a:r>
-                        <a:rPr lang="en-US" sz="1600" b="1" dirty="0">
+                        <a:rPr lang="en-US" sz="1300" b="1" dirty="0">
                           <a:solidFill>
                             <a:srgbClr val="1F2937"/>
                           </a:solidFill>
@@ -20211,7 +20553,7 @@
                         </a:rPr>
                         <a:t>0.864</a:t>
                       </a:r>
-                      <a:endParaRPr lang="en-US" sz="1600" dirty="0">
+                      <a:endParaRPr lang="en-US" sz="1300" dirty="0">
                         <a:latin typeface="Arial" charset="0"/>
                         <a:ea typeface="Arial" charset="0"/>
                         <a:cs typeface="Arial" charset="0"/>
@@ -20269,7 +20611,7 @@
                         <a:buNone/>
                       </a:pPr>
                       <a:r>
-                        <a:rPr lang="en-US" sz="1600" b="1" dirty="0">
+                        <a:rPr lang="en-US" sz="1300" b="1" dirty="0">
                           <a:solidFill>
                             <a:srgbClr val="1F2937"/>
                           </a:solidFill>
@@ -20279,7 +20621,7 @@
                         </a:rPr>
                         <a:t>0.864</a:t>
                       </a:r>
-                      <a:endParaRPr lang="en-US" sz="1600" dirty="0">
+                      <a:endParaRPr lang="en-US" sz="1300" dirty="0">
                         <a:latin typeface="Arial" charset="0"/>
                         <a:ea typeface="Arial" charset="0"/>
                         <a:cs typeface="Arial" charset="0"/>
@@ -20339,7 +20681,7 @@
                         <a:buNone/>
                       </a:pPr>
                       <a:r>
-                        <a:rPr lang="en-US" sz="1600" dirty="0">
+                        <a:rPr lang="en-US" sz="1300" dirty="0">
                           <a:solidFill>
                             <a:srgbClr val="1F2937"/>
                           </a:solidFill>
@@ -20349,7 +20691,7 @@
                         </a:rPr>
                         <a:t>2</a:t>
                       </a:r>
-                      <a:endParaRPr lang="en-US" sz="1600" dirty="0">
+                      <a:endParaRPr lang="en-US" sz="1300" dirty="0">
                         <a:latin typeface="Arial" charset="0"/>
                         <a:ea typeface="Arial" charset="0"/>
                         <a:cs typeface="Arial" charset="0"/>
@@ -20407,7 +20749,7 @@
                         <a:buNone/>
                       </a:pPr>
                       <a:r>
-                        <a:rPr lang="en-US" sz="1600" dirty="0">
+                        <a:rPr lang="en-US" sz="1300" dirty="0">
                           <a:solidFill>
                             <a:srgbClr val="1F2937"/>
                           </a:solidFill>
@@ -20417,7 +20759,7 @@
                         </a:rPr>
                         <a:t>MiniLM</a:t>
                       </a:r>
-                      <a:endParaRPr lang="en-US" sz="1600" dirty="0">
+                      <a:endParaRPr lang="en-US" sz="1300" dirty="0">
                         <a:latin typeface="Arial" charset="0"/>
                         <a:ea typeface="Arial" charset="0"/>
                         <a:cs typeface="Arial" charset="0"/>
@@ -20475,7 +20817,7 @@
                         <a:buNone/>
                       </a:pPr>
                       <a:r>
-                        <a:rPr lang="en-US" sz="1600" dirty="0">
+                        <a:rPr lang="en-US" sz="1300" dirty="0">
                           <a:solidFill>
                             <a:srgbClr val="1F2937"/>
                           </a:solidFill>
@@ -20485,7 +20827,7 @@
                         </a:rPr>
                         <a:t>Fine-Tuned</a:t>
                       </a:r>
-                      <a:endParaRPr lang="en-US" sz="1600" dirty="0">
+                      <a:endParaRPr lang="en-US" sz="1300" dirty="0">
                         <a:latin typeface="Arial" charset="0"/>
                         <a:ea typeface="Arial" charset="0"/>
                         <a:cs typeface="Arial" charset="0"/>
@@ -20543,7 +20885,7 @@
                         <a:buNone/>
                       </a:pPr>
                       <a:r>
-                        <a:rPr lang="en-US" sz="1600" dirty="0">
+                        <a:rPr lang="en-US" sz="1300" dirty="0">
                           <a:solidFill>
                             <a:srgbClr val="1F2937"/>
                           </a:solidFill>
@@ -20553,7 +20895,7 @@
                         </a:rPr>
                         <a:t>0.860</a:t>
                       </a:r>
-                      <a:endParaRPr lang="en-US" sz="1600" dirty="0">
+                      <a:endParaRPr lang="en-US" sz="1300" dirty="0">
                         <a:latin typeface="Arial" charset="0"/>
                         <a:ea typeface="Arial" charset="0"/>
                         <a:cs typeface="Arial" charset="0"/>
@@ -20611,7 +20953,7 @@
                         <a:buNone/>
                       </a:pPr>
                       <a:r>
-                        <a:rPr lang="en-US" sz="1600" dirty="0">
+                        <a:rPr lang="en-US" sz="1300" dirty="0">
                           <a:solidFill>
                             <a:srgbClr val="1F2937"/>
                           </a:solidFill>
@@ -20621,7 +20963,7 @@
                         </a:rPr>
                         <a:t>0.860</a:t>
                       </a:r>
-                      <a:endParaRPr lang="en-US" sz="1600" dirty="0">
+                      <a:endParaRPr lang="en-US" sz="1300" dirty="0">
                         <a:latin typeface="Arial" charset="0"/>
                         <a:ea typeface="Arial" charset="0"/>
                         <a:cs typeface="Arial" charset="0"/>
@@ -20681,7 +21023,7 @@
                         <a:buNone/>
                       </a:pPr>
                       <a:r>
-                        <a:rPr lang="en-US" sz="1600" dirty="0">
+                        <a:rPr lang="en-US" sz="1300" dirty="0">
                           <a:solidFill>
                             <a:srgbClr val="1F2937"/>
                           </a:solidFill>
@@ -20691,7 +21033,7 @@
                         </a:rPr>
                         <a:t>3</a:t>
                       </a:r>
-                      <a:endParaRPr lang="en-US" sz="1600" dirty="0">
+                      <a:endParaRPr lang="en-US" sz="1300" dirty="0">
                         <a:latin typeface="Arial" charset="0"/>
                         <a:ea typeface="Arial" charset="0"/>
                         <a:cs typeface="Arial" charset="0"/>
@@ -20749,7 +21091,7 @@
                         <a:buNone/>
                       </a:pPr>
                       <a:r>
-                        <a:rPr lang="en-US" sz="1600" dirty="0">
+                        <a:rPr lang="en-US" sz="1300" dirty="0">
                           <a:solidFill>
                             <a:srgbClr val="1F2937"/>
                           </a:solidFill>
@@ -20759,7 +21101,7 @@
                         </a:rPr>
                         <a:t>RoBERTa</a:t>
                       </a:r>
-                      <a:endParaRPr lang="en-US" sz="1600" dirty="0">
+                      <a:endParaRPr lang="en-US" sz="1300" dirty="0">
                         <a:latin typeface="Arial" charset="0"/>
                         <a:ea typeface="Arial" charset="0"/>
                         <a:cs typeface="Arial" charset="0"/>
@@ -20817,7 +21159,7 @@
                         <a:buNone/>
                       </a:pPr>
                       <a:r>
-                        <a:rPr lang="en-US" sz="1600" dirty="0">
+                        <a:rPr lang="en-US" sz="1300" dirty="0">
                           <a:solidFill>
                             <a:srgbClr val="1F2937"/>
                           </a:solidFill>
@@ -20827,7 +21169,7 @@
                         </a:rPr>
                         <a:t>Fine-Tuned</a:t>
                       </a:r>
-                      <a:endParaRPr lang="en-US" sz="1600" dirty="0">
+                      <a:endParaRPr lang="en-US" sz="1300" dirty="0">
                         <a:latin typeface="Arial" charset="0"/>
                         <a:ea typeface="Arial" charset="0"/>
                         <a:cs typeface="Arial" charset="0"/>
@@ -20885,7 +21227,7 @@
                         <a:buNone/>
                       </a:pPr>
                       <a:r>
-                        <a:rPr lang="en-US" sz="1600" dirty="0">
+                        <a:rPr lang="en-US" sz="1300" dirty="0">
                           <a:solidFill>
                             <a:srgbClr val="1F2937"/>
                           </a:solidFill>
@@ -20895,7 +21237,7 @@
                         </a:rPr>
                         <a:t>0.859</a:t>
                       </a:r>
-                      <a:endParaRPr lang="en-US" sz="1600" dirty="0">
+                      <a:endParaRPr lang="en-US" sz="1300" dirty="0">
                         <a:latin typeface="Arial" charset="0"/>
                         <a:ea typeface="Arial" charset="0"/>
                         <a:cs typeface="Arial" charset="0"/>
@@ -20953,7 +21295,7 @@
                         <a:buNone/>
                       </a:pPr>
                       <a:r>
-                        <a:rPr lang="en-US" sz="1600" dirty="0">
+                        <a:rPr lang="en-US" sz="1300" dirty="0">
                           <a:solidFill>
                             <a:srgbClr val="1F2937"/>
                           </a:solidFill>
@@ -20963,7 +21305,7 @@
                         </a:rPr>
                         <a:t>0.860</a:t>
                       </a:r>
-                      <a:endParaRPr lang="en-US" sz="1600" dirty="0">
+                      <a:endParaRPr lang="en-US" sz="1300" dirty="0">
                         <a:latin typeface="Arial" charset="0"/>
                         <a:ea typeface="Arial" charset="0"/>
                         <a:cs typeface="Arial" charset="0"/>
@@ -21023,7 +21365,7 @@
                         <a:buNone/>
                       </a:pPr>
                       <a:r>
-                        <a:rPr lang="en-US" sz="1600" dirty="0">
+                        <a:rPr lang="en-US" sz="1300" dirty="0">
                           <a:solidFill>
                             <a:srgbClr val="1F2937"/>
                           </a:solidFill>
@@ -21033,7 +21375,7 @@
                         </a:rPr>
                         <a:t>4</a:t>
                       </a:r>
-                      <a:endParaRPr lang="en-US" sz="1600" dirty="0">
+                      <a:endParaRPr lang="en-US" sz="1300" dirty="0">
                         <a:latin typeface="Arial" charset="0"/>
                         <a:ea typeface="Arial" charset="0"/>
                         <a:cs typeface="Arial" charset="0"/>
@@ -21091,7 +21433,7 @@
                         <a:buNone/>
                       </a:pPr>
                       <a:r>
-                        <a:rPr lang="en-US" sz="1600" dirty="0">
+                        <a:rPr lang="en-US" sz="1300" dirty="0">
                           <a:solidFill>
                             <a:srgbClr val="1F2937"/>
                           </a:solidFill>
@@ -21101,7 +21443,7 @@
                         </a:rPr>
                         <a:t>ModernBERT</a:t>
                       </a:r>
-                      <a:endParaRPr lang="en-US" sz="1600" dirty="0">
+                      <a:endParaRPr lang="en-US" sz="1300" dirty="0">
                         <a:latin typeface="Arial" charset="0"/>
                         <a:ea typeface="Arial" charset="0"/>
                         <a:cs typeface="Arial" charset="0"/>
@@ -21159,7 +21501,7 @@
                         <a:buNone/>
                       </a:pPr>
                       <a:r>
-                        <a:rPr lang="en-US" sz="1600" dirty="0">
+                        <a:rPr lang="en-US" sz="1300" dirty="0">
                           <a:solidFill>
                             <a:srgbClr val="1F2937"/>
                           </a:solidFill>
@@ -21169,7 +21511,7 @@
                         </a:rPr>
                         <a:t>Fine-Tuned</a:t>
                       </a:r>
-                      <a:endParaRPr lang="en-US" sz="1600" dirty="0">
+                      <a:endParaRPr lang="en-US" sz="1300" dirty="0">
                         <a:latin typeface="Arial" charset="0"/>
                         <a:ea typeface="Arial" charset="0"/>
                         <a:cs typeface="Arial" charset="0"/>
@@ -21227,7 +21569,7 @@
                         <a:buNone/>
                       </a:pPr>
                       <a:r>
-                        <a:rPr lang="en-US" sz="1600" dirty="0">
+                        <a:rPr lang="en-US" sz="1300" dirty="0">
                           <a:solidFill>
                             <a:srgbClr val="1F2937"/>
                           </a:solidFill>
@@ -21237,7 +21579,7 @@
                         </a:rPr>
                         <a:t>0.833</a:t>
                       </a:r>
-                      <a:endParaRPr lang="en-US" sz="1600" dirty="0">
+                      <a:endParaRPr lang="en-US" sz="1300" dirty="0">
                         <a:latin typeface="Arial" charset="0"/>
                         <a:ea typeface="Arial" charset="0"/>
                         <a:cs typeface="Arial" charset="0"/>
@@ -21295,7 +21637,7 @@
                         <a:buNone/>
                       </a:pPr>
                       <a:r>
-                        <a:rPr lang="en-US" sz="1600" dirty="0">
+                        <a:rPr lang="en-US" sz="1300" dirty="0">
                           <a:solidFill>
                             <a:srgbClr val="1F2937"/>
                           </a:solidFill>
@@ -21305,7 +21647,7 @@
                         </a:rPr>
                         <a:t>0.833</a:t>
                       </a:r>
-                      <a:endParaRPr lang="en-US" sz="1600" dirty="0">
+                      <a:endParaRPr lang="en-US" sz="1300" dirty="0">
                         <a:latin typeface="Arial" charset="0"/>
                         <a:ea typeface="Arial" charset="0"/>
                         <a:cs typeface="Arial" charset="0"/>
@@ -21365,7 +21707,7 @@
                         <a:buNone/>
                       </a:pPr>
                       <a:r>
-                        <a:rPr lang="en-US" sz="1600" dirty="0">
+                        <a:rPr lang="en-US" sz="1300" dirty="0">
                           <a:solidFill>
                             <a:srgbClr val="1F2937"/>
                           </a:solidFill>
@@ -21375,7 +21717,7 @@
                         </a:rPr>
                         <a:t>5</a:t>
                       </a:r>
-                      <a:endParaRPr lang="en-US" sz="1600" dirty="0">
+                      <a:endParaRPr lang="en-US" sz="1300" dirty="0">
                         <a:latin typeface="Arial" charset="0"/>
                         <a:ea typeface="Arial" charset="0"/>
                         <a:cs typeface="Arial" charset="0"/>
@@ -21433,7 +21775,349 @@
                         <a:buNone/>
                       </a:pPr>
                       <a:r>
-                        <a:rPr lang="en-US" sz="1600" dirty="0">
+                        <a:rPr lang="en-US" sz="1300" dirty="0">
+                          <a:solidFill>
+                            <a:srgbClr val="1F2937"/>
+                          </a:solidFill>
+                          <a:latin typeface="Arial" pitchFamily="34" charset="0"/>
+                          <a:ea typeface="Arial" pitchFamily="34" charset="-122"/>
+                          <a:cs typeface="Arial" pitchFamily="34" charset="-120"/>
+                        </a:rPr>
+                        <a:t>GPT-OSS 120B</a:t>
+                      </a:r>
+                      <a:endParaRPr lang="en-US" sz="1300" dirty="0">
+                        <a:latin typeface="Arial" charset="0"/>
+                        <a:ea typeface="Arial" charset="0"/>
+                        <a:cs typeface="Arial" charset="0"/>
+                      </a:endParaRPr>
+                    </a:p>
+                  </a:txBody>
+                  <a:tcPr marL="91440" marR="91440" marT="45720" marB="45720" anchor="ctr">
+                    <a:lnL w="6350" cap="flat" cmpd="sng" algn="ctr">
+                      <a:solidFill>
+                        <a:srgbClr val="FFFFFF"/>
+                      </a:solidFill>
+                      <a:prstDash val="solid"/>
+                      <a:round/>
+                      <a:headEnd type="none" w="med" len="med"/>
+                      <a:tailEnd type="none" w="med" len="med"/>
+                    </a:lnL>
+                    <a:lnR w="6350" cap="flat" cmpd="sng" algn="ctr">
+                      <a:solidFill>
+                        <a:srgbClr val="FFFFFF"/>
+                      </a:solidFill>
+                      <a:prstDash val="solid"/>
+                      <a:round/>
+                      <a:headEnd type="none" w="med" len="med"/>
+                      <a:tailEnd type="none" w="med" len="med"/>
+                    </a:lnR>
+                    <a:lnT w="6350" cap="flat" cmpd="sng" algn="ctr">
+                      <a:solidFill>
+                        <a:srgbClr val="FFFFFF"/>
+                      </a:solidFill>
+                      <a:prstDash val="solid"/>
+                      <a:round/>
+                      <a:headEnd type="none" w="med" len="med"/>
+                      <a:tailEnd type="none" w="med" len="med"/>
+                    </a:lnT>
+                    <a:lnB w="6350" cap="flat" cmpd="sng" algn="ctr">
+                      <a:solidFill>
+                        <a:srgbClr val="FFFFFF"/>
+                      </a:solidFill>
+                      <a:prstDash val="solid"/>
+                      <a:round/>
+                      <a:headEnd type="none" w="med" len="med"/>
+                      <a:tailEnd type="none" w="med" len="med"/>
+                    </a:lnB>
+                    <a:solidFill>
+                      <a:srgbClr val="FDEBD0"/>
+                    </a:solidFill>
+                  </a:tcPr>
+                </a:tc>
+                <a:tc>
+                  <a:txBody>
+                    <a:bodyPr/>
+                    <a:lstStyle/>
+                    <a:p>
+                      <a:pPr algn="ctr" indent="0" marL="0">
+                        <a:buNone/>
+                      </a:pPr>
+                      <a:r>
+                        <a:rPr lang="en-US" sz="1300" dirty="0">
+                          <a:solidFill>
+                            <a:srgbClr val="1F2937"/>
+                          </a:solidFill>
+                          <a:latin typeface="Arial" pitchFamily="34" charset="0"/>
+                          <a:ea typeface="Arial" pitchFamily="34" charset="-122"/>
+                          <a:cs typeface="Arial" pitchFamily="34" charset="-120"/>
+                        </a:rPr>
+                        <a:t>Zero-Shot</a:t>
+                      </a:r>
+                      <a:endParaRPr lang="en-US" sz="1300" dirty="0">
+                        <a:latin typeface="Arial" charset="0"/>
+                        <a:ea typeface="Arial" charset="0"/>
+                        <a:cs typeface="Arial" charset="0"/>
+                      </a:endParaRPr>
+                    </a:p>
+                  </a:txBody>
+                  <a:tcPr marL="91440" marR="91440" marT="45720" marB="45720" anchor="ctr">
+                    <a:lnL w="6350" cap="flat" cmpd="sng" algn="ctr">
+                      <a:solidFill>
+                        <a:srgbClr val="FFFFFF"/>
+                      </a:solidFill>
+                      <a:prstDash val="solid"/>
+                      <a:round/>
+                      <a:headEnd type="none" w="med" len="med"/>
+                      <a:tailEnd type="none" w="med" len="med"/>
+                    </a:lnL>
+                    <a:lnR w="6350" cap="flat" cmpd="sng" algn="ctr">
+                      <a:solidFill>
+                        <a:srgbClr val="FFFFFF"/>
+                      </a:solidFill>
+                      <a:prstDash val="solid"/>
+                      <a:round/>
+                      <a:headEnd type="none" w="med" len="med"/>
+                      <a:tailEnd type="none" w="med" len="med"/>
+                    </a:lnR>
+                    <a:lnT w="6350" cap="flat" cmpd="sng" algn="ctr">
+                      <a:solidFill>
+                        <a:srgbClr val="FFFFFF"/>
+                      </a:solidFill>
+                      <a:prstDash val="solid"/>
+                      <a:round/>
+                      <a:headEnd type="none" w="med" len="med"/>
+                      <a:tailEnd type="none" w="med" len="med"/>
+                    </a:lnT>
+                    <a:lnB w="6350" cap="flat" cmpd="sng" algn="ctr">
+                      <a:solidFill>
+                        <a:srgbClr val="FFFFFF"/>
+                      </a:solidFill>
+                      <a:prstDash val="solid"/>
+                      <a:round/>
+                      <a:headEnd type="none" w="med" len="med"/>
+                      <a:tailEnd type="none" w="med" len="med"/>
+                    </a:lnB>
+                    <a:solidFill>
+                      <a:srgbClr val="FDEBD0"/>
+                    </a:solidFill>
+                  </a:tcPr>
+                </a:tc>
+                <a:tc>
+                  <a:txBody>
+                    <a:bodyPr/>
+                    <a:lstStyle/>
+                    <a:p>
+                      <a:pPr algn="ctr" indent="0" marL="0">
+                        <a:buNone/>
+                      </a:pPr>
+                      <a:r>
+                        <a:rPr lang="en-US" sz="1300" dirty="0">
+                          <a:solidFill>
+                            <a:srgbClr val="1F2937"/>
+                          </a:solidFill>
+                          <a:latin typeface="Arial" pitchFamily="34" charset="0"/>
+                          <a:ea typeface="Arial" pitchFamily="34" charset="-122"/>
+                          <a:cs typeface="Arial" pitchFamily="34" charset="-120"/>
+                        </a:rPr>
+                        <a:t>0.607</a:t>
+                      </a:r>
+                      <a:endParaRPr lang="en-US" sz="1300" dirty="0">
+                        <a:latin typeface="Arial" charset="0"/>
+                        <a:ea typeface="Arial" charset="0"/>
+                        <a:cs typeface="Arial" charset="0"/>
+                      </a:endParaRPr>
+                    </a:p>
+                  </a:txBody>
+                  <a:tcPr marL="91440" marR="91440" marT="45720" marB="45720" anchor="ctr">
+                    <a:lnL w="6350" cap="flat" cmpd="sng" algn="ctr">
+                      <a:solidFill>
+                        <a:srgbClr val="FFFFFF"/>
+                      </a:solidFill>
+                      <a:prstDash val="solid"/>
+                      <a:round/>
+                      <a:headEnd type="none" w="med" len="med"/>
+                      <a:tailEnd type="none" w="med" len="med"/>
+                    </a:lnL>
+                    <a:lnR w="6350" cap="flat" cmpd="sng" algn="ctr">
+                      <a:solidFill>
+                        <a:srgbClr val="FFFFFF"/>
+                      </a:solidFill>
+                      <a:prstDash val="solid"/>
+                      <a:round/>
+                      <a:headEnd type="none" w="med" len="med"/>
+                      <a:tailEnd type="none" w="med" len="med"/>
+                    </a:lnR>
+                    <a:lnT w="6350" cap="flat" cmpd="sng" algn="ctr">
+                      <a:solidFill>
+                        <a:srgbClr val="FFFFFF"/>
+                      </a:solidFill>
+                      <a:prstDash val="solid"/>
+                      <a:round/>
+                      <a:headEnd type="none" w="med" len="med"/>
+                      <a:tailEnd type="none" w="med" len="med"/>
+                    </a:lnT>
+                    <a:lnB w="6350" cap="flat" cmpd="sng" algn="ctr">
+                      <a:solidFill>
+                        <a:srgbClr val="FFFFFF"/>
+                      </a:solidFill>
+                      <a:prstDash val="solid"/>
+                      <a:round/>
+                      <a:headEnd type="none" w="med" len="med"/>
+                      <a:tailEnd type="none" w="med" len="med"/>
+                    </a:lnB>
+                    <a:solidFill>
+                      <a:srgbClr val="FDEBD0"/>
+                    </a:solidFill>
+                  </a:tcPr>
+                </a:tc>
+                <a:tc>
+                  <a:txBody>
+                    <a:bodyPr/>
+                    <a:lstStyle/>
+                    <a:p>
+                      <a:pPr algn="ctr" indent="0" marL="0">
+                        <a:buNone/>
+                      </a:pPr>
+                      <a:r>
+                        <a:rPr lang="en-US" sz="1300" dirty="0">
+                          <a:solidFill>
+                            <a:srgbClr val="1F2937"/>
+                          </a:solidFill>
+                          <a:latin typeface="Arial" pitchFamily="34" charset="0"/>
+                          <a:ea typeface="Arial" pitchFamily="34" charset="-122"/>
+                          <a:cs typeface="Arial" pitchFamily="34" charset="-120"/>
+                        </a:rPr>
+                        <a:t>0.607</a:t>
+                      </a:r>
+                      <a:endParaRPr lang="en-US" sz="1300" dirty="0">
+                        <a:latin typeface="Arial" charset="0"/>
+                        <a:ea typeface="Arial" charset="0"/>
+                        <a:cs typeface="Arial" charset="0"/>
+                      </a:endParaRPr>
+                    </a:p>
+                  </a:txBody>
+                  <a:tcPr marL="91440" marR="91440" marT="45720" marB="45720" anchor="ctr">
+                    <a:lnL w="6350" cap="flat" cmpd="sng" algn="ctr">
+                      <a:solidFill>
+                        <a:srgbClr val="FFFFFF"/>
+                      </a:solidFill>
+                      <a:prstDash val="solid"/>
+                      <a:round/>
+                      <a:headEnd type="none" w="med" len="med"/>
+                      <a:tailEnd type="none" w="med" len="med"/>
+                    </a:lnL>
+                    <a:lnR w="6350" cap="flat" cmpd="sng" algn="ctr">
+                      <a:solidFill>
+                        <a:srgbClr val="FFFFFF"/>
+                      </a:solidFill>
+                      <a:prstDash val="solid"/>
+                      <a:round/>
+                      <a:headEnd type="none" w="med" len="med"/>
+                      <a:tailEnd type="none" w="med" len="med"/>
+                    </a:lnR>
+                    <a:lnT w="6350" cap="flat" cmpd="sng" algn="ctr">
+                      <a:solidFill>
+                        <a:srgbClr val="FFFFFF"/>
+                      </a:solidFill>
+                      <a:prstDash val="solid"/>
+                      <a:round/>
+                      <a:headEnd type="none" w="med" len="med"/>
+                      <a:tailEnd type="none" w="med" len="med"/>
+                    </a:lnT>
+                    <a:lnB w="6350" cap="flat" cmpd="sng" algn="ctr">
+                      <a:solidFill>
+                        <a:srgbClr val="FFFFFF"/>
+                      </a:solidFill>
+                      <a:prstDash val="solid"/>
+                      <a:round/>
+                      <a:headEnd type="none" w="med" len="med"/>
+                      <a:tailEnd type="none" w="med" len="med"/>
+                    </a:lnB>
+                    <a:solidFill>
+                      <a:srgbClr val="FDEBD0"/>
+                    </a:solidFill>
+                  </a:tcPr>
+                </a:tc>
+              </a:tr>
+              <a:tr h="384048">
+                <a:tc>
+                  <a:txBody>
+                    <a:bodyPr/>
+                    <a:lstStyle/>
+                    <a:p>
+                      <a:pPr algn="ctr" indent="0" marL="0">
+                        <a:buNone/>
+                      </a:pPr>
+                      <a:r>
+                        <a:rPr lang="en-US" sz="1300" dirty="0">
+                          <a:solidFill>
+                            <a:srgbClr val="1F2937"/>
+                          </a:solidFill>
+                          <a:latin typeface="Arial" pitchFamily="34" charset="0"/>
+                          <a:ea typeface="Arial" pitchFamily="34" charset="-122"/>
+                          <a:cs typeface="Arial" pitchFamily="34" charset="-120"/>
+                        </a:rPr>
+                        <a:t>6</a:t>
+                      </a:r>
+                      <a:endParaRPr lang="en-US" sz="1300" dirty="0">
+                        <a:latin typeface="Arial" charset="0"/>
+                        <a:ea typeface="Arial" charset="0"/>
+                        <a:cs typeface="Arial" charset="0"/>
+                      </a:endParaRPr>
+                    </a:p>
+                  </a:txBody>
+                  <a:tcPr marL="91440" marR="91440" marT="45720" marB="45720" anchor="ctr">
+                    <a:lnL w="6350" cap="flat" cmpd="sng" algn="ctr">
+                      <a:solidFill>
+                        <a:srgbClr val="FFFFFF"/>
+                      </a:solidFill>
+                      <a:prstDash val="solid"/>
+                      <a:round/>
+                      <a:headEnd type="none" w="med" len="med"/>
+                      <a:tailEnd type="none" w="med" len="med"/>
+                    </a:lnL>
+                    <a:lnR w="6350" cap="flat" cmpd="sng" algn="ctr">
+                      <a:solidFill>
+                        <a:srgbClr val="FFFFFF"/>
+                      </a:solidFill>
+                      <a:prstDash val="solid"/>
+                      <a:round/>
+                      <a:headEnd type="none" w="med" len="med"/>
+                      <a:tailEnd type="none" w="med" len="med"/>
+                    </a:lnR>
+                    <a:lnT w="6350" cap="flat" cmpd="sng" algn="ctr">
+                      <a:solidFill>
+                        <a:srgbClr val="FFFFFF"/>
+                      </a:solidFill>
+                      <a:prstDash val="solid"/>
+                      <a:round/>
+                      <a:headEnd type="none" w="med" len="med"/>
+                      <a:tailEnd type="none" w="med" len="med"/>
+                    </a:lnT>
+                    <a:lnB w="6350" cap="flat" cmpd="sng" algn="ctr">
+                      <a:solidFill>
+                        <a:srgbClr val="FFFFFF"/>
+                      </a:solidFill>
+                      <a:prstDash val="solid"/>
+                      <a:round/>
+                      <a:headEnd type="none" w="med" len="med"/>
+                      <a:tailEnd type="none" w="med" len="med"/>
+                    </a:lnB>
+                    <a:solidFill>
+                      <a:srgbClr val="FDEBD0"/>
+                    </a:solidFill>
+                  </a:tcPr>
+                </a:tc>
+                <a:tc>
+                  <a:txBody>
+                    <a:bodyPr/>
+                    <a:lstStyle/>
+                    <a:p>
+                      <a:pPr algn="ctr" indent="0" marL="0">
+                        <a:buNone/>
+                      </a:pPr>
+                      <a:r>
+                        <a:rPr lang="en-US" sz="1300" dirty="0">
                           <a:solidFill>
                             <a:srgbClr val="1F2937"/>
                           </a:solidFill>
@@ -21443,7 +22127,7 @@
                         </a:rPr>
                         <a:t>Gemini 2.5 Flash</a:t>
                       </a:r>
-                      <a:endParaRPr lang="en-US" sz="1600" dirty="0">
+                      <a:endParaRPr lang="en-US" sz="1300" dirty="0">
                         <a:latin typeface="Arial" charset="0"/>
                         <a:ea typeface="Arial" charset="0"/>
                         <a:cs typeface="Arial" charset="0"/>
@@ -21501,7 +22185,7 @@
                         <a:buNone/>
                       </a:pPr>
                       <a:r>
-                        <a:rPr lang="en-US" sz="1600" dirty="0">
+                        <a:rPr lang="en-US" sz="1300" dirty="0">
                           <a:solidFill>
                             <a:srgbClr val="1F2937"/>
                           </a:solidFill>
@@ -21511,7 +22195,7 @@
                         </a:rPr>
                         <a:t>Zero-Shot</a:t>
                       </a:r>
-                      <a:endParaRPr lang="en-US" sz="1600" dirty="0">
+                      <a:endParaRPr lang="en-US" sz="1300" dirty="0">
                         <a:latin typeface="Arial" charset="0"/>
                         <a:ea typeface="Arial" charset="0"/>
                         <a:cs typeface="Arial" charset="0"/>
@@ -21569,7 +22253,7 @@
                         <a:buNone/>
                       </a:pPr>
                       <a:r>
-                        <a:rPr lang="en-US" sz="1600" dirty="0">
+                        <a:rPr lang="en-US" sz="1300" dirty="0">
                           <a:solidFill>
                             <a:srgbClr val="1F2937"/>
                           </a:solidFill>
@@ -21579,7 +22263,7 @@
                         </a:rPr>
                         <a:t>0.563</a:t>
                       </a:r>
-                      <a:endParaRPr lang="en-US" sz="1600" dirty="0">
+                      <a:endParaRPr lang="en-US" sz="1300" dirty="0">
                         <a:latin typeface="Arial" charset="0"/>
                         <a:ea typeface="Arial" charset="0"/>
                         <a:cs typeface="Arial" charset="0"/>
@@ -21637,7 +22321,7 @@
                         <a:buNone/>
                       </a:pPr>
                       <a:r>
-                        <a:rPr lang="en-US" sz="1600" dirty="0">
+                        <a:rPr lang="en-US" sz="1300" dirty="0">
                           <a:solidFill>
                             <a:srgbClr val="1F2937"/>
                           </a:solidFill>
@@ -21647,7 +22331,349 @@
                         </a:rPr>
                         <a:t>0.591</a:t>
                       </a:r>
-                      <a:endParaRPr lang="en-US" sz="1600" dirty="0">
+                      <a:endParaRPr lang="en-US" sz="1300" dirty="0">
+                        <a:latin typeface="Arial" charset="0"/>
+                        <a:ea typeface="Arial" charset="0"/>
+                        <a:cs typeface="Arial" charset="0"/>
+                      </a:endParaRPr>
+                    </a:p>
+                  </a:txBody>
+                  <a:tcPr marL="91440" marR="91440" marT="45720" marB="45720" anchor="ctr">
+                    <a:lnL w="6350" cap="flat" cmpd="sng" algn="ctr">
+                      <a:solidFill>
+                        <a:srgbClr val="FFFFFF"/>
+                      </a:solidFill>
+                      <a:prstDash val="solid"/>
+                      <a:round/>
+                      <a:headEnd type="none" w="med" len="med"/>
+                      <a:tailEnd type="none" w="med" len="med"/>
+                    </a:lnL>
+                    <a:lnR w="6350" cap="flat" cmpd="sng" algn="ctr">
+                      <a:solidFill>
+                        <a:srgbClr val="FFFFFF"/>
+                      </a:solidFill>
+                      <a:prstDash val="solid"/>
+                      <a:round/>
+                      <a:headEnd type="none" w="med" len="med"/>
+                      <a:tailEnd type="none" w="med" len="med"/>
+                    </a:lnR>
+                    <a:lnT w="6350" cap="flat" cmpd="sng" algn="ctr">
+                      <a:solidFill>
+                        <a:srgbClr val="FFFFFF"/>
+                      </a:solidFill>
+                      <a:prstDash val="solid"/>
+                      <a:round/>
+                      <a:headEnd type="none" w="med" len="med"/>
+                      <a:tailEnd type="none" w="med" len="med"/>
+                    </a:lnT>
+                    <a:lnB w="6350" cap="flat" cmpd="sng" algn="ctr">
+                      <a:solidFill>
+                        <a:srgbClr val="FFFFFF"/>
+                      </a:solidFill>
+                      <a:prstDash val="solid"/>
+                      <a:round/>
+                      <a:headEnd type="none" w="med" len="med"/>
+                      <a:tailEnd type="none" w="med" len="med"/>
+                    </a:lnB>
+                    <a:solidFill>
+                      <a:srgbClr val="FDEBD0"/>
+                    </a:solidFill>
+                  </a:tcPr>
+                </a:tc>
+              </a:tr>
+              <a:tr h="384048">
+                <a:tc>
+                  <a:txBody>
+                    <a:bodyPr/>
+                    <a:lstStyle/>
+                    <a:p>
+                      <a:pPr algn="ctr" indent="0" marL="0">
+                        <a:buNone/>
+                      </a:pPr>
+                      <a:r>
+                        <a:rPr lang="en-US" sz="1300" dirty="0">
+                          <a:solidFill>
+                            <a:srgbClr val="1F2937"/>
+                          </a:solidFill>
+                          <a:latin typeface="Arial" pitchFamily="34" charset="0"/>
+                          <a:ea typeface="Arial" pitchFamily="34" charset="-122"/>
+                          <a:cs typeface="Arial" pitchFamily="34" charset="-120"/>
+                        </a:rPr>
+                        <a:t>7</a:t>
+                      </a:r>
+                      <a:endParaRPr lang="en-US" sz="1300" dirty="0">
+                        <a:latin typeface="Arial" charset="0"/>
+                        <a:ea typeface="Arial" charset="0"/>
+                        <a:cs typeface="Arial" charset="0"/>
+                      </a:endParaRPr>
+                    </a:p>
+                  </a:txBody>
+                  <a:tcPr marL="91440" marR="91440" marT="45720" marB="45720" anchor="ctr">
+                    <a:lnL w="6350" cap="flat" cmpd="sng" algn="ctr">
+                      <a:solidFill>
+                        <a:srgbClr val="FFFFFF"/>
+                      </a:solidFill>
+                      <a:prstDash val="solid"/>
+                      <a:round/>
+                      <a:headEnd type="none" w="med" len="med"/>
+                      <a:tailEnd type="none" w="med" len="med"/>
+                    </a:lnL>
+                    <a:lnR w="6350" cap="flat" cmpd="sng" algn="ctr">
+                      <a:solidFill>
+                        <a:srgbClr val="FFFFFF"/>
+                      </a:solidFill>
+                      <a:prstDash val="solid"/>
+                      <a:round/>
+                      <a:headEnd type="none" w="med" len="med"/>
+                      <a:tailEnd type="none" w="med" len="med"/>
+                    </a:lnR>
+                    <a:lnT w="6350" cap="flat" cmpd="sng" algn="ctr">
+                      <a:solidFill>
+                        <a:srgbClr val="FFFFFF"/>
+                      </a:solidFill>
+                      <a:prstDash val="solid"/>
+                      <a:round/>
+                      <a:headEnd type="none" w="med" len="med"/>
+                      <a:tailEnd type="none" w="med" len="med"/>
+                    </a:lnT>
+                    <a:lnB w="6350" cap="flat" cmpd="sng" algn="ctr">
+                      <a:solidFill>
+                        <a:srgbClr val="FFFFFF"/>
+                      </a:solidFill>
+                      <a:prstDash val="solid"/>
+                      <a:round/>
+                      <a:headEnd type="none" w="med" len="med"/>
+                      <a:tailEnd type="none" w="med" len="med"/>
+                    </a:lnB>
+                    <a:solidFill>
+                      <a:srgbClr val="FDEBD0"/>
+                    </a:solidFill>
+                  </a:tcPr>
+                </a:tc>
+                <a:tc>
+                  <a:txBody>
+                    <a:bodyPr/>
+                    <a:lstStyle/>
+                    <a:p>
+                      <a:pPr algn="ctr" indent="0" marL="0">
+                        <a:buNone/>
+                      </a:pPr>
+                      <a:r>
+                        <a:rPr lang="en-US" sz="1300" dirty="0">
+                          <a:solidFill>
+                            <a:srgbClr val="1F2937"/>
+                          </a:solidFill>
+                          <a:latin typeface="Arial" pitchFamily="34" charset="0"/>
+                          <a:ea typeface="Arial" pitchFamily="34" charset="-122"/>
+                          <a:cs typeface="Arial" pitchFamily="34" charset="-120"/>
+                        </a:rPr>
+                        <a:t>Qwen3.6 27B</a:t>
+                      </a:r>
+                      <a:endParaRPr lang="en-US" sz="1300" dirty="0">
+                        <a:latin typeface="Arial" charset="0"/>
+                        <a:ea typeface="Arial" charset="0"/>
+                        <a:cs typeface="Arial" charset="0"/>
+                      </a:endParaRPr>
+                    </a:p>
+                  </a:txBody>
+                  <a:tcPr marL="91440" marR="91440" marT="45720" marB="45720" anchor="ctr">
+                    <a:lnL w="6350" cap="flat" cmpd="sng" algn="ctr">
+                      <a:solidFill>
+                        <a:srgbClr val="FFFFFF"/>
+                      </a:solidFill>
+                      <a:prstDash val="solid"/>
+                      <a:round/>
+                      <a:headEnd type="none" w="med" len="med"/>
+                      <a:tailEnd type="none" w="med" len="med"/>
+                    </a:lnL>
+                    <a:lnR w="6350" cap="flat" cmpd="sng" algn="ctr">
+                      <a:solidFill>
+                        <a:srgbClr val="FFFFFF"/>
+                      </a:solidFill>
+                      <a:prstDash val="solid"/>
+                      <a:round/>
+                      <a:headEnd type="none" w="med" len="med"/>
+                      <a:tailEnd type="none" w="med" len="med"/>
+                    </a:lnR>
+                    <a:lnT w="6350" cap="flat" cmpd="sng" algn="ctr">
+                      <a:solidFill>
+                        <a:srgbClr val="FFFFFF"/>
+                      </a:solidFill>
+                      <a:prstDash val="solid"/>
+                      <a:round/>
+                      <a:headEnd type="none" w="med" len="med"/>
+                      <a:tailEnd type="none" w="med" len="med"/>
+                    </a:lnT>
+                    <a:lnB w="6350" cap="flat" cmpd="sng" algn="ctr">
+                      <a:solidFill>
+                        <a:srgbClr val="FFFFFF"/>
+                      </a:solidFill>
+                      <a:prstDash val="solid"/>
+                      <a:round/>
+                      <a:headEnd type="none" w="med" len="med"/>
+                      <a:tailEnd type="none" w="med" len="med"/>
+                    </a:lnB>
+                    <a:solidFill>
+                      <a:srgbClr val="FDEBD0"/>
+                    </a:solidFill>
+                  </a:tcPr>
+                </a:tc>
+                <a:tc>
+                  <a:txBody>
+                    <a:bodyPr/>
+                    <a:lstStyle/>
+                    <a:p>
+                      <a:pPr algn="ctr" indent="0" marL="0">
+                        <a:buNone/>
+                      </a:pPr>
+                      <a:r>
+                        <a:rPr lang="en-US" sz="1300" dirty="0">
+                          <a:solidFill>
+                            <a:srgbClr val="1F2937"/>
+                          </a:solidFill>
+                          <a:latin typeface="Arial" pitchFamily="34" charset="0"/>
+                          <a:ea typeface="Arial" pitchFamily="34" charset="-122"/>
+                          <a:cs typeface="Arial" pitchFamily="34" charset="-120"/>
+                        </a:rPr>
+                        <a:t>Zero-Shot</a:t>
+                      </a:r>
+                      <a:endParaRPr lang="en-US" sz="1300" dirty="0">
+                        <a:latin typeface="Arial" charset="0"/>
+                        <a:ea typeface="Arial" charset="0"/>
+                        <a:cs typeface="Arial" charset="0"/>
+                      </a:endParaRPr>
+                    </a:p>
+                  </a:txBody>
+                  <a:tcPr marL="91440" marR="91440" marT="45720" marB="45720" anchor="ctr">
+                    <a:lnL w="6350" cap="flat" cmpd="sng" algn="ctr">
+                      <a:solidFill>
+                        <a:srgbClr val="FFFFFF"/>
+                      </a:solidFill>
+                      <a:prstDash val="solid"/>
+                      <a:round/>
+                      <a:headEnd type="none" w="med" len="med"/>
+                      <a:tailEnd type="none" w="med" len="med"/>
+                    </a:lnL>
+                    <a:lnR w="6350" cap="flat" cmpd="sng" algn="ctr">
+                      <a:solidFill>
+                        <a:srgbClr val="FFFFFF"/>
+                      </a:solidFill>
+                      <a:prstDash val="solid"/>
+                      <a:round/>
+                      <a:headEnd type="none" w="med" len="med"/>
+                      <a:tailEnd type="none" w="med" len="med"/>
+                    </a:lnR>
+                    <a:lnT w="6350" cap="flat" cmpd="sng" algn="ctr">
+                      <a:solidFill>
+                        <a:srgbClr val="FFFFFF"/>
+                      </a:solidFill>
+                      <a:prstDash val="solid"/>
+                      <a:round/>
+                      <a:headEnd type="none" w="med" len="med"/>
+                      <a:tailEnd type="none" w="med" len="med"/>
+                    </a:lnT>
+                    <a:lnB w="6350" cap="flat" cmpd="sng" algn="ctr">
+                      <a:solidFill>
+                        <a:srgbClr val="FFFFFF"/>
+                      </a:solidFill>
+                      <a:prstDash val="solid"/>
+                      <a:round/>
+                      <a:headEnd type="none" w="med" len="med"/>
+                      <a:tailEnd type="none" w="med" len="med"/>
+                    </a:lnB>
+                    <a:solidFill>
+                      <a:srgbClr val="FDEBD0"/>
+                    </a:solidFill>
+                  </a:tcPr>
+                </a:tc>
+                <a:tc>
+                  <a:txBody>
+                    <a:bodyPr/>
+                    <a:lstStyle/>
+                    <a:p>
+                      <a:pPr algn="ctr" indent="0" marL="0">
+                        <a:buNone/>
+                      </a:pPr>
+                      <a:r>
+                        <a:rPr lang="en-US" sz="1300" dirty="0">
+                          <a:solidFill>
+                            <a:srgbClr val="1F2937"/>
+                          </a:solidFill>
+                          <a:latin typeface="Arial" pitchFamily="34" charset="0"/>
+                          <a:ea typeface="Arial" pitchFamily="34" charset="-122"/>
+                          <a:cs typeface="Arial" pitchFamily="34" charset="-120"/>
+                        </a:rPr>
+                        <a:t>0.503</a:t>
+                      </a:r>
+                      <a:endParaRPr lang="en-US" sz="1300" dirty="0">
+                        <a:latin typeface="Arial" charset="0"/>
+                        <a:ea typeface="Arial" charset="0"/>
+                        <a:cs typeface="Arial" charset="0"/>
+                      </a:endParaRPr>
+                    </a:p>
+                  </a:txBody>
+                  <a:tcPr marL="91440" marR="91440" marT="45720" marB="45720" anchor="ctr">
+                    <a:lnL w="6350" cap="flat" cmpd="sng" algn="ctr">
+                      <a:solidFill>
+                        <a:srgbClr val="FFFFFF"/>
+                      </a:solidFill>
+                      <a:prstDash val="solid"/>
+                      <a:round/>
+                      <a:headEnd type="none" w="med" len="med"/>
+                      <a:tailEnd type="none" w="med" len="med"/>
+                    </a:lnL>
+                    <a:lnR w="6350" cap="flat" cmpd="sng" algn="ctr">
+                      <a:solidFill>
+                        <a:srgbClr val="FFFFFF"/>
+                      </a:solidFill>
+                      <a:prstDash val="solid"/>
+                      <a:round/>
+                      <a:headEnd type="none" w="med" len="med"/>
+                      <a:tailEnd type="none" w="med" len="med"/>
+                    </a:lnR>
+                    <a:lnT w="6350" cap="flat" cmpd="sng" algn="ctr">
+                      <a:solidFill>
+                        <a:srgbClr val="FFFFFF"/>
+                      </a:solidFill>
+                      <a:prstDash val="solid"/>
+                      <a:round/>
+                      <a:headEnd type="none" w="med" len="med"/>
+                      <a:tailEnd type="none" w="med" len="med"/>
+                    </a:lnT>
+                    <a:lnB w="6350" cap="flat" cmpd="sng" algn="ctr">
+                      <a:solidFill>
+                        <a:srgbClr val="FFFFFF"/>
+                      </a:solidFill>
+                      <a:prstDash val="solid"/>
+                      <a:round/>
+                      <a:headEnd type="none" w="med" len="med"/>
+                      <a:tailEnd type="none" w="med" len="med"/>
+                    </a:lnB>
+                    <a:solidFill>
+                      <a:srgbClr val="FDEBD0"/>
+                    </a:solidFill>
+                  </a:tcPr>
+                </a:tc>
+                <a:tc>
+                  <a:txBody>
+                    <a:bodyPr/>
+                    <a:lstStyle/>
+                    <a:p>
+                      <a:pPr algn="ctr" indent="0" marL="0">
+                        <a:buNone/>
+                      </a:pPr>
+                      <a:r>
+                        <a:rPr lang="en-US" sz="1300" dirty="0">
+                          <a:solidFill>
+                            <a:srgbClr val="1F2937"/>
+                          </a:solidFill>
+                          <a:latin typeface="Arial" pitchFamily="34" charset="0"/>
+                          <a:ea typeface="Arial" pitchFamily="34" charset="-122"/>
+                          <a:cs typeface="Arial" pitchFamily="34" charset="-120"/>
+                        </a:rPr>
+                        <a:t>0.536</a:t>
+                      </a:r>
+                      <a:endParaRPr lang="en-US" sz="1300" dirty="0">
                         <a:latin typeface="Arial" charset="0"/>
                         <a:ea typeface="Arial" charset="0"/>
                         <a:cs typeface="Arial" charset="0"/>
@@ -21709,7 +22735,7 @@
         </p:nvSpPr>
         <p:spPr>
           <a:xfrm>
-            <a:off x="640080" y="3511296"/>
+            <a:off x="640080" y="4279392"/>
             <a:ext cx="7863840" cy="320040"/>
           </a:xfrm>
           <a:prstGeom prst="rect">
@@ -21950,7 +22976,7 @@
         </p:nvGraphicFramePr>
         <p:xfrm>
           <a:off x="640080" y="1143000"/>
-          <a:ext cx="7863840" cy="2304288"/>
+          <a:ext cx="7863840" cy="3072384"/>
         </p:xfrm>
         <a:graphic>
           <a:graphicData uri="http://schemas.openxmlformats.org/drawingml/2006/table">
@@ -21973,7 +22999,7 @@
                         <a:buNone/>
                       </a:pPr>
                       <a:r>
-                        <a:rPr lang="he-IL" altLang="en-US" sz="1600" b="1" dirty="0">
+                        <a:rPr lang="he-IL" altLang="en-US" sz="1300" b="1" dirty="0">
                           <a:solidFill>
                             <a:srgbClr val="FFFFFF"/>
                           </a:solidFill>
@@ -21983,7 +23009,7 @@
                         </a:rPr>
                         <a:t>דירוג</a:t>
                       </a:r>
-                      <a:endParaRPr lang="he-IL" sz="1600" dirty="0">
+                      <a:endParaRPr lang="he-IL" sz="1300" dirty="0">
                         <a:latin typeface="Arial" charset="0"/>
                         <a:ea typeface="Arial" charset="0"/>
                         <a:cs typeface="Arial" charset="0"/>
@@ -22041,7 +23067,7 @@
                         <a:buNone/>
                       </a:pPr>
                       <a:r>
-                        <a:rPr lang="he-IL" altLang="en-US" sz="1600" b="1" dirty="0">
+                        <a:rPr lang="he-IL" altLang="en-US" sz="1300" b="1" dirty="0">
                           <a:solidFill>
                             <a:srgbClr val="FFFFFF"/>
                           </a:solidFill>
@@ -22051,7 +23077,7 @@
                         </a:rPr>
                         <a:t>מודל</a:t>
                       </a:r>
-                      <a:endParaRPr lang="he-IL" sz="1600" dirty="0">
+                      <a:endParaRPr lang="he-IL" sz="1300" dirty="0">
                         <a:latin typeface="Arial" charset="0"/>
                         <a:ea typeface="Arial" charset="0"/>
                         <a:cs typeface="Arial" charset="0"/>
@@ -22109,7 +23135,7 @@
                         <a:buNone/>
                       </a:pPr>
                       <a:r>
-                        <a:rPr lang="he-IL" altLang="en-US" sz="1600" b="1" dirty="0">
+                        <a:rPr lang="he-IL" altLang="en-US" sz="1300" b="1" dirty="0">
                           <a:solidFill>
                             <a:srgbClr val="FFFFFF"/>
                           </a:solidFill>
@@ -22119,7 +23145,7 @@
                         </a:rPr>
                         <a:t>גישה</a:t>
                       </a:r>
-                      <a:endParaRPr lang="he-IL" sz="1600" dirty="0">
+                      <a:endParaRPr lang="he-IL" sz="1300" dirty="0">
                         <a:latin typeface="Arial" charset="0"/>
                         <a:ea typeface="Arial" charset="0"/>
                         <a:cs typeface="Arial" charset="0"/>
@@ -22177,7 +23203,7 @@
                         <a:buNone/>
                       </a:pPr>
                       <a:r>
-                        <a:rPr lang="en-US" sz="1600" b="1" dirty="0">
+                        <a:rPr lang="en-US" sz="1300" b="1" dirty="0">
                           <a:solidFill>
                             <a:srgbClr val="FFFFFF"/>
                           </a:solidFill>
@@ -22187,7 +23213,7 @@
                         </a:rPr>
                         <a:t>F1-Macro</a:t>
                       </a:r>
-                      <a:endParaRPr lang="en-US" sz="1600" dirty="0">
+                      <a:endParaRPr lang="en-US" sz="1300" dirty="0">
                         <a:latin typeface="Arial" charset="0"/>
                         <a:ea typeface="Arial" charset="0"/>
                         <a:cs typeface="Arial" charset="0"/>
@@ -22245,7 +23271,7 @@
                         <a:buNone/>
                       </a:pPr>
                       <a:r>
-                        <a:rPr lang="en-US" sz="1600" b="1" dirty="0">
+                        <a:rPr lang="en-US" sz="1300" b="1" dirty="0">
                           <a:solidFill>
                             <a:srgbClr val="FFFFFF"/>
                           </a:solidFill>
@@ -22255,7 +23281,7 @@
                         </a:rPr>
                         <a:t>Accuracy</a:t>
                       </a:r>
-                      <a:endParaRPr lang="en-US" sz="1600" dirty="0">
+                      <a:endParaRPr lang="en-US" sz="1300" dirty="0">
                         <a:latin typeface="Arial" charset="0"/>
                         <a:ea typeface="Arial" charset="0"/>
                         <a:cs typeface="Arial" charset="0"/>
@@ -22315,7 +23341,7 @@
                         <a:buNone/>
                       </a:pPr>
                       <a:r>
-                        <a:rPr lang="en-US" sz="1600" b="1" dirty="0">
+                        <a:rPr lang="en-US" sz="1300" b="1" dirty="0">
                           <a:solidFill>
                             <a:srgbClr val="1F2937"/>
                           </a:solidFill>
@@ -22325,7 +23351,7 @@
                         </a:rPr>
                         <a:t>1 🏆</a:t>
                       </a:r>
-                      <a:endParaRPr lang="en-US" sz="1600" dirty="0">
+                      <a:endParaRPr lang="en-US" sz="1300" dirty="0">
                         <a:latin typeface="Arial" charset="0"/>
                         <a:ea typeface="Arial" charset="0"/>
                         <a:cs typeface="Arial" charset="0"/>
@@ -22383,7 +23409,7 @@
                         <a:buNone/>
                       </a:pPr>
                       <a:r>
-                        <a:rPr lang="en-US" sz="1600" b="1" dirty="0">
+                        <a:rPr lang="en-US" sz="1300" b="1" dirty="0">
                           <a:solidFill>
                             <a:srgbClr val="1F2937"/>
                           </a:solidFill>
@@ -22393,7 +23419,7 @@
                         </a:rPr>
                         <a:t>BERTweet</a:t>
                       </a:r>
-                      <a:endParaRPr lang="en-US" sz="1600" dirty="0">
+                      <a:endParaRPr lang="en-US" sz="1300" dirty="0">
                         <a:latin typeface="Arial" charset="0"/>
                         <a:ea typeface="Arial" charset="0"/>
                         <a:cs typeface="Arial" charset="0"/>
@@ -22451,7 +23477,7 @@
                         <a:buNone/>
                       </a:pPr>
                       <a:r>
-                        <a:rPr lang="en-US" sz="1600" b="1" dirty="0">
+                        <a:rPr lang="en-US" sz="1300" b="1" dirty="0">
                           <a:solidFill>
                             <a:srgbClr val="1F2937"/>
                           </a:solidFill>
@@ -22461,7 +23487,7 @@
                         </a:rPr>
                         <a:t>Fine-Tuned</a:t>
                       </a:r>
-                      <a:endParaRPr lang="en-US" sz="1600" dirty="0">
+                      <a:endParaRPr lang="en-US" sz="1300" dirty="0">
                         <a:latin typeface="Arial" charset="0"/>
                         <a:ea typeface="Arial" charset="0"/>
                         <a:cs typeface="Arial" charset="0"/>
@@ -22519,7 +23545,7 @@
                         <a:buNone/>
                       </a:pPr>
                       <a:r>
-                        <a:rPr lang="en-US" sz="1600" b="1" dirty="0">
+                        <a:rPr lang="en-US" sz="1300" b="1" dirty="0">
                           <a:solidFill>
                             <a:srgbClr val="1F2937"/>
                           </a:solidFill>
@@ -22529,7 +23555,7 @@
                         </a:rPr>
                         <a:t>0.881</a:t>
                       </a:r>
-                      <a:endParaRPr lang="en-US" sz="1600" dirty="0">
+                      <a:endParaRPr lang="en-US" sz="1300" dirty="0">
                         <a:latin typeface="Arial" charset="0"/>
                         <a:ea typeface="Arial" charset="0"/>
                         <a:cs typeface="Arial" charset="0"/>
@@ -22587,7 +23613,7 @@
                         <a:buNone/>
                       </a:pPr>
                       <a:r>
-                        <a:rPr lang="en-US" sz="1600" b="1" dirty="0">
+                        <a:rPr lang="en-US" sz="1300" b="1" dirty="0">
                           <a:solidFill>
                             <a:srgbClr val="1F2937"/>
                           </a:solidFill>
@@ -22597,7 +23623,7 @@
                         </a:rPr>
                         <a:t>0.914</a:t>
                       </a:r>
-                      <a:endParaRPr lang="en-US" sz="1600" dirty="0">
+                      <a:endParaRPr lang="en-US" sz="1300" dirty="0">
                         <a:latin typeface="Arial" charset="0"/>
                         <a:ea typeface="Arial" charset="0"/>
                         <a:cs typeface="Arial" charset="0"/>
@@ -22657,7 +23683,7 @@
                         <a:buNone/>
                       </a:pPr>
                       <a:r>
-                        <a:rPr lang="en-US" sz="1600" dirty="0">
+                        <a:rPr lang="en-US" sz="1300" dirty="0">
                           <a:solidFill>
                             <a:srgbClr val="1F2937"/>
                           </a:solidFill>
@@ -22667,7 +23693,7 @@
                         </a:rPr>
                         <a:t>2</a:t>
                       </a:r>
-                      <a:endParaRPr lang="en-US" sz="1600" dirty="0">
+                      <a:endParaRPr lang="en-US" sz="1300" dirty="0">
                         <a:latin typeface="Arial" charset="0"/>
                         <a:ea typeface="Arial" charset="0"/>
                         <a:cs typeface="Arial" charset="0"/>
@@ -22725,7 +23751,7 @@
                         <a:buNone/>
                       </a:pPr>
                       <a:r>
-                        <a:rPr lang="en-US" sz="1600" dirty="0">
+                        <a:rPr lang="en-US" sz="1300" dirty="0">
                           <a:solidFill>
                             <a:srgbClr val="1F2937"/>
                           </a:solidFill>
@@ -22735,7 +23761,7 @@
                         </a:rPr>
                         <a:t>RoBERTa</a:t>
                       </a:r>
-                      <a:endParaRPr lang="en-US" sz="1600" dirty="0">
+                      <a:endParaRPr lang="en-US" sz="1300" dirty="0">
                         <a:latin typeface="Arial" charset="0"/>
                         <a:ea typeface="Arial" charset="0"/>
                         <a:cs typeface="Arial" charset="0"/>
@@ -22793,7 +23819,7 @@
                         <a:buNone/>
                       </a:pPr>
                       <a:r>
-                        <a:rPr lang="en-US" sz="1600" dirty="0">
+                        <a:rPr lang="en-US" sz="1300" dirty="0">
                           <a:solidFill>
                             <a:srgbClr val="1F2937"/>
                           </a:solidFill>
@@ -22803,7 +23829,7 @@
                         </a:rPr>
                         <a:t>Fine-Tuned</a:t>
                       </a:r>
-                      <a:endParaRPr lang="en-US" sz="1600" dirty="0">
+                      <a:endParaRPr lang="en-US" sz="1300" dirty="0">
                         <a:latin typeface="Arial" charset="0"/>
                         <a:ea typeface="Arial" charset="0"/>
                         <a:cs typeface="Arial" charset="0"/>
@@ -22861,7 +23887,7 @@
                         <a:buNone/>
                       </a:pPr>
                       <a:r>
-                        <a:rPr lang="en-US" sz="1600" dirty="0">
+                        <a:rPr lang="en-US" sz="1300" dirty="0">
                           <a:solidFill>
                             <a:srgbClr val="1F2937"/>
                           </a:solidFill>
@@ -22871,7 +23897,7 @@
                         </a:rPr>
                         <a:t>0.877</a:t>
                       </a:r>
-                      <a:endParaRPr lang="en-US" sz="1600" dirty="0">
+                      <a:endParaRPr lang="en-US" sz="1300" dirty="0">
                         <a:latin typeface="Arial" charset="0"/>
                         <a:ea typeface="Arial" charset="0"/>
                         <a:cs typeface="Arial" charset="0"/>
@@ -22929,7 +23955,7 @@
                         <a:buNone/>
                       </a:pPr>
                       <a:r>
-                        <a:rPr lang="en-US" sz="1600" dirty="0">
+                        <a:rPr lang="en-US" sz="1300" dirty="0">
                           <a:solidFill>
                             <a:srgbClr val="1F2937"/>
                           </a:solidFill>
@@ -22939,7 +23965,7 @@
                         </a:rPr>
                         <a:t>0.911</a:t>
                       </a:r>
-                      <a:endParaRPr lang="en-US" sz="1600" dirty="0">
+                      <a:endParaRPr lang="en-US" sz="1300" dirty="0">
                         <a:latin typeface="Arial" charset="0"/>
                         <a:ea typeface="Arial" charset="0"/>
                         <a:cs typeface="Arial" charset="0"/>
@@ -22999,7 +24025,7 @@
                         <a:buNone/>
                       </a:pPr>
                       <a:r>
-                        <a:rPr lang="en-US" sz="1600" dirty="0">
+                        <a:rPr lang="en-US" sz="1300" dirty="0">
                           <a:solidFill>
                             <a:srgbClr val="1F2937"/>
                           </a:solidFill>
@@ -23009,7 +24035,7 @@
                         </a:rPr>
                         <a:t>3</a:t>
                       </a:r>
-                      <a:endParaRPr lang="en-US" sz="1600" dirty="0">
+                      <a:endParaRPr lang="en-US" sz="1300" dirty="0">
                         <a:latin typeface="Arial" charset="0"/>
                         <a:ea typeface="Arial" charset="0"/>
                         <a:cs typeface="Arial" charset="0"/>
@@ -23067,7 +24093,7 @@
                         <a:buNone/>
                       </a:pPr>
                       <a:r>
-                        <a:rPr lang="en-US" sz="1600" dirty="0">
+                        <a:rPr lang="en-US" sz="1300" dirty="0">
                           <a:solidFill>
                             <a:srgbClr val="1F2937"/>
                           </a:solidFill>
@@ -23077,7 +24103,7 @@
                         </a:rPr>
                         <a:t>MiniLM</a:t>
                       </a:r>
-                      <a:endParaRPr lang="en-US" sz="1600" dirty="0">
+                      <a:endParaRPr lang="en-US" sz="1300" dirty="0">
                         <a:latin typeface="Arial" charset="0"/>
                         <a:ea typeface="Arial" charset="0"/>
                         <a:cs typeface="Arial" charset="0"/>
@@ -23135,7 +24161,7 @@
                         <a:buNone/>
                       </a:pPr>
                       <a:r>
-                        <a:rPr lang="en-US" sz="1600" dirty="0">
+                        <a:rPr lang="en-US" sz="1300" dirty="0">
                           <a:solidFill>
                             <a:srgbClr val="1F2937"/>
                           </a:solidFill>
@@ -23145,7 +24171,7 @@
                         </a:rPr>
                         <a:t>Fine-Tuned</a:t>
                       </a:r>
-                      <a:endParaRPr lang="en-US" sz="1600" dirty="0">
+                      <a:endParaRPr lang="en-US" sz="1300" dirty="0">
                         <a:latin typeface="Arial" charset="0"/>
                         <a:ea typeface="Arial" charset="0"/>
                         <a:cs typeface="Arial" charset="0"/>
@@ -23203,7 +24229,7 @@
                         <a:buNone/>
                       </a:pPr>
                       <a:r>
-                        <a:rPr lang="en-US" sz="1600" dirty="0">
+                        <a:rPr lang="en-US" sz="1300" dirty="0">
                           <a:solidFill>
                             <a:srgbClr val="1F2937"/>
                           </a:solidFill>
@@ -23213,7 +24239,7 @@
                         </a:rPr>
                         <a:t>0.859</a:t>
                       </a:r>
-                      <a:endParaRPr lang="en-US" sz="1600" dirty="0">
+                      <a:endParaRPr lang="en-US" sz="1300" dirty="0">
                         <a:latin typeface="Arial" charset="0"/>
                         <a:ea typeface="Arial" charset="0"/>
                         <a:cs typeface="Arial" charset="0"/>
@@ -23271,7 +24297,7 @@
                         <a:buNone/>
                       </a:pPr>
                       <a:r>
-                        <a:rPr lang="en-US" sz="1600" dirty="0">
+                        <a:rPr lang="en-US" sz="1300" dirty="0">
                           <a:solidFill>
                             <a:srgbClr val="1F2937"/>
                           </a:solidFill>
@@ -23281,7 +24307,7 @@
                         </a:rPr>
                         <a:t>0.897</a:t>
                       </a:r>
-                      <a:endParaRPr lang="en-US" sz="1600" dirty="0">
+                      <a:endParaRPr lang="en-US" sz="1300" dirty="0">
                         <a:latin typeface="Arial" charset="0"/>
                         <a:ea typeface="Arial" charset="0"/>
                         <a:cs typeface="Arial" charset="0"/>
@@ -23341,7 +24367,7 @@
                         <a:buNone/>
                       </a:pPr>
                       <a:r>
-                        <a:rPr lang="en-US" sz="1600" dirty="0">
+                        <a:rPr lang="en-US" sz="1300" dirty="0">
                           <a:solidFill>
                             <a:srgbClr val="1F2937"/>
                           </a:solidFill>
@@ -23351,7 +24377,7 @@
                         </a:rPr>
                         <a:t>4</a:t>
                       </a:r>
-                      <a:endParaRPr lang="en-US" sz="1600" dirty="0">
+                      <a:endParaRPr lang="en-US" sz="1300" dirty="0">
                         <a:latin typeface="Arial" charset="0"/>
                         <a:ea typeface="Arial" charset="0"/>
                         <a:cs typeface="Arial" charset="0"/>
@@ -23409,7 +24435,7 @@
                         <a:buNone/>
                       </a:pPr>
                       <a:r>
-                        <a:rPr lang="en-US" sz="1600" dirty="0">
+                        <a:rPr lang="en-US" sz="1300" dirty="0">
                           <a:solidFill>
                             <a:srgbClr val="1F2937"/>
                           </a:solidFill>
@@ -23419,7 +24445,7 @@
                         </a:rPr>
                         <a:t>ModernBERT</a:t>
                       </a:r>
-                      <a:endParaRPr lang="en-US" sz="1600" dirty="0">
+                      <a:endParaRPr lang="en-US" sz="1300" dirty="0">
                         <a:latin typeface="Arial" charset="0"/>
                         <a:ea typeface="Arial" charset="0"/>
                         <a:cs typeface="Arial" charset="0"/>
@@ -23477,7 +24503,7 @@
                         <a:buNone/>
                       </a:pPr>
                       <a:r>
-                        <a:rPr lang="en-US" sz="1600" dirty="0">
+                        <a:rPr lang="en-US" sz="1300" dirty="0">
                           <a:solidFill>
                             <a:srgbClr val="1F2937"/>
                           </a:solidFill>
@@ -23487,7 +24513,7 @@
                         </a:rPr>
                         <a:t>Fine-Tuned</a:t>
                       </a:r>
-                      <a:endParaRPr lang="en-US" sz="1600" dirty="0">
+                      <a:endParaRPr lang="en-US" sz="1300" dirty="0">
                         <a:latin typeface="Arial" charset="0"/>
                         <a:ea typeface="Arial" charset="0"/>
                         <a:cs typeface="Arial" charset="0"/>
@@ -23545,7 +24571,7 @@
                         <a:buNone/>
                       </a:pPr>
                       <a:r>
-                        <a:rPr lang="en-US" sz="1600" dirty="0">
+                        <a:rPr lang="en-US" sz="1300" dirty="0">
                           <a:solidFill>
                             <a:srgbClr val="1F2937"/>
                           </a:solidFill>
@@ -23555,7 +24581,7 @@
                         </a:rPr>
                         <a:t>0.839</a:t>
                       </a:r>
-                      <a:endParaRPr lang="en-US" sz="1600" dirty="0">
+                      <a:endParaRPr lang="en-US" sz="1300" dirty="0">
                         <a:latin typeface="Arial" charset="0"/>
                         <a:ea typeface="Arial" charset="0"/>
                         <a:cs typeface="Arial" charset="0"/>
@@ -23613,7 +24639,7 @@
                         <a:buNone/>
                       </a:pPr>
                       <a:r>
-                        <a:rPr lang="en-US" sz="1600" dirty="0">
+                        <a:rPr lang="en-US" sz="1300" dirty="0">
                           <a:solidFill>
                             <a:srgbClr val="1F2937"/>
                           </a:solidFill>
@@ -23623,7 +24649,7 @@
                         </a:rPr>
                         <a:t>0.884</a:t>
                       </a:r>
-                      <a:endParaRPr lang="en-US" sz="1600" dirty="0">
+                      <a:endParaRPr lang="en-US" sz="1300" dirty="0">
                         <a:latin typeface="Arial" charset="0"/>
                         <a:ea typeface="Arial" charset="0"/>
                         <a:cs typeface="Arial" charset="0"/>
@@ -23683,7 +24709,7 @@
                         <a:buNone/>
                       </a:pPr>
                       <a:r>
-                        <a:rPr lang="en-US" sz="1600" dirty="0">
+                        <a:rPr lang="en-US" sz="1300" dirty="0">
                           <a:solidFill>
                             <a:srgbClr val="1F2937"/>
                           </a:solidFill>
@@ -23693,7 +24719,7 @@
                         </a:rPr>
                         <a:t>5</a:t>
                       </a:r>
-                      <a:endParaRPr lang="en-US" sz="1600" dirty="0">
+                      <a:endParaRPr lang="en-US" sz="1300" dirty="0">
                         <a:latin typeface="Arial" charset="0"/>
                         <a:ea typeface="Arial" charset="0"/>
                         <a:cs typeface="Arial" charset="0"/>
@@ -23751,7 +24777,349 @@
                         <a:buNone/>
                       </a:pPr>
                       <a:r>
-                        <a:rPr lang="en-US" sz="1600" dirty="0">
+                        <a:rPr lang="en-US" sz="1300" dirty="0">
+                          <a:solidFill>
+                            <a:srgbClr val="1F2937"/>
+                          </a:solidFill>
+                          <a:latin typeface="Arial" pitchFamily="34" charset="0"/>
+                          <a:ea typeface="Arial" pitchFamily="34" charset="-122"/>
+                          <a:cs typeface="Arial" pitchFamily="34" charset="-120"/>
+                        </a:rPr>
+                        <a:t>GPT-OSS 120B</a:t>
+                      </a:r>
+                      <a:endParaRPr lang="en-US" sz="1300" dirty="0">
+                        <a:latin typeface="Arial" charset="0"/>
+                        <a:ea typeface="Arial" charset="0"/>
+                        <a:cs typeface="Arial" charset="0"/>
+                      </a:endParaRPr>
+                    </a:p>
+                  </a:txBody>
+                  <a:tcPr marL="91440" marR="91440" marT="45720" marB="45720" anchor="ctr">
+                    <a:lnL w="6350" cap="flat" cmpd="sng" algn="ctr">
+                      <a:solidFill>
+                        <a:srgbClr val="FFFFFF"/>
+                      </a:solidFill>
+                      <a:prstDash val="solid"/>
+                      <a:round/>
+                      <a:headEnd type="none" w="med" len="med"/>
+                      <a:tailEnd type="none" w="med" len="med"/>
+                    </a:lnL>
+                    <a:lnR w="6350" cap="flat" cmpd="sng" algn="ctr">
+                      <a:solidFill>
+                        <a:srgbClr val="FFFFFF"/>
+                      </a:solidFill>
+                      <a:prstDash val="solid"/>
+                      <a:round/>
+                      <a:headEnd type="none" w="med" len="med"/>
+                      <a:tailEnd type="none" w="med" len="med"/>
+                    </a:lnR>
+                    <a:lnT w="6350" cap="flat" cmpd="sng" algn="ctr">
+                      <a:solidFill>
+                        <a:srgbClr val="FFFFFF"/>
+                      </a:solidFill>
+                      <a:prstDash val="solid"/>
+                      <a:round/>
+                      <a:headEnd type="none" w="med" len="med"/>
+                      <a:tailEnd type="none" w="med" len="med"/>
+                    </a:lnT>
+                    <a:lnB w="6350" cap="flat" cmpd="sng" algn="ctr">
+                      <a:solidFill>
+                        <a:srgbClr val="FFFFFF"/>
+                      </a:solidFill>
+                      <a:prstDash val="solid"/>
+                      <a:round/>
+                      <a:headEnd type="none" w="med" len="med"/>
+                      <a:tailEnd type="none" w="med" len="med"/>
+                    </a:lnB>
+                    <a:solidFill>
+                      <a:srgbClr val="FDEBD0"/>
+                    </a:solidFill>
+                  </a:tcPr>
+                </a:tc>
+                <a:tc>
+                  <a:txBody>
+                    <a:bodyPr/>
+                    <a:lstStyle/>
+                    <a:p>
+                      <a:pPr algn="ctr" indent="0" marL="0">
+                        <a:buNone/>
+                      </a:pPr>
+                      <a:r>
+                        <a:rPr lang="en-US" sz="1300" dirty="0">
+                          <a:solidFill>
+                            <a:srgbClr val="1F2937"/>
+                          </a:solidFill>
+                          <a:latin typeface="Arial" pitchFamily="34" charset="0"/>
+                          <a:ea typeface="Arial" pitchFamily="34" charset="-122"/>
+                          <a:cs typeface="Arial" pitchFamily="34" charset="-120"/>
+                        </a:rPr>
+                        <a:t>Zero-Shot</a:t>
+                      </a:r>
+                      <a:endParaRPr lang="en-US" sz="1300" dirty="0">
+                        <a:latin typeface="Arial" charset="0"/>
+                        <a:ea typeface="Arial" charset="0"/>
+                        <a:cs typeface="Arial" charset="0"/>
+                      </a:endParaRPr>
+                    </a:p>
+                  </a:txBody>
+                  <a:tcPr marL="91440" marR="91440" marT="45720" marB="45720" anchor="ctr">
+                    <a:lnL w="6350" cap="flat" cmpd="sng" algn="ctr">
+                      <a:solidFill>
+                        <a:srgbClr val="FFFFFF"/>
+                      </a:solidFill>
+                      <a:prstDash val="solid"/>
+                      <a:round/>
+                      <a:headEnd type="none" w="med" len="med"/>
+                      <a:tailEnd type="none" w="med" len="med"/>
+                    </a:lnL>
+                    <a:lnR w="6350" cap="flat" cmpd="sng" algn="ctr">
+                      <a:solidFill>
+                        <a:srgbClr val="FFFFFF"/>
+                      </a:solidFill>
+                      <a:prstDash val="solid"/>
+                      <a:round/>
+                      <a:headEnd type="none" w="med" len="med"/>
+                      <a:tailEnd type="none" w="med" len="med"/>
+                    </a:lnR>
+                    <a:lnT w="6350" cap="flat" cmpd="sng" algn="ctr">
+                      <a:solidFill>
+                        <a:srgbClr val="FFFFFF"/>
+                      </a:solidFill>
+                      <a:prstDash val="solid"/>
+                      <a:round/>
+                      <a:headEnd type="none" w="med" len="med"/>
+                      <a:tailEnd type="none" w="med" len="med"/>
+                    </a:lnT>
+                    <a:lnB w="6350" cap="flat" cmpd="sng" algn="ctr">
+                      <a:solidFill>
+                        <a:srgbClr val="FFFFFF"/>
+                      </a:solidFill>
+                      <a:prstDash val="solid"/>
+                      <a:round/>
+                      <a:headEnd type="none" w="med" len="med"/>
+                      <a:tailEnd type="none" w="med" len="med"/>
+                    </a:lnB>
+                    <a:solidFill>
+                      <a:srgbClr val="FDEBD0"/>
+                    </a:solidFill>
+                  </a:tcPr>
+                </a:tc>
+                <a:tc>
+                  <a:txBody>
+                    <a:bodyPr/>
+                    <a:lstStyle/>
+                    <a:p>
+                      <a:pPr algn="ctr" indent="0" marL="0">
+                        <a:buNone/>
+                      </a:pPr>
+                      <a:r>
+                        <a:rPr lang="en-US" sz="1300" dirty="0">
+                          <a:solidFill>
+                            <a:srgbClr val="1F2937"/>
+                          </a:solidFill>
+                          <a:latin typeface="Arial" pitchFamily="34" charset="0"/>
+                          <a:ea typeface="Arial" pitchFamily="34" charset="-122"/>
+                          <a:cs typeface="Arial" pitchFamily="34" charset="-120"/>
+                        </a:rPr>
+                        <a:t>0.570</a:t>
+                      </a:r>
+                      <a:endParaRPr lang="en-US" sz="1300" dirty="0">
+                        <a:latin typeface="Arial" charset="0"/>
+                        <a:ea typeface="Arial" charset="0"/>
+                        <a:cs typeface="Arial" charset="0"/>
+                      </a:endParaRPr>
+                    </a:p>
+                  </a:txBody>
+                  <a:tcPr marL="91440" marR="91440" marT="45720" marB="45720" anchor="ctr">
+                    <a:lnL w="6350" cap="flat" cmpd="sng" algn="ctr">
+                      <a:solidFill>
+                        <a:srgbClr val="FFFFFF"/>
+                      </a:solidFill>
+                      <a:prstDash val="solid"/>
+                      <a:round/>
+                      <a:headEnd type="none" w="med" len="med"/>
+                      <a:tailEnd type="none" w="med" len="med"/>
+                    </a:lnL>
+                    <a:lnR w="6350" cap="flat" cmpd="sng" algn="ctr">
+                      <a:solidFill>
+                        <a:srgbClr val="FFFFFF"/>
+                      </a:solidFill>
+                      <a:prstDash val="solid"/>
+                      <a:round/>
+                      <a:headEnd type="none" w="med" len="med"/>
+                      <a:tailEnd type="none" w="med" len="med"/>
+                    </a:lnR>
+                    <a:lnT w="6350" cap="flat" cmpd="sng" algn="ctr">
+                      <a:solidFill>
+                        <a:srgbClr val="FFFFFF"/>
+                      </a:solidFill>
+                      <a:prstDash val="solid"/>
+                      <a:round/>
+                      <a:headEnd type="none" w="med" len="med"/>
+                      <a:tailEnd type="none" w="med" len="med"/>
+                    </a:lnT>
+                    <a:lnB w="6350" cap="flat" cmpd="sng" algn="ctr">
+                      <a:solidFill>
+                        <a:srgbClr val="FFFFFF"/>
+                      </a:solidFill>
+                      <a:prstDash val="solid"/>
+                      <a:round/>
+                      <a:headEnd type="none" w="med" len="med"/>
+                      <a:tailEnd type="none" w="med" len="med"/>
+                    </a:lnB>
+                    <a:solidFill>
+                      <a:srgbClr val="FDEBD0"/>
+                    </a:solidFill>
+                  </a:tcPr>
+                </a:tc>
+                <a:tc>
+                  <a:txBody>
+                    <a:bodyPr/>
+                    <a:lstStyle/>
+                    <a:p>
+                      <a:pPr algn="ctr" indent="0" marL="0">
+                        <a:buNone/>
+                      </a:pPr>
+                      <a:r>
+                        <a:rPr lang="en-US" sz="1300" dirty="0">
+                          <a:solidFill>
+                            <a:srgbClr val="1F2937"/>
+                          </a:solidFill>
+                          <a:latin typeface="Arial" pitchFamily="34" charset="0"/>
+                          <a:ea typeface="Arial" pitchFamily="34" charset="-122"/>
+                          <a:cs typeface="Arial" pitchFamily="34" charset="-120"/>
+                        </a:rPr>
+                        <a:t>0.668</a:t>
+                      </a:r>
+                      <a:endParaRPr lang="en-US" sz="1300" dirty="0">
+                        <a:latin typeface="Arial" charset="0"/>
+                        <a:ea typeface="Arial" charset="0"/>
+                        <a:cs typeface="Arial" charset="0"/>
+                      </a:endParaRPr>
+                    </a:p>
+                  </a:txBody>
+                  <a:tcPr marL="91440" marR="91440" marT="45720" marB="45720" anchor="ctr">
+                    <a:lnL w="6350" cap="flat" cmpd="sng" algn="ctr">
+                      <a:solidFill>
+                        <a:srgbClr val="FFFFFF"/>
+                      </a:solidFill>
+                      <a:prstDash val="solid"/>
+                      <a:round/>
+                      <a:headEnd type="none" w="med" len="med"/>
+                      <a:tailEnd type="none" w="med" len="med"/>
+                    </a:lnL>
+                    <a:lnR w="6350" cap="flat" cmpd="sng" algn="ctr">
+                      <a:solidFill>
+                        <a:srgbClr val="FFFFFF"/>
+                      </a:solidFill>
+                      <a:prstDash val="solid"/>
+                      <a:round/>
+                      <a:headEnd type="none" w="med" len="med"/>
+                      <a:tailEnd type="none" w="med" len="med"/>
+                    </a:lnR>
+                    <a:lnT w="6350" cap="flat" cmpd="sng" algn="ctr">
+                      <a:solidFill>
+                        <a:srgbClr val="FFFFFF"/>
+                      </a:solidFill>
+                      <a:prstDash val="solid"/>
+                      <a:round/>
+                      <a:headEnd type="none" w="med" len="med"/>
+                      <a:tailEnd type="none" w="med" len="med"/>
+                    </a:lnT>
+                    <a:lnB w="6350" cap="flat" cmpd="sng" algn="ctr">
+                      <a:solidFill>
+                        <a:srgbClr val="FFFFFF"/>
+                      </a:solidFill>
+                      <a:prstDash val="solid"/>
+                      <a:round/>
+                      <a:headEnd type="none" w="med" len="med"/>
+                      <a:tailEnd type="none" w="med" len="med"/>
+                    </a:lnB>
+                    <a:solidFill>
+                      <a:srgbClr val="FDEBD0"/>
+                    </a:solidFill>
+                  </a:tcPr>
+                </a:tc>
+              </a:tr>
+              <a:tr h="384048">
+                <a:tc>
+                  <a:txBody>
+                    <a:bodyPr/>
+                    <a:lstStyle/>
+                    <a:p>
+                      <a:pPr algn="ctr" indent="0" marL="0">
+                        <a:buNone/>
+                      </a:pPr>
+                      <a:r>
+                        <a:rPr lang="en-US" sz="1300" dirty="0">
+                          <a:solidFill>
+                            <a:srgbClr val="1F2937"/>
+                          </a:solidFill>
+                          <a:latin typeface="Arial" pitchFamily="34" charset="0"/>
+                          <a:ea typeface="Arial" pitchFamily="34" charset="-122"/>
+                          <a:cs typeface="Arial" pitchFamily="34" charset="-120"/>
+                        </a:rPr>
+                        <a:t>6</a:t>
+                      </a:r>
+                      <a:endParaRPr lang="en-US" sz="1300" dirty="0">
+                        <a:latin typeface="Arial" charset="0"/>
+                        <a:ea typeface="Arial" charset="0"/>
+                        <a:cs typeface="Arial" charset="0"/>
+                      </a:endParaRPr>
+                    </a:p>
+                  </a:txBody>
+                  <a:tcPr marL="91440" marR="91440" marT="45720" marB="45720" anchor="ctr">
+                    <a:lnL w="6350" cap="flat" cmpd="sng" algn="ctr">
+                      <a:solidFill>
+                        <a:srgbClr val="FFFFFF"/>
+                      </a:solidFill>
+                      <a:prstDash val="solid"/>
+                      <a:round/>
+                      <a:headEnd type="none" w="med" len="med"/>
+                      <a:tailEnd type="none" w="med" len="med"/>
+                    </a:lnL>
+                    <a:lnR w="6350" cap="flat" cmpd="sng" algn="ctr">
+                      <a:solidFill>
+                        <a:srgbClr val="FFFFFF"/>
+                      </a:solidFill>
+                      <a:prstDash val="solid"/>
+                      <a:round/>
+                      <a:headEnd type="none" w="med" len="med"/>
+                      <a:tailEnd type="none" w="med" len="med"/>
+                    </a:lnR>
+                    <a:lnT w="6350" cap="flat" cmpd="sng" algn="ctr">
+                      <a:solidFill>
+                        <a:srgbClr val="FFFFFF"/>
+                      </a:solidFill>
+                      <a:prstDash val="solid"/>
+                      <a:round/>
+                      <a:headEnd type="none" w="med" len="med"/>
+                      <a:tailEnd type="none" w="med" len="med"/>
+                    </a:lnT>
+                    <a:lnB w="6350" cap="flat" cmpd="sng" algn="ctr">
+                      <a:solidFill>
+                        <a:srgbClr val="FFFFFF"/>
+                      </a:solidFill>
+                      <a:prstDash val="solid"/>
+                      <a:round/>
+                      <a:headEnd type="none" w="med" len="med"/>
+                      <a:tailEnd type="none" w="med" len="med"/>
+                    </a:lnB>
+                    <a:solidFill>
+                      <a:srgbClr val="FDEBD0"/>
+                    </a:solidFill>
+                  </a:tcPr>
+                </a:tc>
+                <a:tc>
+                  <a:txBody>
+                    <a:bodyPr/>
+                    <a:lstStyle/>
+                    <a:p>
+                      <a:pPr algn="ctr" indent="0" marL="0">
+                        <a:buNone/>
+                      </a:pPr>
+                      <a:r>
+                        <a:rPr lang="en-US" sz="1300" dirty="0">
                           <a:solidFill>
                             <a:srgbClr val="1F2937"/>
                           </a:solidFill>
@@ -23761,7 +25129,7 @@
                         </a:rPr>
                         <a:t>Gemini 2.5 Flash</a:t>
                       </a:r>
-                      <a:endParaRPr lang="en-US" sz="1600" dirty="0">
+                      <a:endParaRPr lang="en-US" sz="1300" dirty="0">
                         <a:latin typeface="Arial" charset="0"/>
                         <a:ea typeface="Arial" charset="0"/>
                         <a:cs typeface="Arial" charset="0"/>
@@ -23819,7 +25187,7 @@
                         <a:buNone/>
                       </a:pPr>
                       <a:r>
-                        <a:rPr lang="en-US" sz="1600" dirty="0">
+                        <a:rPr lang="en-US" sz="1300" dirty="0">
                           <a:solidFill>
                             <a:srgbClr val="1F2937"/>
                           </a:solidFill>
@@ -23829,7 +25197,7 @@
                         </a:rPr>
                         <a:t>Zero-Shot</a:t>
                       </a:r>
-                      <a:endParaRPr lang="en-US" sz="1600" dirty="0">
+                      <a:endParaRPr lang="en-US" sz="1300" dirty="0">
                         <a:latin typeface="Arial" charset="0"/>
                         <a:ea typeface="Arial" charset="0"/>
                         <a:cs typeface="Arial" charset="0"/>
@@ -23887,7 +25255,7 @@
                         <a:buNone/>
                       </a:pPr>
                       <a:r>
-                        <a:rPr lang="en-US" sz="1600" dirty="0">
+                        <a:rPr lang="en-US" sz="1300" dirty="0">
                           <a:solidFill>
                             <a:srgbClr val="1F2937"/>
                           </a:solidFill>
@@ -23897,7 +25265,7 @@
                         </a:rPr>
                         <a:t>0.501</a:t>
                       </a:r>
-                      <a:endParaRPr lang="en-US" sz="1600" dirty="0">
+                      <a:endParaRPr lang="en-US" sz="1300" dirty="0">
                         <a:latin typeface="Arial" charset="0"/>
                         <a:ea typeface="Arial" charset="0"/>
                         <a:cs typeface="Arial" charset="0"/>
@@ -23955,7 +25323,7 @@
                         <a:buNone/>
                       </a:pPr>
                       <a:r>
-                        <a:rPr lang="en-US" sz="1600" dirty="0">
+                        <a:rPr lang="en-US" sz="1300" dirty="0">
                           <a:solidFill>
                             <a:srgbClr val="1F2937"/>
                           </a:solidFill>
@@ -23965,7 +25333,349 @@
                         </a:rPr>
                         <a:t>0.726</a:t>
                       </a:r>
-                      <a:endParaRPr lang="en-US" sz="1600" dirty="0">
+                      <a:endParaRPr lang="en-US" sz="1300" dirty="0">
+                        <a:latin typeface="Arial" charset="0"/>
+                        <a:ea typeface="Arial" charset="0"/>
+                        <a:cs typeface="Arial" charset="0"/>
+                      </a:endParaRPr>
+                    </a:p>
+                  </a:txBody>
+                  <a:tcPr marL="91440" marR="91440" marT="45720" marB="45720" anchor="ctr">
+                    <a:lnL w="6350" cap="flat" cmpd="sng" algn="ctr">
+                      <a:solidFill>
+                        <a:srgbClr val="FFFFFF"/>
+                      </a:solidFill>
+                      <a:prstDash val="solid"/>
+                      <a:round/>
+                      <a:headEnd type="none" w="med" len="med"/>
+                      <a:tailEnd type="none" w="med" len="med"/>
+                    </a:lnL>
+                    <a:lnR w="6350" cap="flat" cmpd="sng" algn="ctr">
+                      <a:solidFill>
+                        <a:srgbClr val="FFFFFF"/>
+                      </a:solidFill>
+                      <a:prstDash val="solid"/>
+                      <a:round/>
+                      <a:headEnd type="none" w="med" len="med"/>
+                      <a:tailEnd type="none" w="med" len="med"/>
+                    </a:lnR>
+                    <a:lnT w="6350" cap="flat" cmpd="sng" algn="ctr">
+                      <a:solidFill>
+                        <a:srgbClr val="FFFFFF"/>
+                      </a:solidFill>
+                      <a:prstDash val="solid"/>
+                      <a:round/>
+                      <a:headEnd type="none" w="med" len="med"/>
+                      <a:tailEnd type="none" w="med" len="med"/>
+                    </a:lnT>
+                    <a:lnB w="6350" cap="flat" cmpd="sng" algn="ctr">
+                      <a:solidFill>
+                        <a:srgbClr val="FFFFFF"/>
+                      </a:solidFill>
+                      <a:prstDash val="solid"/>
+                      <a:round/>
+                      <a:headEnd type="none" w="med" len="med"/>
+                      <a:tailEnd type="none" w="med" len="med"/>
+                    </a:lnB>
+                    <a:solidFill>
+                      <a:srgbClr val="FDEBD0"/>
+                    </a:solidFill>
+                  </a:tcPr>
+                </a:tc>
+              </a:tr>
+              <a:tr h="384048">
+                <a:tc>
+                  <a:txBody>
+                    <a:bodyPr/>
+                    <a:lstStyle/>
+                    <a:p>
+                      <a:pPr algn="ctr" indent="0" marL="0">
+                        <a:buNone/>
+                      </a:pPr>
+                      <a:r>
+                        <a:rPr lang="en-US" sz="1300" dirty="0">
+                          <a:solidFill>
+                            <a:srgbClr val="1F2937"/>
+                          </a:solidFill>
+                          <a:latin typeface="Arial" pitchFamily="34" charset="0"/>
+                          <a:ea typeface="Arial" pitchFamily="34" charset="-122"/>
+                          <a:cs typeface="Arial" pitchFamily="34" charset="-120"/>
+                        </a:rPr>
+                        <a:t>7</a:t>
+                      </a:r>
+                      <a:endParaRPr lang="en-US" sz="1300" dirty="0">
+                        <a:latin typeface="Arial" charset="0"/>
+                        <a:ea typeface="Arial" charset="0"/>
+                        <a:cs typeface="Arial" charset="0"/>
+                      </a:endParaRPr>
+                    </a:p>
+                  </a:txBody>
+                  <a:tcPr marL="91440" marR="91440" marT="45720" marB="45720" anchor="ctr">
+                    <a:lnL w="6350" cap="flat" cmpd="sng" algn="ctr">
+                      <a:solidFill>
+                        <a:srgbClr val="FFFFFF"/>
+                      </a:solidFill>
+                      <a:prstDash val="solid"/>
+                      <a:round/>
+                      <a:headEnd type="none" w="med" len="med"/>
+                      <a:tailEnd type="none" w="med" len="med"/>
+                    </a:lnL>
+                    <a:lnR w="6350" cap="flat" cmpd="sng" algn="ctr">
+                      <a:solidFill>
+                        <a:srgbClr val="FFFFFF"/>
+                      </a:solidFill>
+                      <a:prstDash val="solid"/>
+                      <a:round/>
+                      <a:headEnd type="none" w="med" len="med"/>
+                      <a:tailEnd type="none" w="med" len="med"/>
+                    </a:lnR>
+                    <a:lnT w="6350" cap="flat" cmpd="sng" algn="ctr">
+                      <a:solidFill>
+                        <a:srgbClr val="FFFFFF"/>
+                      </a:solidFill>
+                      <a:prstDash val="solid"/>
+                      <a:round/>
+                      <a:headEnd type="none" w="med" len="med"/>
+                      <a:tailEnd type="none" w="med" len="med"/>
+                    </a:lnT>
+                    <a:lnB w="6350" cap="flat" cmpd="sng" algn="ctr">
+                      <a:solidFill>
+                        <a:srgbClr val="FFFFFF"/>
+                      </a:solidFill>
+                      <a:prstDash val="solid"/>
+                      <a:round/>
+                      <a:headEnd type="none" w="med" len="med"/>
+                      <a:tailEnd type="none" w="med" len="med"/>
+                    </a:lnB>
+                    <a:solidFill>
+                      <a:srgbClr val="FDEBD0"/>
+                    </a:solidFill>
+                  </a:tcPr>
+                </a:tc>
+                <a:tc>
+                  <a:txBody>
+                    <a:bodyPr/>
+                    <a:lstStyle/>
+                    <a:p>
+                      <a:pPr algn="ctr" indent="0" marL="0">
+                        <a:buNone/>
+                      </a:pPr>
+                      <a:r>
+                        <a:rPr lang="en-US" sz="1300" dirty="0">
+                          <a:solidFill>
+                            <a:srgbClr val="1F2937"/>
+                          </a:solidFill>
+                          <a:latin typeface="Arial" pitchFamily="34" charset="0"/>
+                          <a:ea typeface="Arial" pitchFamily="34" charset="-122"/>
+                          <a:cs typeface="Arial" pitchFamily="34" charset="-120"/>
+                        </a:rPr>
+                        <a:t>Qwen3.6 27B</a:t>
+                      </a:r>
+                      <a:endParaRPr lang="en-US" sz="1300" dirty="0">
+                        <a:latin typeface="Arial" charset="0"/>
+                        <a:ea typeface="Arial" charset="0"/>
+                        <a:cs typeface="Arial" charset="0"/>
+                      </a:endParaRPr>
+                    </a:p>
+                  </a:txBody>
+                  <a:tcPr marL="91440" marR="91440" marT="45720" marB="45720" anchor="ctr">
+                    <a:lnL w="6350" cap="flat" cmpd="sng" algn="ctr">
+                      <a:solidFill>
+                        <a:srgbClr val="FFFFFF"/>
+                      </a:solidFill>
+                      <a:prstDash val="solid"/>
+                      <a:round/>
+                      <a:headEnd type="none" w="med" len="med"/>
+                      <a:tailEnd type="none" w="med" len="med"/>
+                    </a:lnL>
+                    <a:lnR w="6350" cap="flat" cmpd="sng" algn="ctr">
+                      <a:solidFill>
+                        <a:srgbClr val="FFFFFF"/>
+                      </a:solidFill>
+                      <a:prstDash val="solid"/>
+                      <a:round/>
+                      <a:headEnd type="none" w="med" len="med"/>
+                      <a:tailEnd type="none" w="med" len="med"/>
+                    </a:lnR>
+                    <a:lnT w="6350" cap="flat" cmpd="sng" algn="ctr">
+                      <a:solidFill>
+                        <a:srgbClr val="FFFFFF"/>
+                      </a:solidFill>
+                      <a:prstDash val="solid"/>
+                      <a:round/>
+                      <a:headEnd type="none" w="med" len="med"/>
+                      <a:tailEnd type="none" w="med" len="med"/>
+                    </a:lnT>
+                    <a:lnB w="6350" cap="flat" cmpd="sng" algn="ctr">
+                      <a:solidFill>
+                        <a:srgbClr val="FFFFFF"/>
+                      </a:solidFill>
+                      <a:prstDash val="solid"/>
+                      <a:round/>
+                      <a:headEnd type="none" w="med" len="med"/>
+                      <a:tailEnd type="none" w="med" len="med"/>
+                    </a:lnB>
+                    <a:solidFill>
+                      <a:srgbClr val="FDEBD0"/>
+                    </a:solidFill>
+                  </a:tcPr>
+                </a:tc>
+                <a:tc>
+                  <a:txBody>
+                    <a:bodyPr/>
+                    <a:lstStyle/>
+                    <a:p>
+                      <a:pPr algn="ctr" indent="0" marL="0">
+                        <a:buNone/>
+                      </a:pPr>
+                      <a:r>
+                        <a:rPr lang="en-US" sz="1300" dirty="0">
+                          <a:solidFill>
+                            <a:srgbClr val="1F2937"/>
+                          </a:solidFill>
+                          <a:latin typeface="Arial" pitchFamily="34" charset="0"/>
+                          <a:ea typeface="Arial" pitchFamily="34" charset="-122"/>
+                          <a:cs typeface="Arial" pitchFamily="34" charset="-120"/>
+                        </a:rPr>
+                        <a:t>Zero-Shot</a:t>
+                      </a:r>
+                      <a:endParaRPr lang="en-US" sz="1300" dirty="0">
+                        <a:latin typeface="Arial" charset="0"/>
+                        <a:ea typeface="Arial" charset="0"/>
+                        <a:cs typeface="Arial" charset="0"/>
+                      </a:endParaRPr>
+                    </a:p>
+                  </a:txBody>
+                  <a:tcPr marL="91440" marR="91440" marT="45720" marB="45720" anchor="ctr">
+                    <a:lnL w="6350" cap="flat" cmpd="sng" algn="ctr">
+                      <a:solidFill>
+                        <a:srgbClr val="FFFFFF"/>
+                      </a:solidFill>
+                      <a:prstDash val="solid"/>
+                      <a:round/>
+                      <a:headEnd type="none" w="med" len="med"/>
+                      <a:tailEnd type="none" w="med" len="med"/>
+                    </a:lnL>
+                    <a:lnR w="6350" cap="flat" cmpd="sng" algn="ctr">
+                      <a:solidFill>
+                        <a:srgbClr val="FFFFFF"/>
+                      </a:solidFill>
+                      <a:prstDash val="solid"/>
+                      <a:round/>
+                      <a:headEnd type="none" w="med" len="med"/>
+                      <a:tailEnd type="none" w="med" len="med"/>
+                    </a:lnR>
+                    <a:lnT w="6350" cap="flat" cmpd="sng" algn="ctr">
+                      <a:solidFill>
+                        <a:srgbClr val="FFFFFF"/>
+                      </a:solidFill>
+                      <a:prstDash val="solid"/>
+                      <a:round/>
+                      <a:headEnd type="none" w="med" len="med"/>
+                      <a:tailEnd type="none" w="med" len="med"/>
+                    </a:lnT>
+                    <a:lnB w="6350" cap="flat" cmpd="sng" algn="ctr">
+                      <a:solidFill>
+                        <a:srgbClr val="FFFFFF"/>
+                      </a:solidFill>
+                      <a:prstDash val="solid"/>
+                      <a:round/>
+                      <a:headEnd type="none" w="med" len="med"/>
+                      <a:tailEnd type="none" w="med" len="med"/>
+                    </a:lnB>
+                    <a:solidFill>
+                      <a:srgbClr val="FDEBD0"/>
+                    </a:solidFill>
+                  </a:tcPr>
+                </a:tc>
+                <a:tc>
+                  <a:txBody>
+                    <a:bodyPr/>
+                    <a:lstStyle/>
+                    <a:p>
+                      <a:pPr algn="ctr" indent="0" marL="0">
+                        <a:buNone/>
+                      </a:pPr>
+                      <a:r>
+                        <a:rPr lang="en-US" sz="1300" dirty="0">
+                          <a:solidFill>
+                            <a:srgbClr val="1F2937"/>
+                          </a:solidFill>
+                          <a:latin typeface="Arial" pitchFamily="34" charset="0"/>
+                          <a:ea typeface="Arial" pitchFamily="34" charset="-122"/>
+                          <a:cs typeface="Arial" pitchFamily="34" charset="-120"/>
+                        </a:rPr>
+                        <a:t>0.434</a:t>
+                      </a:r>
+                      <a:endParaRPr lang="en-US" sz="1300" dirty="0">
+                        <a:latin typeface="Arial" charset="0"/>
+                        <a:ea typeface="Arial" charset="0"/>
+                        <a:cs typeface="Arial" charset="0"/>
+                      </a:endParaRPr>
+                    </a:p>
+                  </a:txBody>
+                  <a:tcPr marL="91440" marR="91440" marT="45720" marB="45720" anchor="ctr">
+                    <a:lnL w="6350" cap="flat" cmpd="sng" algn="ctr">
+                      <a:solidFill>
+                        <a:srgbClr val="FFFFFF"/>
+                      </a:solidFill>
+                      <a:prstDash val="solid"/>
+                      <a:round/>
+                      <a:headEnd type="none" w="med" len="med"/>
+                      <a:tailEnd type="none" w="med" len="med"/>
+                    </a:lnL>
+                    <a:lnR w="6350" cap="flat" cmpd="sng" algn="ctr">
+                      <a:solidFill>
+                        <a:srgbClr val="FFFFFF"/>
+                      </a:solidFill>
+                      <a:prstDash val="solid"/>
+                      <a:round/>
+                      <a:headEnd type="none" w="med" len="med"/>
+                      <a:tailEnd type="none" w="med" len="med"/>
+                    </a:lnR>
+                    <a:lnT w="6350" cap="flat" cmpd="sng" algn="ctr">
+                      <a:solidFill>
+                        <a:srgbClr val="FFFFFF"/>
+                      </a:solidFill>
+                      <a:prstDash val="solid"/>
+                      <a:round/>
+                      <a:headEnd type="none" w="med" len="med"/>
+                      <a:tailEnd type="none" w="med" len="med"/>
+                    </a:lnT>
+                    <a:lnB w="6350" cap="flat" cmpd="sng" algn="ctr">
+                      <a:solidFill>
+                        <a:srgbClr val="FFFFFF"/>
+                      </a:solidFill>
+                      <a:prstDash val="solid"/>
+                      <a:round/>
+                      <a:headEnd type="none" w="med" len="med"/>
+                      <a:tailEnd type="none" w="med" len="med"/>
+                    </a:lnB>
+                    <a:solidFill>
+                      <a:srgbClr val="FDEBD0"/>
+                    </a:solidFill>
+                  </a:tcPr>
+                </a:tc>
+                <a:tc>
+                  <a:txBody>
+                    <a:bodyPr/>
+                    <a:lstStyle/>
+                    <a:p>
+                      <a:pPr algn="ctr" indent="0" marL="0">
+                        <a:buNone/>
+                      </a:pPr>
+                      <a:r>
+                        <a:rPr lang="en-US" sz="1300" dirty="0">
+                          <a:solidFill>
+                            <a:srgbClr val="1F2937"/>
+                          </a:solidFill>
+                          <a:latin typeface="Arial" pitchFamily="34" charset="0"/>
+                          <a:ea typeface="Arial" pitchFamily="34" charset="-122"/>
+                          <a:cs typeface="Arial" pitchFamily="34" charset="-120"/>
+                        </a:rPr>
+                        <a:t>0.702</a:t>
+                      </a:r>
+                      <a:endParaRPr lang="en-US" sz="1300" dirty="0">
                         <a:latin typeface="Arial" charset="0"/>
                         <a:ea typeface="Arial" charset="0"/>
                         <a:cs typeface="Arial" charset="0"/>
@@ -24027,7 +25737,7 @@
         </p:nvSpPr>
         <p:spPr>
           <a:xfrm>
-            <a:off x="640080" y="3511296"/>
+            <a:off x="640080" y="4279392"/>
             <a:ext cx="7863840" cy="320040"/>
           </a:xfrm>
           <a:prstGeom prst="rect">
@@ -24268,7 +25978,7 @@
         </p:nvGraphicFramePr>
         <p:xfrm>
           <a:off x="640080" y="1143000"/>
-          <a:ext cx="7863840" cy="2304288"/>
+          <a:ext cx="7863840" cy="3072384"/>
         </p:xfrm>
         <a:graphic>
           <a:graphicData uri="http://schemas.openxmlformats.org/drawingml/2006/table">
@@ -24291,7 +26001,7 @@
                         <a:buNone/>
                       </a:pPr>
                       <a:r>
-                        <a:rPr lang="he-IL" altLang="en-US" sz="1600" b="1" dirty="0">
+                        <a:rPr lang="he-IL" altLang="en-US" sz="1300" b="1" dirty="0">
                           <a:solidFill>
                             <a:srgbClr val="FFFFFF"/>
                           </a:solidFill>
@@ -24301,7 +26011,7 @@
                         </a:rPr>
                         <a:t>דירוג</a:t>
                       </a:r>
-                      <a:endParaRPr lang="he-IL" sz="1600" dirty="0">
+                      <a:endParaRPr lang="he-IL" sz="1300" dirty="0">
                         <a:latin typeface="Arial" charset="0"/>
                         <a:ea typeface="Arial" charset="0"/>
                         <a:cs typeface="Arial" charset="0"/>
@@ -24359,7 +26069,7 @@
                         <a:buNone/>
                       </a:pPr>
                       <a:r>
-                        <a:rPr lang="he-IL" altLang="en-US" sz="1600" b="1" dirty="0">
+                        <a:rPr lang="he-IL" altLang="en-US" sz="1300" b="1" dirty="0">
                           <a:solidFill>
                             <a:srgbClr val="FFFFFF"/>
                           </a:solidFill>
@@ -24369,7 +26079,7 @@
                         </a:rPr>
                         <a:t>מודל</a:t>
                       </a:r>
-                      <a:endParaRPr lang="he-IL" sz="1600" dirty="0">
+                      <a:endParaRPr lang="he-IL" sz="1300" dirty="0">
                         <a:latin typeface="Arial" charset="0"/>
                         <a:ea typeface="Arial" charset="0"/>
                         <a:cs typeface="Arial" charset="0"/>
@@ -24427,7 +26137,7 @@
                         <a:buNone/>
                       </a:pPr>
                       <a:r>
-                        <a:rPr lang="he-IL" altLang="en-US" sz="1600" b="1" dirty="0">
+                        <a:rPr lang="he-IL" altLang="en-US" sz="1300" b="1" dirty="0">
                           <a:solidFill>
                             <a:srgbClr val="FFFFFF"/>
                           </a:solidFill>
@@ -24437,7 +26147,7 @@
                         </a:rPr>
                         <a:t>גישה</a:t>
                       </a:r>
-                      <a:endParaRPr lang="he-IL" sz="1600" dirty="0">
+                      <a:endParaRPr lang="he-IL" sz="1300" dirty="0">
                         <a:latin typeface="Arial" charset="0"/>
                         <a:ea typeface="Arial" charset="0"/>
                         <a:cs typeface="Arial" charset="0"/>
@@ -24495,7 +26205,7 @@
                         <a:buNone/>
                       </a:pPr>
                       <a:r>
-                        <a:rPr lang="en-US" sz="1600" b="1" dirty="0">
+                        <a:rPr lang="en-US" sz="1300" b="1" dirty="0">
                           <a:solidFill>
                             <a:srgbClr val="FFFFFF"/>
                           </a:solidFill>
@@ -24505,7 +26215,7 @@
                         </a:rPr>
                         <a:t>F1-Macro</a:t>
                       </a:r>
-                      <a:endParaRPr lang="en-US" sz="1600" dirty="0">
+                      <a:endParaRPr lang="en-US" sz="1300" dirty="0">
                         <a:latin typeface="Arial" charset="0"/>
                         <a:ea typeface="Arial" charset="0"/>
                         <a:cs typeface="Arial" charset="0"/>
@@ -24563,7 +26273,7 @@
                         <a:buNone/>
                       </a:pPr>
                       <a:r>
-                        <a:rPr lang="en-US" sz="1600" b="1" dirty="0">
+                        <a:rPr lang="en-US" sz="1300" b="1" dirty="0">
                           <a:solidFill>
                             <a:srgbClr val="FFFFFF"/>
                           </a:solidFill>
@@ -24573,7 +26283,7 @@
                         </a:rPr>
                         <a:t>Accuracy</a:t>
                       </a:r>
-                      <a:endParaRPr lang="en-US" sz="1600" dirty="0">
+                      <a:endParaRPr lang="en-US" sz="1300" dirty="0">
                         <a:latin typeface="Arial" charset="0"/>
                         <a:ea typeface="Arial" charset="0"/>
                         <a:cs typeface="Arial" charset="0"/>
@@ -24633,7 +26343,7 @@
                         <a:buNone/>
                       </a:pPr>
                       <a:r>
-                        <a:rPr lang="en-US" sz="1600" b="1" dirty="0">
+                        <a:rPr lang="en-US" sz="1300" b="1" dirty="0">
                           <a:solidFill>
                             <a:srgbClr val="1F2937"/>
                           </a:solidFill>
@@ -24643,7 +26353,7 @@
                         </a:rPr>
                         <a:t>1 🏆</a:t>
                       </a:r>
-                      <a:endParaRPr lang="en-US" sz="1600" dirty="0">
+                      <a:endParaRPr lang="en-US" sz="1300" dirty="0">
                         <a:latin typeface="Arial" charset="0"/>
                         <a:ea typeface="Arial" charset="0"/>
                         <a:cs typeface="Arial" charset="0"/>
@@ -24701,7 +26411,7 @@
                         <a:buNone/>
                       </a:pPr>
                       <a:r>
-                        <a:rPr lang="en-US" sz="1600" b="1" dirty="0">
+                        <a:rPr lang="en-US" sz="1300" b="1" dirty="0">
                           <a:solidFill>
                             <a:srgbClr val="1F2937"/>
                           </a:solidFill>
@@ -24711,7 +26421,7 @@
                         </a:rPr>
                         <a:t>BERTweet</a:t>
                       </a:r>
-                      <a:endParaRPr lang="en-US" sz="1600" dirty="0">
+                      <a:endParaRPr lang="en-US" sz="1300" dirty="0">
                         <a:latin typeface="Arial" charset="0"/>
                         <a:ea typeface="Arial" charset="0"/>
                         <a:cs typeface="Arial" charset="0"/>
@@ -24769,7 +26479,7 @@
                         <a:buNone/>
                       </a:pPr>
                       <a:r>
-                        <a:rPr lang="en-US" sz="1600" b="1" dirty="0">
+                        <a:rPr lang="en-US" sz="1300" b="1" dirty="0">
                           <a:solidFill>
                             <a:srgbClr val="1F2937"/>
                           </a:solidFill>
@@ -24779,7 +26489,7 @@
                         </a:rPr>
                         <a:t>Fine-Tuned</a:t>
                       </a:r>
-                      <a:endParaRPr lang="en-US" sz="1600" dirty="0">
+                      <a:endParaRPr lang="en-US" sz="1300" dirty="0">
                         <a:latin typeface="Arial" charset="0"/>
                         <a:ea typeface="Arial" charset="0"/>
                         <a:cs typeface="Arial" charset="0"/>
@@ -24837,7 +26547,7 @@
                         <a:buNone/>
                       </a:pPr>
                       <a:r>
-                        <a:rPr lang="en-US" sz="1600" b="1" dirty="0">
+                        <a:rPr lang="en-US" sz="1300" b="1" dirty="0">
                           <a:solidFill>
                             <a:srgbClr val="1F2937"/>
                           </a:solidFill>
@@ -24847,7 +26557,7 @@
                         </a:rPr>
                         <a:t>0.818</a:t>
                       </a:r>
-                      <a:endParaRPr lang="en-US" sz="1600" dirty="0">
+                      <a:endParaRPr lang="en-US" sz="1300" dirty="0">
                         <a:latin typeface="Arial" charset="0"/>
                         <a:ea typeface="Arial" charset="0"/>
                         <a:cs typeface="Arial" charset="0"/>
@@ -24905,7 +26615,7 @@
                         <a:buNone/>
                       </a:pPr>
                       <a:r>
-                        <a:rPr lang="en-US" sz="1600" b="1" dirty="0">
+                        <a:rPr lang="en-US" sz="1300" b="1" dirty="0">
                           <a:solidFill>
                             <a:srgbClr val="1F2937"/>
                           </a:solidFill>
@@ -24915,7 +26625,7 @@
                         </a:rPr>
                         <a:t>0.821</a:t>
                       </a:r>
-                      <a:endParaRPr lang="en-US" sz="1600" dirty="0">
+                      <a:endParaRPr lang="en-US" sz="1300" dirty="0">
                         <a:latin typeface="Arial" charset="0"/>
                         <a:ea typeface="Arial" charset="0"/>
                         <a:cs typeface="Arial" charset="0"/>
@@ -24975,7 +26685,7 @@
                         <a:buNone/>
                       </a:pPr>
                       <a:r>
-                        <a:rPr lang="en-US" sz="1600" dirty="0">
+                        <a:rPr lang="en-US" sz="1300" dirty="0">
                           <a:solidFill>
                             <a:srgbClr val="1F2937"/>
                           </a:solidFill>
@@ -24985,7 +26695,7 @@
                         </a:rPr>
                         <a:t>2</a:t>
                       </a:r>
-                      <a:endParaRPr lang="en-US" sz="1600" dirty="0">
+                      <a:endParaRPr lang="en-US" sz="1300" dirty="0">
                         <a:latin typeface="Arial" charset="0"/>
                         <a:ea typeface="Arial" charset="0"/>
                         <a:cs typeface="Arial" charset="0"/>
@@ -25043,7 +26753,7 @@
                         <a:buNone/>
                       </a:pPr>
                       <a:r>
-                        <a:rPr lang="en-US" sz="1600" dirty="0">
+                        <a:rPr lang="en-US" sz="1300" dirty="0">
                           <a:solidFill>
                             <a:srgbClr val="1F2937"/>
                           </a:solidFill>
@@ -25053,7 +26763,7 @@
                         </a:rPr>
                         <a:t>RoBERTa</a:t>
                       </a:r>
-                      <a:endParaRPr lang="en-US" sz="1600" dirty="0">
+                      <a:endParaRPr lang="en-US" sz="1300" dirty="0">
                         <a:latin typeface="Arial" charset="0"/>
                         <a:ea typeface="Arial" charset="0"/>
                         <a:cs typeface="Arial" charset="0"/>
@@ -25111,7 +26821,7 @@
                         <a:buNone/>
                       </a:pPr>
                       <a:r>
-                        <a:rPr lang="en-US" sz="1600" dirty="0">
+                        <a:rPr lang="en-US" sz="1300" dirty="0">
                           <a:solidFill>
                             <a:srgbClr val="1F2937"/>
                           </a:solidFill>
@@ -25121,7 +26831,7 @@
                         </a:rPr>
                         <a:t>Fine-Tuned</a:t>
                       </a:r>
-                      <a:endParaRPr lang="en-US" sz="1600" dirty="0">
+                      <a:endParaRPr lang="en-US" sz="1300" dirty="0">
                         <a:latin typeface="Arial" charset="0"/>
                         <a:ea typeface="Arial" charset="0"/>
                         <a:cs typeface="Arial" charset="0"/>
@@ -25179,7 +26889,7 @@
                         <a:buNone/>
                       </a:pPr>
                       <a:r>
-                        <a:rPr lang="en-US" sz="1600" dirty="0">
+                        <a:rPr lang="en-US" sz="1300" dirty="0">
                           <a:solidFill>
                             <a:srgbClr val="1F2937"/>
                           </a:solidFill>
@@ -25189,7 +26899,7 @@
                         </a:rPr>
                         <a:t>0.818</a:t>
                       </a:r>
-                      <a:endParaRPr lang="en-US" sz="1600" dirty="0">
+                      <a:endParaRPr lang="en-US" sz="1300" dirty="0">
                         <a:latin typeface="Arial" charset="0"/>
                         <a:ea typeface="Arial" charset="0"/>
                         <a:cs typeface="Arial" charset="0"/>
@@ -25247,7 +26957,7 @@
                         <a:buNone/>
                       </a:pPr>
                       <a:r>
-                        <a:rPr lang="en-US" sz="1600" dirty="0">
+                        <a:rPr lang="en-US" sz="1300" dirty="0">
                           <a:solidFill>
                             <a:srgbClr val="1F2937"/>
                           </a:solidFill>
@@ -25257,7 +26967,7 @@
                         </a:rPr>
                         <a:t>0.821</a:t>
                       </a:r>
-                      <a:endParaRPr lang="en-US" sz="1600" dirty="0">
+                      <a:endParaRPr lang="en-US" sz="1300" dirty="0">
                         <a:latin typeface="Arial" charset="0"/>
                         <a:ea typeface="Arial" charset="0"/>
                         <a:cs typeface="Arial" charset="0"/>
@@ -25317,7 +27027,7 @@
                         <a:buNone/>
                       </a:pPr>
                       <a:r>
-                        <a:rPr lang="en-US" sz="1600" dirty="0">
+                        <a:rPr lang="en-US" sz="1300" dirty="0">
                           <a:solidFill>
                             <a:srgbClr val="1F2937"/>
                           </a:solidFill>
@@ -25327,7 +27037,7 @@
                         </a:rPr>
                         <a:t>3</a:t>
                       </a:r>
-                      <a:endParaRPr lang="en-US" sz="1600" dirty="0">
+                      <a:endParaRPr lang="en-US" sz="1300" dirty="0">
                         <a:latin typeface="Arial" charset="0"/>
                         <a:ea typeface="Arial" charset="0"/>
                         <a:cs typeface="Arial" charset="0"/>
@@ -25385,7 +27095,7 @@
                         <a:buNone/>
                       </a:pPr>
                       <a:r>
-                        <a:rPr lang="en-US" sz="1600" dirty="0">
+                        <a:rPr lang="en-US" sz="1300" dirty="0">
                           <a:solidFill>
                             <a:srgbClr val="1F2937"/>
                           </a:solidFill>
@@ -25395,7 +27105,7 @@
                         </a:rPr>
                         <a:t>MiniLM</a:t>
                       </a:r>
-                      <a:endParaRPr lang="en-US" sz="1600" dirty="0">
+                      <a:endParaRPr lang="en-US" sz="1300" dirty="0">
                         <a:latin typeface="Arial" charset="0"/>
                         <a:ea typeface="Arial" charset="0"/>
                         <a:cs typeface="Arial" charset="0"/>
@@ -25453,7 +27163,7 @@
                         <a:buNone/>
                       </a:pPr>
                       <a:r>
-                        <a:rPr lang="en-US" sz="1600" dirty="0">
+                        <a:rPr lang="en-US" sz="1300" dirty="0">
                           <a:solidFill>
                             <a:srgbClr val="1F2937"/>
                           </a:solidFill>
@@ -25463,7 +27173,7 @@
                         </a:rPr>
                         <a:t>Fine-Tuned</a:t>
                       </a:r>
-                      <a:endParaRPr lang="en-US" sz="1600" dirty="0">
+                      <a:endParaRPr lang="en-US" sz="1300" dirty="0">
                         <a:latin typeface="Arial" charset="0"/>
                         <a:ea typeface="Arial" charset="0"/>
                         <a:cs typeface="Arial" charset="0"/>
@@ -25521,7 +27231,7 @@
                         <a:buNone/>
                       </a:pPr>
                       <a:r>
-                        <a:rPr lang="en-US" sz="1600" dirty="0">
+                        <a:rPr lang="en-US" sz="1300" dirty="0">
                           <a:solidFill>
                             <a:srgbClr val="1F2937"/>
                           </a:solidFill>
@@ -25531,7 +27241,7 @@
                         </a:rPr>
                         <a:t>0.796</a:t>
                       </a:r>
-                      <a:endParaRPr lang="en-US" sz="1600" dirty="0">
+                      <a:endParaRPr lang="en-US" sz="1300" dirty="0">
                         <a:latin typeface="Arial" charset="0"/>
                         <a:ea typeface="Arial" charset="0"/>
                         <a:cs typeface="Arial" charset="0"/>
@@ -25589,7 +27299,7 @@
                         <a:buNone/>
                       </a:pPr>
                       <a:r>
-                        <a:rPr lang="en-US" sz="1600" dirty="0">
+                        <a:rPr lang="en-US" sz="1300" dirty="0">
                           <a:solidFill>
                             <a:srgbClr val="1F2937"/>
                           </a:solidFill>
@@ -25599,7 +27309,7 @@
                         </a:rPr>
                         <a:t>0.799</a:t>
                       </a:r>
-                      <a:endParaRPr lang="en-US" sz="1600" dirty="0">
+                      <a:endParaRPr lang="en-US" sz="1300" dirty="0">
                         <a:latin typeface="Arial" charset="0"/>
                         <a:ea typeface="Arial" charset="0"/>
                         <a:cs typeface="Arial" charset="0"/>
@@ -25659,7 +27369,7 @@
                         <a:buNone/>
                       </a:pPr>
                       <a:r>
-                        <a:rPr lang="en-US" sz="1600" dirty="0">
+                        <a:rPr lang="en-US" sz="1300" dirty="0">
                           <a:solidFill>
                             <a:srgbClr val="1F2937"/>
                           </a:solidFill>
@@ -25669,7 +27379,7 @@
                         </a:rPr>
                         <a:t>4</a:t>
                       </a:r>
-                      <a:endParaRPr lang="en-US" sz="1600" dirty="0">
+                      <a:endParaRPr lang="en-US" sz="1300" dirty="0">
                         <a:latin typeface="Arial" charset="0"/>
                         <a:ea typeface="Arial" charset="0"/>
                         <a:cs typeface="Arial" charset="0"/>
@@ -25727,7 +27437,7 @@
                         <a:buNone/>
                       </a:pPr>
                       <a:r>
-                        <a:rPr lang="en-US" sz="1600" dirty="0">
+                        <a:rPr lang="en-US" sz="1300" dirty="0">
                           <a:solidFill>
                             <a:srgbClr val="1F2937"/>
                           </a:solidFill>
@@ -25737,7 +27447,7 @@
                         </a:rPr>
                         <a:t>ModernBERT</a:t>
                       </a:r>
-                      <a:endParaRPr lang="en-US" sz="1600" dirty="0">
+                      <a:endParaRPr lang="en-US" sz="1300" dirty="0">
                         <a:latin typeface="Arial" charset="0"/>
                         <a:ea typeface="Arial" charset="0"/>
                         <a:cs typeface="Arial" charset="0"/>
@@ -25795,7 +27505,7 @@
                         <a:buNone/>
                       </a:pPr>
                       <a:r>
-                        <a:rPr lang="en-US" sz="1600" dirty="0">
+                        <a:rPr lang="en-US" sz="1300" dirty="0">
                           <a:solidFill>
                             <a:srgbClr val="1F2937"/>
                           </a:solidFill>
@@ -25805,7 +27515,7 @@
                         </a:rPr>
                         <a:t>Fine-Tuned</a:t>
                       </a:r>
-                      <a:endParaRPr lang="en-US" sz="1600" dirty="0">
+                      <a:endParaRPr lang="en-US" sz="1300" dirty="0">
                         <a:latin typeface="Arial" charset="0"/>
                         <a:ea typeface="Arial" charset="0"/>
                         <a:cs typeface="Arial" charset="0"/>
@@ -25863,7 +27573,7 @@
                         <a:buNone/>
                       </a:pPr>
                       <a:r>
-                        <a:rPr lang="en-US" sz="1600" dirty="0">
+                        <a:rPr lang="en-US" sz="1300" dirty="0">
                           <a:solidFill>
                             <a:srgbClr val="1F2937"/>
                           </a:solidFill>
@@ -25873,7 +27583,7 @@
                         </a:rPr>
                         <a:t>0.778</a:t>
                       </a:r>
-                      <a:endParaRPr lang="en-US" sz="1600" dirty="0">
+                      <a:endParaRPr lang="en-US" sz="1300" dirty="0">
                         <a:latin typeface="Arial" charset="0"/>
                         <a:ea typeface="Arial" charset="0"/>
                         <a:cs typeface="Arial" charset="0"/>
@@ -25931,7 +27641,7 @@
                         <a:buNone/>
                       </a:pPr>
                       <a:r>
-                        <a:rPr lang="en-US" sz="1600" dirty="0">
+                        <a:rPr lang="en-US" sz="1300" dirty="0">
                           <a:solidFill>
                             <a:srgbClr val="1F2937"/>
                           </a:solidFill>
@@ -25941,7 +27651,7 @@
                         </a:rPr>
                         <a:t>0.788</a:t>
                       </a:r>
-                      <a:endParaRPr lang="en-US" sz="1600" dirty="0">
+                      <a:endParaRPr lang="en-US" sz="1300" dirty="0">
                         <a:latin typeface="Arial" charset="0"/>
                         <a:ea typeface="Arial" charset="0"/>
                         <a:cs typeface="Arial" charset="0"/>
@@ -26001,7 +27711,7 @@
                         <a:buNone/>
                       </a:pPr>
                       <a:r>
-                        <a:rPr lang="en-US" sz="1600" dirty="0">
+                        <a:rPr lang="en-US" sz="1300" dirty="0">
                           <a:solidFill>
                             <a:srgbClr val="1F2937"/>
                           </a:solidFill>
@@ -26011,7 +27721,7 @@
                         </a:rPr>
                         <a:t>5</a:t>
                       </a:r>
-                      <a:endParaRPr lang="en-US" sz="1600" dirty="0">
+                      <a:endParaRPr lang="en-US" sz="1300" dirty="0">
                         <a:latin typeface="Arial" charset="0"/>
                         <a:ea typeface="Arial" charset="0"/>
                         <a:cs typeface="Arial" charset="0"/>
@@ -26069,7 +27779,691 @@
                         <a:buNone/>
                       </a:pPr>
                       <a:r>
-                        <a:rPr lang="en-US" sz="1600" dirty="0">
+                        <a:rPr lang="en-US" sz="1300" dirty="0">
+                          <a:solidFill>
+                            <a:srgbClr val="1F2937"/>
+                          </a:solidFill>
+                          <a:latin typeface="Arial" pitchFamily="34" charset="0"/>
+                          <a:ea typeface="Arial" pitchFamily="34" charset="-122"/>
+                          <a:cs typeface="Arial" pitchFamily="34" charset="-120"/>
+                        </a:rPr>
+                        <a:t>GPT-OSS 120B</a:t>
+                      </a:r>
+                      <a:endParaRPr lang="en-US" sz="1300" dirty="0">
+                        <a:latin typeface="Arial" charset="0"/>
+                        <a:ea typeface="Arial" charset="0"/>
+                        <a:cs typeface="Arial" charset="0"/>
+                      </a:endParaRPr>
+                    </a:p>
+                  </a:txBody>
+                  <a:tcPr marL="91440" marR="91440" marT="45720" marB="45720" anchor="ctr">
+                    <a:lnL w="6350" cap="flat" cmpd="sng" algn="ctr">
+                      <a:solidFill>
+                        <a:srgbClr val="FFFFFF"/>
+                      </a:solidFill>
+                      <a:prstDash val="solid"/>
+                      <a:round/>
+                      <a:headEnd type="none" w="med" len="med"/>
+                      <a:tailEnd type="none" w="med" len="med"/>
+                    </a:lnL>
+                    <a:lnR w="6350" cap="flat" cmpd="sng" algn="ctr">
+                      <a:solidFill>
+                        <a:srgbClr val="FFFFFF"/>
+                      </a:solidFill>
+                      <a:prstDash val="solid"/>
+                      <a:round/>
+                      <a:headEnd type="none" w="med" len="med"/>
+                      <a:tailEnd type="none" w="med" len="med"/>
+                    </a:lnR>
+                    <a:lnT w="6350" cap="flat" cmpd="sng" algn="ctr">
+                      <a:solidFill>
+                        <a:srgbClr val="FFFFFF"/>
+                      </a:solidFill>
+                      <a:prstDash val="solid"/>
+                      <a:round/>
+                      <a:headEnd type="none" w="med" len="med"/>
+                      <a:tailEnd type="none" w="med" len="med"/>
+                    </a:lnT>
+                    <a:lnB w="6350" cap="flat" cmpd="sng" algn="ctr">
+                      <a:solidFill>
+                        <a:srgbClr val="FFFFFF"/>
+                      </a:solidFill>
+                      <a:prstDash val="solid"/>
+                      <a:round/>
+                      <a:headEnd type="none" w="med" len="med"/>
+                      <a:tailEnd type="none" w="med" len="med"/>
+                    </a:lnB>
+                    <a:solidFill>
+                      <a:srgbClr val="FDEBD0"/>
+                    </a:solidFill>
+                  </a:tcPr>
+                </a:tc>
+                <a:tc>
+                  <a:txBody>
+                    <a:bodyPr/>
+                    <a:lstStyle/>
+                    <a:p>
+                      <a:pPr algn="ctr" indent="0" marL="0">
+                        <a:buNone/>
+                      </a:pPr>
+                      <a:r>
+                        <a:rPr lang="en-US" sz="1300" dirty="0">
+                          <a:solidFill>
+                            <a:srgbClr val="1F2937"/>
+                          </a:solidFill>
+                          <a:latin typeface="Arial" pitchFamily="34" charset="0"/>
+                          <a:ea typeface="Arial" pitchFamily="34" charset="-122"/>
+                          <a:cs typeface="Arial" pitchFamily="34" charset="-120"/>
+                        </a:rPr>
+                        <a:t>Zero-Shot</a:t>
+                      </a:r>
+                      <a:endParaRPr lang="en-US" sz="1300" dirty="0">
+                        <a:latin typeface="Arial" charset="0"/>
+                        <a:ea typeface="Arial" charset="0"/>
+                        <a:cs typeface="Arial" charset="0"/>
+                      </a:endParaRPr>
+                    </a:p>
+                  </a:txBody>
+                  <a:tcPr marL="91440" marR="91440" marT="45720" marB="45720" anchor="ctr">
+                    <a:lnL w="6350" cap="flat" cmpd="sng" algn="ctr">
+                      <a:solidFill>
+                        <a:srgbClr val="FFFFFF"/>
+                      </a:solidFill>
+                      <a:prstDash val="solid"/>
+                      <a:round/>
+                      <a:headEnd type="none" w="med" len="med"/>
+                      <a:tailEnd type="none" w="med" len="med"/>
+                    </a:lnL>
+                    <a:lnR w="6350" cap="flat" cmpd="sng" algn="ctr">
+                      <a:solidFill>
+                        <a:srgbClr val="FFFFFF"/>
+                      </a:solidFill>
+                      <a:prstDash val="solid"/>
+                      <a:round/>
+                      <a:headEnd type="none" w="med" len="med"/>
+                      <a:tailEnd type="none" w="med" len="med"/>
+                    </a:lnR>
+                    <a:lnT w="6350" cap="flat" cmpd="sng" algn="ctr">
+                      <a:solidFill>
+                        <a:srgbClr val="FFFFFF"/>
+                      </a:solidFill>
+                      <a:prstDash val="solid"/>
+                      <a:round/>
+                      <a:headEnd type="none" w="med" len="med"/>
+                      <a:tailEnd type="none" w="med" len="med"/>
+                    </a:lnT>
+                    <a:lnB w="6350" cap="flat" cmpd="sng" algn="ctr">
+                      <a:solidFill>
+                        <a:srgbClr val="FFFFFF"/>
+                      </a:solidFill>
+                      <a:prstDash val="solid"/>
+                      <a:round/>
+                      <a:headEnd type="none" w="med" len="med"/>
+                      <a:tailEnd type="none" w="med" len="med"/>
+                    </a:lnB>
+                    <a:solidFill>
+                      <a:srgbClr val="FDEBD0"/>
+                    </a:solidFill>
+                  </a:tcPr>
+                </a:tc>
+                <a:tc>
+                  <a:txBody>
+                    <a:bodyPr/>
+                    <a:lstStyle/>
+                    <a:p>
+                      <a:pPr algn="ctr" indent="0" marL="0">
+                        <a:buNone/>
+                      </a:pPr>
+                      <a:r>
+                        <a:rPr lang="en-US" sz="1300" dirty="0">
+                          <a:solidFill>
+                            <a:srgbClr val="1F2937"/>
+                          </a:solidFill>
+                          <a:latin typeface="Arial" pitchFamily="34" charset="0"/>
+                          <a:ea typeface="Arial" pitchFamily="34" charset="-122"/>
+                          <a:cs typeface="Arial" pitchFamily="34" charset="-120"/>
+                        </a:rPr>
+                        <a:t>0.659</a:t>
+                      </a:r>
+                      <a:endParaRPr lang="en-US" sz="1300" dirty="0">
+                        <a:latin typeface="Arial" charset="0"/>
+                        <a:ea typeface="Arial" charset="0"/>
+                        <a:cs typeface="Arial" charset="0"/>
+                      </a:endParaRPr>
+                    </a:p>
+                  </a:txBody>
+                  <a:tcPr marL="91440" marR="91440" marT="45720" marB="45720" anchor="ctr">
+                    <a:lnL w="6350" cap="flat" cmpd="sng" algn="ctr">
+                      <a:solidFill>
+                        <a:srgbClr val="FFFFFF"/>
+                      </a:solidFill>
+                      <a:prstDash val="solid"/>
+                      <a:round/>
+                      <a:headEnd type="none" w="med" len="med"/>
+                      <a:tailEnd type="none" w="med" len="med"/>
+                    </a:lnL>
+                    <a:lnR w="6350" cap="flat" cmpd="sng" algn="ctr">
+                      <a:solidFill>
+                        <a:srgbClr val="FFFFFF"/>
+                      </a:solidFill>
+                      <a:prstDash val="solid"/>
+                      <a:round/>
+                      <a:headEnd type="none" w="med" len="med"/>
+                      <a:tailEnd type="none" w="med" len="med"/>
+                    </a:lnR>
+                    <a:lnT w="6350" cap="flat" cmpd="sng" algn="ctr">
+                      <a:solidFill>
+                        <a:srgbClr val="FFFFFF"/>
+                      </a:solidFill>
+                      <a:prstDash val="solid"/>
+                      <a:round/>
+                      <a:headEnd type="none" w="med" len="med"/>
+                      <a:tailEnd type="none" w="med" len="med"/>
+                    </a:lnT>
+                    <a:lnB w="6350" cap="flat" cmpd="sng" algn="ctr">
+                      <a:solidFill>
+                        <a:srgbClr val="FFFFFF"/>
+                      </a:solidFill>
+                      <a:prstDash val="solid"/>
+                      <a:round/>
+                      <a:headEnd type="none" w="med" len="med"/>
+                      <a:tailEnd type="none" w="med" len="med"/>
+                    </a:lnB>
+                    <a:solidFill>
+                      <a:srgbClr val="FDEBD0"/>
+                    </a:solidFill>
+                  </a:tcPr>
+                </a:tc>
+                <a:tc>
+                  <a:txBody>
+                    <a:bodyPr/>
+                    <a:lstStyle/>
+                    <a:p>
+                      <a:pPr algn="ctr" indent="0" marL="0">
+                        <a:buNone/>
+                      </a:pPr>
+                      <a:r>
+                        <a:rPr lang="en-US" sz="1300" dirty="0">
+                          <a:solidFill>
+                            <a:srgbClr val="1F2937"/>
+                          </a:solidFill>
+                          <a:latin typeface="Arial" pitchFamily="34" charset="0"/>
+                          <a:ea typeface="Arial" pitchFamily="34" charset="-122"/>
+                          <a:cs typeface="Arial" pitchFamily="34" charset="-120"/>
+                        </a:rPr>
+                        <a:t>0.665</a:t>
+                      </a:r>
+                      <a:endParaRPr lang="en-US" sz="1300" dirty="0">
+                        <a:latin typeface="Arial" charset="0"/>
+                        <a:ea typeface="Arial" charset="0"/>
+                        <a:cs typeface="Arial" charset="0"/>
+                      </a:endParaRPr>
+                    </a:p>
+                  </a:txBody>
+                  <a:tcPr marL="91440" marR="91440" marT="45720" marB="45720" anchor="ctr">
+                    <a:lnL w="6350" cap="flat" cmpd="sng" algn="ctr">
+                      <a:solidFill>
+                        <a:srgbClr val="FFFFFF"/>
+                      </a:solidFill>
+                      <a:prstDash val="solid"/>
+                      <a:round/>
+                      <a:headEnd type="none" w="med" len="med"/>
+                      <a:tailEnd type="none" w="med" len="med"/>
+                    </a:lnL>
+                    <a:lnR w="6350" cap="flat" cmpd="sng" algn="ctr">
+                      <a:solidFill>
+                        <a:srgbClr val="FFFFFF"/>
+                      </a:solidFill>
+                      <a:prstDash val="solid"/>
+                      <a:round/>
+                      <a:headEnd type="none" w="med" len="med"/>
+                      <a:tailEnd type="none" w="med" len="med"/>
+                    </a:lnR>
+                    <a:lnT w="6350" cap="flat" cmpd="sng" algn="ctr">
+                      <a:solidFill>
+                        <a:srgbClr val="FFFFFF"/>
+                      </a:solidFill>
+                      <a:prstDash val="solid"/>
+                      <a:round/>
+                      <a:headEnd type="none" w="med" len="med"/>
+                      <a:tailEnd type="none" w="med" len="med"/>
+                    </a:lnT>
+                    <a:lnB w="6350" cap="flat" cmpd="sng" algn="ctr">
+                      <a:solidFill>
+                        <a:srgbClr val="FFFFFF"/>
+                      </a:solidFill>
+                      <a:prstDash val="solid"/>
+                      <a:round/>
+                      <a:headEnd type="none" w="med" len="med"/>
+                      <a:tailEnd type="none" w="med" len="med"/>
+                    </a:lnB>
+                    <a:solidFill>
+                      <a:srgbClr val="FDEBD0"/>
+                    </a:solidFill>
+                  </a:tcPr>
+                </a:tc>
+              </a:tr>
+              <a:tr h="384048">
+                <a:tc>
+                  <a:txBody>
+                    <a:bodyPr/>
+                    <a:lstStyle/>
+                    <a:p>
+                      <a:pPr algn="ctr" indent="0" marL="0">
+                        <a:buNone/>
+                      </a:pPr>
+                      <a:r>
+                        <a:rPr lang="en-US" sz="1300" dirty="0">
+                          <a:solidFill>
+                            <a:srgbClr val="1F2937"/>
+                          </a:solidFill>
+                          <a:latin typeface="Arial" pitchFamily="34" charset="0"/>
+                          <a:ea typeface="Arial" pitchFamily="34" charset="-122"/>
+                          <a:cs typeface="Arial" pitchFamily="34" charset="-120"/>
+                        </a:rPr>
+                        <a:t>6</a:t>
+                      </a:r>
+                      <a:endParaRPr lang="en-US" sz="1300" dirty="0">
+                        <a:latin typeface="Arial" charset="0"/>
+                        <a:ea typeface="Arial" charset="0"/>
+                        <a:cs typeface="Arial" charset="0"/>
+                      </a:endParaRPr>
+                    </a:p>
+                  </a:txBody>
+                  <a:tcPr marL="91440" marR="91440" marT="45720" marB="45720" anchor="ctr">
+                    <a:lnL w="6350" cap="flat" cmpd="sng" algn="ctr">
+                      <a:solidFill>
+                        <a:srgbClr val="FFFFFF"/>
+                      </a:solidFill>
+                      <a:prstDash val="solid"/>
+                      <a:round/>
+                      <a:headEnd type="none" w="med" len="med"/>
+                      <a:tailEnd type="none" w="med" len="med"/>
+                    </a:lnL>
+                    <a:lnR w="6350" cap="flat" cmpd="sng" algn="ctr">
+                      <a:solidFill>
+                        <a:srgbClr val="FFFFFF"/>
+                      </a:solidFill>
+                      <a:prstDash val="solid"/>
+                      <a:round/>
+                      <a:headEnd type="none" w="med" len="med"/>
+                      <a:tailEnd type="none" w="med" len="med"/>
+                    </a:lnR>
+                    <a:lnT w="6350" cap="flat" cmpd="sng" algn="ctr">
+                      <a:solidFill>
+                        <a:srgbClr val="FFFFFF"/>
+                      </a:solidFill>
+                      <a:prstDash val="solid"/>
+                      <a:round/>
+                      <a:headEnd type="none" w="med" len="med"/>
+                      <a:tailEnd type="none" w="med" len="med"/>
+                    </a:lnT>
+                    <a:lnB w="6350" cap="flat" cmpd="sng" algn="ctr">
+                      <a:solidFill>
+                        <a:srgbClr val="FFFFFF"/>
+                      </a:solidFill>
+                      <a:prstDash val="solid"/>
+                      <a:round/>
+                      <a:headEnd type="none" w="med" len="med"/>
+                      <a:tailEnd type="none" w="med" len="med"/>
+                    </a:lnB>
+                    <a:solidFill>
+                      <a:srgbClr val="FDEBD0"/>
+                    </a:solidFill>
+                  </a:tcPr>
+                </a:tc>
+                <a:tc>
+                  <a:txBody>
+                    <a:bodyPr/>
+                    <a:lstStyle/>
+                    <a:p>
+                      <a:pPr algn="ctr" indent="0" marL="0">
+                        <a:buNone/>
+                      </a:pPr>
+                      <a:r>
+                        <a:rPr lang="en-US" sz="1300" dirty="0">
+                          <a:solidFill>
+                            <a:srgbClr val="1F2937"/>
+                          </a:solidFill>
+                          <a:latin typeface="Arial" pitchFamily="34" charset="0"/>
+                          <a:ea typeface="Arial" pitchFamily="34" charset="-122"/>
+                          <a:cs typeface="Arial" pitchFamily="34" charset="-120"/>
+                        </a:rPr>
+                        <a:t>Qwen3.6 27B</a:t>
+                      </a:r>
+                      <a:endParaRPr lang="en-US" sz="1300" dirty="0">
+                        <a:latin typeface="Arial" charset="0"/>
+                        <a:ea typeface="Arial" charset="0"/>
+                        <a:cs typeface="Arial" charset="0"/>
+                      </a:endParaRPr>
+                    </a:p>
+                  </a:txBody>
+                  <a:tcPr marL="91440" marR="91440" marT="45720" marB="45720" anchor="ctr">
+                    <a:lnL w="6350" cap="flat" cmpd="sng" algn="ctr">
+                      <a:solidFill>
+                        <a:srgbClr val="FFFFFF"/>
+                      </a:solidFill>
+                      <a:prstDash val="solid"/>
+                      <a:round/>
+                      <a:headEnd type="none" w="med" len="med"/>
+                      <a:tailEnd type="none" w="med" len="med"/>
+                    </a:lnL>
+                    <a:lnR w="6350" cap="flat" cmpd="sng" algn="ctr">
+                      <a:solidFill>
+                        <a:srgbClr val="FFFFFF"/>
+                      </a:solidFill>
+                      <a:prstDash val="solid"/>
+                      <a:round/>
+                      <a:headEnd type="none" w="med" len="med"/>
+                      <a:tailEnd type="none" w="med" len="med"/>
+                    </a:lnR>
+                    <a:lnT w="6350" cap="flat" cmpd="sng" algn="ctr">
+                      <a:solidFill>
+                        <a:srgbClr val="FFFFFF"/>
+                      </a:solidFill>
+                      <a:prstDash val="solid"/>
+                      <a:round/>
+                      <a:headEnd type="none" w="med" len="med"/>
+                      <a:tailEnd type="none" w="med" len="med"/>
+                    </a:lnT>
+                    <a:lnB w="6350" cap="flat" cmpd="sng" algn="ctr">
+                      <a:solidFill>
+                        <a:srgbClr val="FFFFFF"/>
+                      </a:solidFill>
+                      <a:prstDash val="solid"/>
+                      <a:round/>
+                      <a:headEnd type="none" w="med" len="med"/>
+                      <a:tailEnd type="none" w="med" len="med"/>
+                    </a:lnB>
+                    <a:solidFill>
+                      <a:srgbClr val="FDEBD0"/>
+                    </a:solidFill>
+                  </a:tcPr>
+                </a:tc>
+                <a:tc>
+                  <a:txBody>
+                    <a:bodyPr/>
+                    <a:lstStyle/>
+                    <a:p>
+                      <a:pPr algn="ctr" indent="0" marL="0">
+                        <a:buNone/>
+                      </a:pPr>
+                      <a:r>
+                        <a:rPr lang="en-US" sz="1300" dirty="0">
+                          <a:solidFill>
+                            <a:srgbClr val="1F2937"/>
+                          </a:solidFill>
+                          <a:latin typeface="Arial" pitchFamily="34" charset="0"/>
+                          <a:ea typeface="Arial" pitchFamily="34" charset="-122"/>
+                          <a:cs typeface="Arial" pitchFamily="34" charset="-120"/>
+                        </a:rPr>
+                        <a:t>Zero-Shot</a:t>
+                      </a:r>
+                      <a:endParaRPr lang="en-US" sz="1300" dirty="0">
+                        <a:latin typeface="Arial" charset="0"/>
+                        <a:ea typeface="Arial" charset="0"/>
+                        <a:cs typeface="Arial" charset="0"/>
+                      </a:endParaRPr>
+                    </a:p>
+                  </a:txBody>
+                  <a:tcPr marL="91440" marR="91440" marT="45720" marB="45720" anchor="ctr">
+                    <a:lnL w="6350" cap="flat" cmpd="sng" algn="ctr">
+                      <a:solidFill>
+                        <a:srgbClr val="FFFFFF"/>
+                      </a:solidFill>
+                      <a:prstDash val="solid"/>
+                      <a:round/>
+                      <a:headEnd type="none" w="med" len="med"/>
+                      <a:tailEnd type="none" w="med" len="med"/>
+                    </a:lnL>
+                    <a:lnR w="6350" cap="flat" cmpd="sng" algn="ctr">
+                      <a:solidFill>
+                        <a:srgbClr val="FFFFFF"/>
+                      </a:solidFill>
+                      <a:prstDash val="solid"/>
+                      <a:round/>
+                      <a:headEnd type="none" w="med" len="med"/>
+                      <a:tailEnd type="none" w="med" len="med"/>
+                    </a:lnR>
+                    <a:lnT w="6350" cap="flat" cmpd="sng" algn="ctr">
+                      <a:solidFill>
+                        <a:srgbClr val="FFFFFF"/>
+                      </a:solidFill>
+                      <a:prstDash val="solid"/>
+                      <a:round/>
+                      <a:headEnd type="none" w="med" len="med"/>
+                      <a:tailEnd type="none" w="med" len="med"/>
+                    </a:lnT>
+                    <a:lnB w="6350" cap="flat" cmpd="sng" algn="ctr">
+                      <a:solidFill>
+                        <a:srgbClr val="FFFFFF"/>
+                      </a:solidFill>
+                      <a:prstDash val="solid"/>
+                      <a:round/>
+                      <a:headEnd type="none" w="med" len="med"/>
+                      <a:tailEnd type="none" w="med" len="med"/>
+                    </a:lnB>
+                    <a:solidFill>
+                      <a:srgbClr val="FDEBD0"/>
+                    </a:solidFill>
+                  </a:tcPr>
+                </a:tc>
+                <a:tc>
+                  <a:txBody>
+                    <a:bodyPr/>
+                    <a:lstStyle/>
+                    <a:p>
+                      <a:pPr algn="ctr" indent="0" marL="0">
+                        <a:buNone/>
+                      </a:pPr>
+                      <a:r>
+                        <a:rPr lang="en-US" sz="1300" dirty="0">
+                          <a:solidFill>
+                            <a:srgbClr val="1F2937"/>
+                          </a:solidFill>
+                          <a:latin typeface="Arial" pitchFamily="34" charset="0"/>
+                          <a:ea typeface="Arial" pitchFamily="34" charset="-122"/>
+                          <a:cs typeface="Arial" pitchFamily="34" charset="-120"/>
+                        </a:rPr>
+                        <a:t>0.507</a:t>
+                      </a:r>
+                      <a:endParaRPr lang="en-US" sz="1300" dirty="0">
+                        <a:latin typeface="Arial" charset="0"/>
+                        <a:ea typeface="Arial" charset="0"/>
+                        <a:cs typeface="Arial" charset="0"/>
+                      </a:endParaRPr>
+                    </a:p>
+                  </a:txBody>
+                  <a:tcPr marL="91440" marR="91440" marT="45720" marB="45720" anchor="ctr">
+                    <a:lnL w="6350" cap="flat" cmpd="sng" algn="ctr">
+                      <a:solidFill>
+                        <a:srgbClr val="FFFFFF"/>
+                      </a:solidFill>
+                      <a:prstDash val="solid"/>
+                      <a:round/>
+                      <a:headEnd type="none" w="med" len="med"/>
+                      <a:tailEnd type="none" w="med" len="med"/>
+                    </a:lnL>
+                    <a:lnR w="6350" cap="flat" cmpd="sng" algn="ctr">
+                      <a:solidFill>
+                        <a:srgbClr val="FFFFFF"/>
+                      </a:solidFill>
+                      <a:prstDash val="solid"/>
+                      <a:round/>
+                      <a:headEnd type="none" w="med" len="med"/>
+                      <a:tailEnd type="none" w="med" len="med"/>
+                    </a:lnR>
+                    <a:lnT w="6350" cap="flat" cmpd="sng" algn="ctr">
+                      <a:solidFill>
+                        <a:srgbClr val="FFFFFF"/>
+                      </a:solidFill>
+                      <a:prstDash val="solid"/>
+                      <a:round/>
+                      <a:headEnd type="none" w="med" len="med"/>
+                      <a:tailEnd type="none" w="med" len="med"/>
+                    </a:lnT>
+                    <a:lnB w="6350" cap="flat" cmpd="sng" algn="ctr">
+                      <a:solidFill>
+                        <a:srgbClr val="FFFFFF"/>
+                      </a:solidFill>
+                      <a:prstDash val="solid"/>
+                      <a:round/>
+                      <a:headEnd type="none" w="med" len="med"/>
+                      <a:tailEnd type="none" w="med" len="med"/>
+                    </a:lnB>
+                    <a:solidFill>
+                      <a:srgbClr val="FDEBD0"/>
+                    </a:solidFill>
+                  </a:tcPr>
+                </a:tc>
+                <a:tc>
+                  <a:txBody>
+                    <a:bodyPr/>
+                    <a:lstStyle/>
+                    <a:p>
+                      <a:pPr algn="ctr" indent="0" marL="0">
+                        <a:buNone/>
+                      </a:pPr>
+                      <a:r>
+                        <a:rPr lang="en-US" sz="1300" dirty="0">
+                          <a:solidFill>
+                            <a:srgbClr val="1F2937"/>
+                          </a:solidFill>
+                          <a:latin typeface="Arial" pitchFamily="34" charset="0"/>
+                          <a:ea typeface="Arial" pitchFamily="34" charset="-122"/>
+                          <a:cs typeface="Arial" pitchFamily="34" charset="-120"/>
+                        </a:rPr>
+                        <a:t>0.570</a:t>
+                      </a:r>
+                      <a:endParaRPr lang="en-US" sz="1300" dirty="0">
+                        <a:latin typeface="Arial" charset="0"/>
+                        <a:ea typeface="Arial" charset="0"/>
+                        <a:cs typeface="Arial" charset="0"/>
+                      </a:endParaRPr>
+                    </a:p>
+                  </a:txBody>
+                  <a:tcPr marL="91440" marR="91440" marT="45720" marB="45720" anchor="ctr">
+                    <a:lnL w="6350" cap="flat" cmpd="sng" algn="ctr">
+                      <a:solidFill>
+                        <a:srgbClr val="FFFFFF"/>
+                      </a:solidFill>
+                      <a:prstDash val="solid"/>
+                      <a:round/>
+                      <a:headEnd type="none" w="med" len="med"/>
+                      <a:tailEnd type="none" w="med" len="med"/>
+                    </a:lnL>
+                    <a:lnR w="6350" cap="flat" cmpd="sng" algn="ctr">
+                      <a:solidFill>
+                        <a:srgbClr val="FFFFFF"/>
+                      </a:solidFill>
+                      <a:prstDash val="solid"/>
+                      <a:round/>
+                      <a:headEnd type="none" w="med" len="med"/>
+                      <a:tailEnd type="none" w="med" len="med"/>
+                    </a:lnR>
+                    <a:lnT w="6350" cap="flat" cmpd="sng" algn="ctr">
+                      <a:solidFill>
+                        <a:srgbClr val="FFFFFF"/>
+                      </a:solidFill>
+                      <a:prstDash val="solid"/>
+                      <a:round/>
+                      <a:headEnd type="none" w="med" len="med"/>
+                      <a:tailEnd type="none" w="med" len="med"/>
+                    </a:lnT>
+                    <a:lnB w="6350" cap="flat" cmpd="sng" algn="ctr">
+                      <a:solidFill>
+                        <a:srgbClr val="FFFFFF"/>
+                      </a:solidFill>
+                      <a:prstDash val="solid"/>
+                      <a:round/>
+                      <a:headEnd type="none" w="med" len="med"/>
+                      <a:tailEnd type="none" w="med" len="med"/>
+                    </a:lnB>
+                    <a:solidFill>
+                      <a:srgbClr val="FDEBD0"/>
+                    </a:solidFill>
+                  </a:tcPr>
+                </a:tc>
+              </a:tr>
+              <a:tr h="384048">
+                <a:tc>
+                  <a:txBody>
+                    <a:bodyPr/>
+                    <a:lstStyle/>
+                    <a:p>
+                      <a:pPr algn="ctr" indent="0" marL="0">
+                        <a:buNone/>
+                      </a:pPr>
+                      <a:r>
+                        <a:rPr lang="en-US" sz="1300" dirty="0">
+                          <a:solidFill>
+                            <a:srgbClr val="1F2937"/>
+                          </a:solidFill>
+                          <a:latin typeface="Arial" pitchFamily="34" charset="0"/>
+                          <a:ea typeface="Arial" pitchFamily="34" charset="-122"/>
+                          <a:cs typeface="Arial" pitchFamily="34" charset="-120"/>
+                        </a:rPr>
+                        <a:t>7</a:t>
+                      </a:r>
+                      <a:endParaRPr lang="en-US" sz="1300" dirty="0">
+                        <a:latin typeface="Arial" charset="0"/>
+                        <a:ea typeface="Arial" charset="0"/>
+                        <a:cs typeface="Arial" charset="0"/>
+                      </a:endParaRPr>
+                    </a:p>
+                  </a:txBody>
+                  <a:tcPr marL="91440" marR="91440" marT="45720" marB="45720" anchor="ctr">
+                    <a:lnL w="6350" cap="flat" cmpd="sng" algn="ctr">
+                      <a:solidFill>
+                        <a:srgbClr val="FFFFFF"/>
+                      </a:solidFill>
+                      <a:prstDash val="solid"/>
+                      <a:round/>
+                      <a:headEnd type="none" w="med" len="med"/>
+                      <a:tailEnd type="none" w="med" len="med"/>
+                    </a:lnL>
+                    <a:lnR w="6350" cap="flat" cmpd="sng" algn="ctr">
+                      <a:solidFill>
+                        <a:srgbClr val="FFFFFF"/>
+                      </a:solidFill>
+                      <a:prstDash val="solid"/>
+                      <a:round/>
+                      <a:headEnd type="none" w="med" len="med"/>
+                      <a:tailEnd type="none" w="med" len="med"/>
+                    </a:lnR>
+                    <a:lnT w="6350" cap="flat" cmpd="sng" algn="ctr">
+                      <a:solidFill>
+                        <a:srgbClr val="FFFFFF"/>
+                      </a:solidFill>
+                      <a:prstDash val="solid"/>
+                      <a:round/>
+                      <a:headEnd type="none" w="med" len="med"/>
+                      <a:tailEnd type="none" w="med" len="med"/>
+                    </a:lnT>
+                    <a:lnB w="6350" cap="flat" cmpd="sng" algn="ctr">
+                      <a:solidFill>
+                        <a:srgbClr val="FFFFFF"/>
+                      </a:solidFill>
+                      <a:prstDash val="solid"/>
+                      <a:round/>
+                      <a:headEnd type="none" w="med" len="med"/>
+                      <a:tailEnd type="none" w="med" len="med"/>
+                    </a:lnB>
+                    <a:solidFill>
+                      <a:srgbClr val="FDEBD0"/>
+                    </a:solidFill>
+                  </a:tcPr>
+                </a:tc>
+                <a:tc>
+                  <a:txBody>
+                    <a:bodyPr/>
+                    <a:lstStyle/>
+                    <a:p>
+                      <a:pPr algn="ctr" indent="0" marL="0">
+                        <a:buNone/>
+                      </a:pPr>
+                      <a:r>
+                        <a:rPr lang="en-US" sz="1300" dirty="0">
                           <a:solidFill>
                             <a:srgbClr val="1F2937"/>
                           </a:solidFill>
@@ -26079,7 +28473,7 @@
                         </a:rPr>
                         <a:t>Gemini 2.5 Flash</a:t>
                       </a:r>
-                      <a:endParaRPr lang="en-US" sz="1600" dirty="0">
+                      <a:endParaRPr lang="en-US" sz="1300" dirty="0">
                         <a:latin typeface="Arial" charset="0"/>
                         <a:ea typeface="Arial" charset="0"/>
                         <a:cs typeface="Arial" charset="0"/>
@@ -26137,7 +28531,7 @@
                         <a:buNone/>
                       </a:pPr>
                       <a:r>
-                        <a:rPr lang="en-US" sz="1600" dirty="0">
+                        <a:rPr lang="en-US" sz="1300" dirty="0">
                           <a:solidFill>
                             <a:srgbClr val="1F2937"/>
                           </a:solidFill>
@@ -26147,7 +28541,7 @@
                         </a:rPr>
                         <a:t>Zero-Shot</a:t>
                       </a:r>
-                      <a:endParaRPr lang="en-US" sz="1600" dirty="0">
+                      <a:endParaRPr lang="en-US" sz="1300" dirty="0">
                         <a:latin typeface="Arial" charset="0"/>
                         <a:ea typeface="Arial" charset="0"/>
                         <a:cs typeface="Arial" charset="0"/>
@@ -26205,7 +28599,7 @@
                         <a:buNone/>
                       </a:pPr>
                       <a:r>
-                        <a:rPr lang="en-US" sz="1600" dirty="0">
+                        <a:rPr lang="en-US" sz="1300" dirty="0">
                           <a:solidFill>
                             <a:srgbClr val="1F2937"/>
                           </a:solidFill>
@@ -26215,7 +28609,7 @@
                         </a:rPr>
                         <a:t>0.493</a:t>
                       </a:r>
-                      <a:endParaRPr lang="en-US" sz="1600" dirty="0">
+                      <a:endParaRPr lang="en-US" sz="1300" dirty="0">
                         <a:latin typeface="Arial" charset="0"/>
                         <a:ea typeface="Arial" charset="0"/>
                         <a:cs typeface="Arial" charset="0"/>
@@ -26273,7 +28667,7 @@
                         <a:buNone/>
                       </a:pPr>
                       <a:r>
-                        <a:rPr lang="en-US" sz="1600" dirty="0">
+                        <a:rPr lang="en-US" sz="1300" dirty="0">
                           <a:solidFill>
                             <a:srgbClr val="1F2937"/>
                           </a:solidFill>
@@ -26283,7 +28677,7 @@
                         </a:rPr>
                         <a:t>0.587</a:t>
                       </a:r>
-                      <a:endParaRPr lang="en-US" sz="1600" dirty="0">
+                      <a:endParaRPr lang="en-US" sz="1300" dirty="0">
                         <a:latin typeface="Arial" charset="0"/>
                         <a:ea typeface="Arial" charset="0"/>
                         <a:cs typeface="Arial" charset="0"/>
@@ -26345,7 +28739,7 @@
         </p:nvSpPr>
         <p:spPr>
           <a:xfrm>
-            <a:off x="640080" y="3511296"/>
+            <a:off x="640080" y="4279392"/>
             <a:ext cx="7863840" cy="320040"/>
           </a:xfrm>
           <a:prstGeom prst="rect">
@@ -26586,7 +28980,7 @@
         </p:nvGraphicFramePr>
         <p:xfrm>
           <a:off x="640080" y="1143000"/>
-          <a:ext cx="7863840" cy="2304288"/>
+          <a:ext cx="7863840" cy="3072384"/>
         </p:xfrm>
         <a:graphic>
           <a:graphicData uri="http://schemas.openxmlformats.org/drawingml/2006/table">
@@ -26609,7 +29003,7 @@
                         <a:buNone/>
                       </a:pPr>
                       <a:r>
-                        <a:rPr lang="he-IL" altLang="en-US" sz="1600" b="1" dirty="0">
+                        <a:rPr lang="he-IL" altLang="en-US" sz="1300" b="1" dirty="0">
                           <a:solidFill>
                             <a:srgbClr val="FFFFFF"/>
                           </a:solidFill>
@@ -26619,7 +29013,7 @@
                         </a:rPr>
                         <a:t>דירוג</a:t>
                       </a:r>
-                      <a:endParaRPr lang="he-IL" sz="1600" dirty="0">
+                      <a:endParaRPr lang="he-IL" sz="1300" dirty="0">
                         <a:latin typeface="Arial" charset="0"/>
                         <a:ea typeface="Arial" charset="0"/>
                         <a:cs typeface="Arial" charset="0"/>
@@ -26677,7 +29071,7 @@
                         <a:buNone/>
                       </a:pPr>
                       <a:r>
-                        <a:rPr lang="he-IL" altLang="en-US" sz="1600" b="1" dirty="0">
+                        <a:rPr lang="he-IL" altLang="en-US" sz="1300" b="1" dirty="0">
                           <a:solidFill>
                             <a:srgbClr val="FFFFFF"/>
                           </a:solidFill>
@@ -26687,7 +29081,7 @@
                         </a:rPr>
                         <a:t>מודל</a:t>
                       </a:r>
-                      <a:endParaRPr lang="he-IL" sz="1600" dirty="0">
+                      <a:endParaRPr lang="he-IL" sz="1300" dirty="0">
                         <a:latin typeface="Arial" charset="0"/>
                         <a:ea typeface="Arial" charset="0"/>
                         <a:cs typeface="Arial" charset="0"/>
@@ -26745,7 +29139,7 @@
                         <a:buNone/>
                       </a:pPr>
                       <a:r>
-                        <a:rPr lang="he-IL" altLang="en-US" sz="1600" b="1" dirty="0">
+                        <a:rPr lang="he-IL" altLang="en-US" sz="1300" b="1" dirty="0">
                           <a:solidFill>
                             <a:srgbClr val="FFFFFF"/>
                           </a:solidFill>
@@ -26755,7 +29149,7 @@
                         </a:rPr>
                         <a:t>גישה</a:t>
                       </a:r>
-                      <a:endParaRPr lang="he-IL" sz="1600" dirty="0">
+                      <a:endParaRPr lang="he-IL" sz="1300" dirty="0">
                         <a:latin typeface="Arial" charset="0"/>
                         <a:ea typeface="Arial" charset="0"/>
                         <a:cs typeface="Arial" charset="0"/>
@@ -26813,7 +29207,7 @@
                         <a:buNone/>
                       </a:pPr>
                       <a:r>
-                        <a:rPr lang="en-US" sz="1600" b="1" dirty="0">
+                        <a:rPr lang="en-US" sz="1300" b="1" dirty="0">
                           <a:solidFill>
                             <a:srgbClr val="FFFFFF"/>
                           </a:solidFill>
@@ -26823,7 +29217,7 @@
                         </a:rPr>
                         <a:t>F1-Macro</a:t>
                       </a:r>
-                      <a:endParaRPr lang="en-US" sz="1600" dirty="0">
+                      <a:endParaRPr lang="en-US" sz="1300" dirty="0">
                         <a:latin typeface="Arial" charset="0"/>
                         <a:ea typeface="Arial" charset="0"/>
                         <a:cs typeface="Arial" charset="0"/>
@@ -26881,7 +29275,7 @@
                         <a:buNone/>
                       </a:pPr>
                       <a:r>
-                        <a:rPr lang="en-US" sz="1600" b="1" dirty="0">
+                        <a:rPr lang="en-US" sz="1300" b="1" dirty="0">
                           <a:solidFill>
                             <a:srgbClr val="FFFFFF"/>
                           </a:solidFill>
@@ -26891,7 +29285,7 @@
                         </a:rPr>
                         <a:t>Accuracy</a:t>
                       </a:r>
-                      <a:endParaRPr lang="en-US" sz="1600" dirty="0">
+                      <a:endParaRPr lang="en-US" sz="1300" dirty="0">
                         <a:latin typeface="Arial" charset="0"/>
                         <a:ea typeface="Arial" charset="0"/>
                         <a:cs typeface="Arial" charset="0"/>
@@ -26951,7 +29345,7 @@
                         <a:buNone/>
                       </a:pPr>
                       <a:r>
-                        <a:rPr lang="en-US" sz="1600" b="1" dirty="0">
+                        <a:rPr lang="en-US" sz="1300" b="1" dirty="0">
                           <a:solidFill>
                             <a:srgbClr val="1F2937"/>
                           </a:solidFill>
@@ -26961,7 +29355,7 @@
                         </a:rPr>
                         <a:t>1 🏆</a:t>
                       </a:r>
-                      <a:endParaRPr lang="en-US" sz="1600" dirty="0">
+                      <a:endParaRPr lang="en-US" sz="1300" dirty="0">
                         <a:latin typeface="Arial" charset="0"/>
                         <a:ea typeface="Arial" charset="0"/>
                         <a:cs typeface="Arial" charset="0"/>
@@ -27019,7 +29413,7 @@
                         <a:buNone/>
                       </a:pPr>
                       <a:r>
-                        <a:rPr lang="en-US" sz="1600" b="1" dirty="0">
+                        <a:rPr lang="en-US" sz="1300" b="1" dirty="0">
                           <a:solidFill>
                             <a:srgbClr val="1F2937"/>
                           </a:solidFill>
@@ -27029,7 +29423,7 @@
                         </a:rPr>
                         <a:t>ModernBERT</a:t>
                       </a:r>
-                      <a:endParaRPr lang="en-US" sz="1600" dirty="0">
+                      <a:endParaRPr lang="en-US" sz="1300" dirty="0">
                         <a:latin typeface="Arial" charset="0"/>
                         <a:ea typeface="Arial" charset="0"/>
                         <a:cs typeface="Arial" charset="0"/>
@@ -27087,7 +29481,7 @@
                         <a:buNone/>
                       </a:pPr>
                       <a:r>
-                        <a:rPr lang="en-US" sz="1600" b="1" dirty="0">
+                        <a:rPr lang="en-US" sz="1300" b="1" dirty="0">
                           <a:solidFill>
                             <a:srgbClr val="1F2937"/>
                           </a:solidFill>
@@ -27097,7 +29491,7 @@
                         </a:rPr>
                         <a:t>Fine-Tuned</a:t>
                       </a:r>
-                      <a:endParaRPr lang="en-US" sz="1600" dirty="0">
+                      <a:endParaRPr lang="en-US" sz="1300" dirty="0">
                         <a:latin typeface="Arial" charset="0"/>
                         <a:ea typeface="Arial" charset="0"/>
                         <a:cs typeface="Arial" charset="0"/>
@@ -27155,7 +29549,7 @@
                         <a:buNone/>
                       </a:pPr>
                       <a:r>
-                        <a:rPr lang="en-US" sz="1600" b="1" dirty="0">
+                        <a:rPr lang="en-US" sz="1300" b="1" dirty="0">
                           <a:solidFill>
                             <a:srgbClr val="1F2937"/>
                           </a:solidFill>
@@ -27165,7 +29559,7 @@
                         </a:rPr>
                         <a:t>0.789</a:t>
                       </a:r>
-                      <a:endParaRPr lang="en-US" sz="1600" dirty="0">
+                      <a:endParaRPr lang="en-US" sz="1300" dirty="0">
                         <a:latin typeface="Arial" charset="0"/>
                         <a:ea typeface="Arial" charset="0"/>
                         <a:cs typeface="Arial" charset="0"/>
@@ -27223,7 +29617,7 @@
                         <a:buNone/>
                       </a:pPr>
                       <a:r>
-                        <a:rPr lang="en-US" sz="1600" b="1" dirty="0">
+                        <a:rPr lang="en-US" sz="1300" b="1" dirty="0">
                           <a:solidFill>
                             <a:srgbClr val="1F2937"/>
                           </a:solidFill>
@@ -27233,7 +29627,7 @@
                         </a:rPr>
                         <a:t>0.841</a:t>
                       </a:r>
-                      <a:endParaRPr lang="en-US" sz="1600" dirty="0">
+                      <a:endParaRPr lang="en-US" sz="1300" dirty="0">
                         <a:latin typeface="Arial" charset="0"/>
                         <a:ea typeface="Arial" charset="0"/>
                         <a:cs typeface="Arial" charset="0"/>
@@ -27293,7 +29687,7 @@
                         <a:buNone/>
                       </a:pPr>
                       <a:r>
-                        <a:rPr lang="en-US" sz="1600" dirty="0">
+                        <a:rPr lang="en-US" sz="1300" dirty="0">
                           <a:solidFill>
                             <a:srgbClr val="1F2937"/>
                           </a:solidFill>
@@ -27303,7 +29697,7 @@
                         </a:rPr>
                         <a:t>2</a:t>
                       </a:r>
-                      <a:endParaRPr lang="en-US" sz="1600" dirty="0">
+                      <a:endParaRPr lang="en-US" sz="1300" dirty="0">
                         <a:latin typeface="Arial" charset="0"/>
                         <a:ea typeface="Arial" charset="0"/>
                         <a:cs typeface="Arial" charset="0"/>
@@ -27361,7 +29755,7 @@
                         <a:buNone/>
                       </a:pPr>
                       <a:r>
-                        <a:rPr lang="en-US" sz="1600" dirty="0">
+                        <a:rPr lang="en-US" sz="1300" dirty="0">
                           <a:solidFill>
                             <a:srgbClr val="1F2937"/>
                           </a:solidFill>
@@ -27371,7 +29765,7 @@
                         </a:rPr>
                         <a:t>BERTweet</a:t>
                       </a:r>
-                      <a:endParaRPr lang="en-US" sz="1600" dirty="0">
+                      <a:endParaRPr lang="en-US" sz="1300" dirty="0">
                         <a:latin typeface="Arial" charset="0"/>
                         <a:ea typeface="Arial" charset="0"/>
                         <a:cs typeface="Arial" charset="0"/>
@@ -27429,7 +29823,7 @@
                         <a:buNone/>
                       </a:pPr>
                       <a:r>
-                        <a:rPr lang="en-US" sz="1600" dirty="0">
+                        <a:rPr lang="en-US" sz="1300" dirty="0">
                           <a:solidFill>
                             <a:srgbClr val="1F2937"/>
                           </a:solidFill>
@@ -27439,7 +29833,7 @@
                         </a:rPr>
                         <a:t>Fine-Tuned</a:t>
                       </a:r>
-                      <a:endParaRPr lang="en-US" sz="1600" dirty="0">
+                      <a:endParaRPr lang="en-US" sz="1300" dirty="0">
                         <a:latin typeface="Arial" charset="0"/>
                         <a:ea typeface="Arial" charset="0"/>
                         <a:cs typeface="Arial" charset="0"/>
@@ -27497,7 +29891,7 @@
                         <a:buNone/>
                       </a:pPr>
                       <a:r>
-                        <a:rPr lang="en-US" sz="1600" dirty="0">
+                        <a:rPr lang="en-US" sz="1300" dirty="0">
                           <a:solidFill>
                             <a:srgbClr val="1F2937"/>
                           </a:solidFill>
@@ -27507,7 +29901,7 @@
                         </a:rPr>
                         <a:t>0.789</a:t>
                       </a:r>
-                      <a:endParaRPr lang="en-US" sz="1600" dirty="0">
+                      <a:endParaRPr lang="en-US" sz="1300" dirty="0">
                         <a:latin typeface="Arial" charset="0"/>
                         <a:ea typeface="Arial" charset="0"/>
                         <a:cs typeface="Arial" charset="0"/>
@@ -27565,7 +29959,7 @@
                         <a:buNone/>
                       </a:pPr>
                       <a:r>
-                        <a:rPr lang="en-US" sz="1600" dirty="0">
+                        <a:rPr lang="en-US" sz="1300" dirty="0">
                           <a:solidFill>
                             <a:srgbClr val="1F2937"/>
                           </a:solidFill>
@@ -27575,7 +29969,7 @@
                         </a:rPr>
                         <a:t>0.829</a:t>
                       </a:r>
-                      <a:endParaRPr lang="en-US" sz="1600" dirty="0">
+                      <a:endParaRPr lang="en-US" sz="1300" dirty="0">
                         <a:latin typeface="Arial" charset="0"/>
                         <a:ea typeface="Arial" charset="0"/>
                         <a:cs typeface="Arial" charset="0"/>
@@ -27635,7 +30029,7 @@
                         <a:buNone/>
                       </a:pPr>
                       <a:r>
-                        <a:rPr lang="en-US" sz="1600" dirty="0">
+                        <a:rPr lang="en-US" sz="1300" dirty="0">
                           <a:solidFill>
                             <a:srgbClr val="1F2937"/>
                           </a:solidFill>
@@ -27645,7 +30039,7 @@
                         </a:rPr>
                         <a:t>3</a:t>
                       </a:r>
-                      <a:endParaRPr lang="en-US" sz="1600" dirty="0">
+                      <a:endParaRPr lang="en-US" sz="1300" dirty="0">
                         <a:latin typeface="Arial" charset="0"/>
                         <a:ea typeface="Arial" charset="0"/>
                         <a:cs typeface="Arial" charset="0"/>
@@ -27703,7 +30097,7 @@
                         <a:buNone/>
                       </a:pPr>
                       <a:r>
-                        <a:rPr lang="en-US" sz="1600" dirty="0">
+                        <a:rPr lang="en-US" sz="1300" dirty="0">
                           <a:solidFill>
                             <a:srgbClr val="1F2937"/>
                           </a:solidFill>
@@ -27713,7 +30107,7 @@
                         </a:rPr>
                         <a:t>RoBERTa</a:t>
                       </a:r>
-                      <a:endParaRPr lang="en-US" sz="1600" dirty="0">
+                      <a:endParaRPr lang="en-US" sz="1300" dirty="0">
                         <a:latin typeface="Arial" charset="0"/>
                         <a:ea typeface="Arial" charset="0"/>
                         <a:cs typeface="Arial" charset="0"/>
@@ -27771,7 +30165,7 @@
                         <a:buNone/>
                       </a:pPr>
                       <a:r>
-                        <a:rPr lang="en-US" sz="1600" dirty="0">
+                        <a:rPr lang="en-US" sz="1300" dirty="0">
                           <a:solidFill>
                             <a:srgbClr val="1F2937"/>
                           </a:solidFill>
@@ -27781,7 +30175,7 @@
                         </a:rPr>
                         <a:t>Fine-Tuned</a:t>
                       </a:r>
-                      <a:endParaRPr lang="en-US" sz="1600" dirty="0">
+                      <a:endParaRPr lang="en-US" sz="1300" dirty="0">
                         <a:latin typeface="Arial" charset="0"/>
                         <a:ea typeface="Arial" charset="0"/>
                         <a:cs typeface="Arial" charset="0"/>
@@ -27839,7 +30233,7 @@
                         <a:buNone/>
                       </a:pPr>
                       <a:r>
-                        <a:rPr lang="en-US" sz="1600" dirty="0">
+                        <a:rPr lang="en-US" sz="1300" dirty="0">
                           <a:solidFill>
                             <a:srgbClr val="1F2937"/>
                           </a:solidFill>
@@ -27849,7 +30243,7 @@
                         </a:rPr>
                         <a:t>0.779</a:t>
                       </a:r>
-                      <a:endParaRPr lang="en-US" sz="1600" dirty="0">
+                      <a:endParaRPr lang="en-US" sz="1300" dirty="0">
                         <a:latin typeface="Arial" charset="0"/>
                         <a:ea typeface="Arial" charset="0"/>
                         <a:cs typeface="Arial" charset="0"/>
@@ -27907,7 +30301,7 @@
                         <a:buNone/>
                       </a:pPr>
                       <a:r>
-                        <a:rPr lang="en-US" sz="1600" dirty="0">
+                        <a:rPr lang="en-US" sz="1300" dirty="0">
                           <a:solidFill>
                             <a:srgbClr val="1F2937"/>
                           </a:solidFill>
@@ -27917,7 +30311,7 @@
                         </a:rPr>
                         <a:t>0.823</a:t>
                       </a:r>
-                      <a:endParaRPr lang="en-US" sz="1600" dirty="0">
+                      <a:endParaRPr lang="en-US" sz="1300" dirty="0">
                         <a:latin typeface="Arial" charset="0"/>
                         <a:ea typeface="Arial" charset="0"/>
                         <a:cs typeface="Arial" charset="0"/>
@@ -27977,7 +30371,7 @@
                         <a:buNone/>
                       </a:pPr>
                       <a:r>
-                        <a:rPr lang="en-US" sz="1600" dirty="0">
+                        <a:rPr lang="en-US" sz="1300" dirty="0">
                           <a:solidFill>
                             <a:srgbClr val="1F2937"/>
                           </a:solidFill>
@@ -27987,7 +30381,7 @@
                         </a:rPr>
                         <a:t>4</a:t>
                       </a:r>
-                      <a:endParaRPr lang="en-US" sz="1600" dirty="0">
+                      <a:endParaRPr lang="en-US" sz="1300" dirty="0">
                         <a:latin typeface="Arial" charset="0"/>
                         <a:ea typeface="Arial" charset="0"/>
                         <a:cs typeface="Arial" charset="0"/>
@@ -28045,7 +30439,7 @@
                         <a:buNone/>
                       </a:pPr>
                       <a:r>
-                        <a:rPr lang="en-US" sz="1600" dirty="0">
+                        <a:rPr lang="en-US" sz="1300" dirty="0">
                           <a:solidFill>
                             <a:srgbClr val="1F2937"/>
                           </a:solidFill>
@@ -28055,7 +30449,7 @@
                         </a:rPr>
                         <a:t>MiniLM</a:t>
                       </a:r>
-                      <a:endParaRPr lang="en-US" sz="1600" dirty="0">
+                      <a:endParaRPr lang="en-US" sz="1300" dirty="0">
                         <a:latin typeface="Arial" charset="0"/>
                         <a:ea typeface="Arial" charset="0"/>
                         <a:cs typeface="Arial" charset="0"/>
@@ -28113,7 +30507,7 @@
                         <a:buNone/>
                       </a:pPr>
                       <a:r>
-                        <a:rPr lang="en-US" sz="1600" dirty="0">
+                        <a:rPr lang="en-US" sz="1300" dirty="0">
                           <a:solidFill>
                             <a:srgbClr val="1F2937"/>
                           </a:solidFill>
@@ -28123,7 +30517,7 @@
                         </a:rPr>
                         <a:t>Fine-Tuned</a:t>
                       </a:r>
-                      <a:endParaRPr lang="en-US" sz="1600" dirty="0">
+                      <a:endParaRPr lang="en-US" sz="1300" dirty="0">
                         <a:latin typeface="Arial" charset="0"/>
                         <a:ea typeface="Arial" charset="0"/>
                         <a:cs typeface="Arial" charset="0"/>
@@ -28181,7 +30575,7 @@
                         <a:buNone/>
                       </a:pPr>
                       <a:r>
-                        <a:rPr lang="en-US" sz="1600" dirty="0">
+                        <a:rPr lang="en-US" sz="1300" dirty="0">
                           <a:solidFill>
                             <a:srgbClr val="1F2937"/>
                           </a:solidFill>
@@ -28191,7 +30585,7 @@
                         </a:rPr>
                         <a:t>0.764</a:t>
                       </a:r>
-                      <a:endParaRPr lang="en-US" sz="1600" dirty="0">
+                      <a:endParaRPr lang="en-US" sz="1300" dirty="0">
                         <a:latin typeface="Arial" charset="0"/>
                         <a:ea typeface="Arial" charset="0"/>
                         <a:cs typeface="Arial" charset="0"/>
@@ -28249,7 +30643,7 @@
                         <a:buNone/>
                       </a:pPr>
                       <a:r>
-                        <a:rPr lang="en-US" sz="1600" dirty="0">
+                        <a:rPr lang="en-US" sz="1300" dirty="0">
                           <a:solidFill>
                             <a:srgbClr val="1F2937"/>
                           </a:solidFill>
@@ -28259,7 +30653,7 @@
                         </a:rPr>
                         <a:t>0.811</a:t>
                       </a:r>
-                      <a:endParaRPr lang="en-US" sz="1600" dirty="0">
+                      <a:endParaRPr lang="en-US" sz="1300" dirty="0">
                         <a:latin typeface="Arial" charset="0"/>
                         <a:ea typeface="Arial" charset="0"/>
                         <a:cs typeface="Arial" charset="0"/>
@@ -28319,7 +30713,7 @@
                         <a:buNone/>
                       </a:pPr>
                       <a:r>
-                        <a:rPr lang="en-US" sz="1600" dirty="0">
+                        <a:rPr lang="en-US" sz="1300" dirty="0">
                           <a:solidFill>
                             <a:srgbClr val="1F2937"/>
                           </a:solidFill>
@@ -28329,7 +30723,7 @@
                         </a:rPr>
                         <a:t>5</a:t>
                       </a:r>
-                      <a:endParaRPr lang="en-US" sz="1600" dirty="0">
+                      <a:endParaRPr lang="en-US" sz="1300" dirty="0">
                         <a:latin typeface="Arial" charset="0"/>
                         <a:ea typeface="Arial" charset="0"/>
                         <a:cs typeface="Arial" charset="0"/>
@@ -28387,7 +30781,349 @@
                         <a:buNone/>
                       </a:pPr>
                       <a:r>
-                        <a:rPr lang="en-US" sz="1600" dirty="0">
+                        <a:rPr lang="en-US" sz="1300" dirty="0">
+                          <a:solidFill>
+                            <a:srgbClr val="1F2937"/>
+                          </a:solidFill>
+                          <a:latin typeface="Arial" pitchFamily="34" charset="0"/>
+                          <a:ea typeface="Arial" pitchFamily="34" charset="-122"/>
+                          <a:cs typeface="Arial" pitchFamily="34" charset="-120"/>
+                        </a:rPr>
+                        <a:t>Qwen3.6 27B</a:t>
+                      </a:r>
+                      <a:endParaRPr lang="en-US" sz="1300" dirty="0">
+                        <a:latin typeface="Arial" charset="0"/>
+                        <a:ea typeface="Arial" charset="0"/>
+                        <a:cs typeface="Arial" charset="0"/>
+                      </a:endParaRPr>
+                    </a:p>
+                  </a:txBody>
+                  <a:tcPr marL="91440" marR="91440" marT="45720" marB="45720" anchor="ctr">
+                    <a:lnL w="6350" cap="flat" cmpd="sng" algn="ctr">
+                      <a:solidFill>
+                        <a:srgbClr val="FFFFFF"/>
+                      </a:solidFill>
+                      <a:prstDash val="solid"/>
+                      <a:round/>
+                      <a:headEnd type="none" w="med" len="med"/>
+                      <a:tailEnd type="none" w="med" len="med"/>
+                    </a:lnL>
+                    <a:lnR w="6350" cap="flat" cmpd="sng" algn="ctr">
+                      <a:solidFill>
+                        <a:srgbClr val="FFFFFF"/>
+                      </a:solidFill>
+                      <a:prstDash val="solid"/>
+                      <a:round/>
+                      <a:headEnd type="none" w="med" len="med"/>
+                      <a:tailEnd type="none" w="med" len="med"/>
+                    </a:lnR>
+                    <a:lnT w="6350" cap="flat" cmpd="sng" algn="ctr">
+                      <a:solidFill>
+                        <a:srgbClr val="FFFFFF"/>
+                      </a:solidFill>
+                      <a:prstDash val="solid"/>
+                      <a:round/>
+                      <a:headEnd type="none" w="med" len="med"/>
+                      <a:tailEnd type="none" w="med" len="med"/>
+                    </a:lnT>
+                    <a:lnB w="6350" cap="flat" cmpd="sng" algn="ctr">
+                      <a:solidFill>
+                        <a:srgbClr val="FFFFFF"/>
+                      </a:solidFill>
+                      <a:prstDash val="solid"/>
+                      <a:round/>
+                      <a:headEnd type="none" w="med" len="med"/>
+                      <a:tailEnd type="none" w="med" len="med"/>
+                    </a:lnB>
+                    <a:solidFill>
+                      <a:srgbClr val="FDEBD0"/>
+                    </a:solidFill>
+                  </a:tcPr>
+                </a:tc>
+                <a:tc>
+                  <a:txBody>
+                    <a:bodyPr/>
+                    <a:lstStyle/>
+                    <a:p>
+                      <a:pPr algn="ctr" indent="0" marL="0">
+                        <a:buNone/>
+                      </a:pPr>
+                      <a:r>
+                        <a:rPr lang="en-US" sz="1300" dirty="0">
+                          <a:solidFill>
+                            <a:srgbClr val="1F2937"/>
+                          </a:solidFill>
+                          <a:latin typeface="Arial" pitchFamily="34" charset="0"/>
+                          <a:ea typeface="Arial" pitchFamily="34" charset="-122"/>
+                          <a:cs typeface="Arial" pitchFamily="34" charset="-120"/>
+                        </a:rPr>
+                        <a:t>Zero-Shot</a:t>
+                      </a:r>
+                      <a:endParaRPr lang="en-US" sz="1300" dirty="0">
+                        <a:latin typeface="Arial" charset="0"/>
+                        <a:ea typeface="Arial" charset="0"/>
+                        <a:cs typeface="Arial" charset="0"/>
+                      </a:endParaRPr>
+                    </a:p>
+                  </a:txBody>
+                  <a:tcPr marL="91440" marR="91440" marT="45720" marB="45720" anchor="ctr">
+                    <a:lnL w="6350" cap="flat" cmpd="sng" algn="ctr">
+                      <a:solidFill>
+                        <a:srgbClr val="FFFFFF"/>
+                      </a:solidFill>
+                      <a:prstDash val="solid"/>
+                      <a:round/>
+                      <a:headEnd type="none" w="med" len="med"/>
+                      <a:tailEnd type="none" w="med" len="med"/>
+                    </a:lnL>
+                    <a:lnR w="6350" cap="flat" cmpd="sng" algn="ctr">
+                      <a:solidFill>
+                        <a:srgbClr val="FFFFFF"/>
+                      </a:solidFill>
+                      <a:prstDash val="solid"/>
+                      <a:round/>
+                      <a:headEnd type="none" w="med" len="med"/>
+                      <a:tailEnd type="none" w="med" len="med"/>
+                    </a:lnR>
+                    <a:lnT w="6350" cap="flat" cmpd="sng" algn="ctr">
+                      <a:solidFill>
+                        <a:srgbClr val="FFFFFF"/>
+                      </a:solidFill>
+                      <a:prstDash val="solid"/>
+                      <a:round/>
+                      <a:headEnd type="none" w="med" len="med"/>
+                      <a:tailEnd type="none" w="med" len="med"/>
+                    </a:lnT>
+                    <a:lnB w="6350" cap="flat" cmpd="sng" algn="ctr">
+                      <a:solidFill>
+                        <a:srgbClr val="FFFFFF"/>
+                      </a:solidFill>
+                      <a:prstDash val="solid"/>
+                      <a:round/>
+                      <a:headEnd type="none" w="med" len="med"/>
+                      <a:tailEnd type="none" w="med" len="med"/>
+                    </a:lnB>
+                    <a:solidFill>
+                      <a:srgbClr val="FDEBD0"/>
+                    </a:solidFill>
+                  </a:tcPr>
+                </a:tc>
+                <a:tc>
+                  <a:txBody>
+                    <a:bodyPr/>
+                    <a:lstStyle/>
+                    <a:p>
+                      <a:pPr algn="ctr" indent="0" marL="0">
+                        <a:buNone/>
+                      </a:pPr>
+                      <a:r>
+                        <a:rPr lang="en-US" sz="1300" dirty="0">
+                          <a:solidFill>
+                            <a:srgbClr val="1F2937"/>
+                          </a:solidFill>
+                          <a:latin typeface="Arial" pitchFamily="34" charset="0"/>
+                          <a:ea typeface="Arial" pitchFamily="34" charset="-122"/>
+                          <a:cs typeface="Arial" pitchFamily="34" charset="-120"/>
+                        </a:rPr>
+                        <a:t>0.648</a:t>
+                      </a:r>
+                      <a:endParaRPr lang="en-US" sz="1300" dirty="0">
+                        <a:latin typeface="Arial" charset="0"/>
+                        <a:ea typeface="Arial" charset="0"/>
+                        <a:cs typeface="Arial" charset="0"/>
+                      </a:endParaRPr>
+                    </a:p>
+                  </a:txBody>
+                  <a:tcPr marL="91440" marR="91440" marT="45720" marB="45720" anchor="ctr">
+                    <a:lnL w="6350" cap="flat" cmpd="sng" algn="ctr">
+                      <a:solidFill>
+                        <a:srgbClr val="FFFFFF"/>
+                      </a:solidFill>
+                      <a:prstDash val="solid"/>
+                      <a:round/>
+                      <a:headEnd type="none" w="med" len="med"/>
+                      <a:tailEnd type="none" w="med" len="med"/>
+                    </a:lnL>
+                    <a:lnR w="6350" cap="flat" cmpd="sng" algn="ctr">
+                      <a:solidFill>
+                        <a:srgbClr val="FFFFFF"/>
+                      </a:solidFill>
+                      <a:prstDash val="solid"/>
+                      <a:round/>
+                      <a:headEnd type="none" w="med" len="med"/>
+                      <a:tailEnd type="none" w="med" len="med"/>
+                    </a:lnR>
+                    <a:lnT w="6350" cap="flat" cmpd="sng" algn="ctr">
+                      <a:solidFill>
+                        <a:srgbClr val="FFFFFF"/>
+                      </a:solidFill>
+                      <a:prstDash val="solid"/>
+                      <a:round/>
+                      <a:headEnd type="none" w="med" len="med"/>
+                      <a:tailEnd type="none" w="med" len="med"/>
+                    </a:lnT>
+                    <a:lnB w="6350" cap="flat" cmpd="sng" algn="ctr">
+                      <a:solidFill>
+                        <a:srgbClr val="FFFFFF"/>
+                      </a:solidFill>
+                      <a:prstDash val="solid"/>
+                      <a:round/>
+                      <a:headEnd type="none" w="med" len="med"/>
+                      <a:tailEnd type="none" w="med" len="med"/>
+                    </a:lnB>
+                    <a:solidFill>
+                      <a:srgbClr val="FDEBD0"/>
+                    </a:solidFill>
+                  </a:tcPr>
+                </a:tc>
+                <a:tc>
+                  <a:txBody>
+                    <a:bodyPr/>
+                    <a:lstStyle/>
+                    <a:p>
+                      <a:pPr algn="ctr" indent="0" marL="0">
+                        <a:buNone/>
+                      </a:pPr>
+                      <a:r>
+                        <a:rPr lang="en-US" sz="1300" dirty="0">
+                          <a:solidFill>
+                            <a:srgbClr val="1F2937"/>
+                          </a:solidFill>
+                          <a:latin typeface="Arial" pitchFamily="34" charset="0"/>
+                          <a:ea typeface="Arial" pitchFamily="34" charset="-122"/>
+                          <a:cs typeface="Arial" pitchFamily="34" charset="-120"/>
+                        </a:rPr>
+                        <a:t>0.732</a:t>
+                      </a:r>
+                      <a:endParaRPr lang="en-US" sz="1300" dirty="0">
+                        <a:latin typeface="Arial" charset="0"/>
+                        <a:ea typeface="Arial" charset="0"/>
+                        <a:cs typeface="Arial" charset="0"/>
+                      </a:endParaRPr>
+                    </a:p>
+                  </a:txBody>
+                  <a:tcPr marL="91440" marR="91440" marT="45720" marB="45720" anchor="ctr">
+                    <a:lnL w="6350" cap="flat" cmpd="sng" algn="ctr">
+                      <a:solidFill>
+                        <a:srgbClr val="FFFFFF"/>
+                      </a:solidFill>
+                      <a:prstDash val="solid"/>
+                      <a:round/>
+                      <a:headEnd type="none" w="med" len="med"/>
+                      <a:tailEnd type="none" w="med" len="med"/>
+                    </a:lnL>
+                    <a:lnR w="6350" cap="flat" cmpd="sng" algn="ctr">
+                      <a:solidFill>
+                        <a:srgbClr val="FFFFFF"/>
+                      </a:solidFill>
+                      <a:prstDash val="solid"/>
+                      <a:round/>
+                      <a:headEnd type="none" w="med" len="med"/>
+                      <a:tailEnd type="none" w="med" len="med"/>
+                    </a:lnR>
+                    <a:lnT w="6350" cap="flat" cmpd="sng" algn="ctr">
+                      <a:solidFill>
+                        <a:srgbClr val="FFFFFF"/>
+                      </a:solidFill>
+                      <a:prstDash val="solid"/>
+                      <a:round/>
+                      <a:headEnd type="none" w="med" len="med"/>
+                      <a:tailEnd type="none" w="med" len="med"/>
+                    </a:lnT>
+                    <a:lnB w="6350" cap="flat" cmpd="sng" algn="ctr">
+                      <a:solidFill>
+                        <a:srgbClr val="FFFFFF"/>
+                      </a:solidFill>
+                      <a:prstDash val="solid"/>
+                      <a:round/>
+                      <a:headEnd type="none" w="med" len="med"/>
+                      <a:tailEnd type="none" w="med" len="med"/>
+                    </a:lnB>
+                    <a:solidFill>
+                      <a:srgbClr val="FDEBD0"/>
+                    </a:solidFill>
+                  </a:tcPr>
+                </a:tc>
+              </a:tr>
+              <a:tr h="384048">
+                <a:tc>
+                  <a:txBody>
+                    <a:bodyPr/>
+                    <a:lstStyle/>
+                    <a:p>
+                      <a:pPr algn="ctr" indent="0" marL="0">
+                        <a:buNone/>
+                      </a:pPr>
+                      <a:r>
+                        <a:rPr lang="en-US" sz="1300" dirty="0">
+                          <a:solidFill>
+                            <a:srgbClr val="1F2937"/>
+                          </a:solidFill>
+                          <a:latin typeface="Arial" pitchFamily="34" charset="0"/>
+                          <a:ea typeface="Arial" pitchFamily="34" charset="-122"/>
+                          <a:cs typeface="Arial" pitchFamily="34" charset="-120"/>
+                        </a:rPr>
+                        <a:t>6</a:t>
+                      </a:r>
+                      <a:endParaRPr lang="en-US" sz="1300" dirty="0">
+                        <a:latin typeface="Arial" charset="0"/>
+                        <a:ea typeface="Arial" charset="0"/>
+                        <a:cs typeface="Arial" charset="0"/>
+                      </a:endParaRPr>
+                    </a:p>
+                  </a:txBody>
+                  <a:tcPr marL="91440" marR="91440" marT="45720" marB="45720" anchor="ctr">
+                    <a:lnL w="6350" cap="flat" cmpd="sng" algn="ctr">
+                      <a:solidFill>
+                        <a:srgbClr val="FFFFFF"/>
+                      </a:solidFill>
+                      <a:prstDash val="solid"/>
+                      <a:round/>
+                      <a:headEnd type="none" w="med" len="med"/>
+                      <a:tailEnd type="none" w="med" len="med"/>
+                    </a:lnL>
+                    <a:lnR w="6350" cap="flat" cmpd="sng" algn="ctr">
+                      <a:solidFill>
+                        <a:srgbClr val="FFFFFF"/>
+                      </a:solidFill>
+                      <a:prstDash val="solid"/>
+                      <a:round/>
+                      <a:headEnd type="none" w="med" len="med"/>
+                      <a:tailEnd type="none" w="med" len="med"/>
+                    </a:lnR>
+                    <a:lnT w="6350" cap="flat" cmpd="sng" algn="ctr">
+                      <a:solidFill>
+                        <a:srgbClr val="FFFFFF"/>
+                      </a:solidFill>
+                      <a:prstDash val="solid"/>
+                      <a:round/>
+                      <a:headEnd type="none" w="med" len="med"/>
+                      <a:tailEnd type="none" w="med" len="med"/>
+                    </a:lnT>
+                    <a:lnB w="6350" cap="flat" cmpd="sng" algn="ctr">
+                      <a:solidFill>
+                        <a:srgbClr val="FFFFFF"/>
+                      </a:solidFill>
+                      <a:prstDash val="solid"/>
+                      <a:round/>
+                      <a:headEnd type="none" w="med" len="med"/>
+                      <a:tailEnd type="none" w="med" len="med"/>
+                    </a:lnB>
+                    <a:solidFill>
+                      <a:srgbClr val="FDEBD0"/>
+                    </a:solidFill>
+                  </a:tcPr>
+                </a:tc>
+                <a:tc>
+                  <a:txBody>
+                    <a:bodyPr/>
+                    <a:lstStyle/>
+                    <a:p>
+                      <a:pPr algn="ctr" indent="0" marL="0">
+                        <a:buNone/>
+                      </a:pPr>
+                      <a:r>
+                        <a:rPr lang="en-US" sz="1300" dirty="0">
                           <a:solidFill>
                             <a:srgbClr val="1F2937"/>
                           </a:solidFill>
@@ -28397,7 +31133,7 @@
                         </a:rPr>
                         <a:t>Gemini 2.5 Flash</a:t>
                       </a:r>
-                      <a:endParaRPr lang="en-US" sz="1600" dirty="0">
+                      <a:endParaRPr lang="en-US" sz="1300" dirty="0">
                         <a:latin typeface="Arial" charset="0"/>
                         <a:ea typeface="Arial" charset="0"/>
                         <a:cs typeface="Arial" charset="0"/>
@@ -28455,7 +31191,7 @@
                         <a:buNone/>
                       </a:pPr>
                       <a:r>
-                        <a:rPr lang="en-US" sz="1600" dirty="0">
+                        <a:rPr lang="en-US" sz="1300" dirty="0">
                           <a:solidFill>
                             <a:srgbClr val="1F2937"/>
                           </a:solidFill>
@@ -28465,7 +31201,7 @@
                         </a:rPr>
                         <a:t>Zero-Shot</a:t>
                       </a:r>
-                      <a:endParaRPr lang="en-US" sz="1600" dirty="0">
+                      <a:endParaRPr lang="en-US" sz="1300" dirty="0">
                         <a:latin typeface="Arial" charset="0"/>
                         <a:ea typeface="Arial" charset="0"/>
                         <a:cs typeface="Arial" charset="0"/>
@@ -28523,7 +31259,7 @@
                         <a:buNone/>
                       </a:pPr>
                       <a:r>
-                        <a:rPr lang="en-US" sz="1600" dirty="0">
+                        <a:rPr lang="en-US" sz="1300" dirty="0">
                           <a:solidFill>
                             <a:srgbClr val="1F2937"/>
                           </a:solidFill>
@@ -28533,7 +31269,7 @@
                         </a:rPr>
                         <a:t>0.620</a:t>
                       </a:r>
-                      <a:endParaRPr lang="en-US" sz="1600" dirty="0">
+                      <a:endParaRPr lang="en-US" sz="1300" dirty="0">
                         <a:latin typeface="Arial" charset="0"/>
                         <a:ea typeface="Arial" charset="0"/>
                         <a:cs typeface="Arial" charset="0"/>
@@ -28591,7 +31327,7 @@
                         <a:buNone/>
                       </a:pPr>
                       <a:r>
-                        <a:rPr lang="en-US" sz="1600" dirty="0">
+                        <a:rPr lang="en-US" sz="1300" dirty="0">
                           <a:solidFill>
                             <a:srgbClr val="1F2937"/>
                           </a:solidFill>
@@ -28601,7 +31337,349 @@
                         </a:rPr>
                         <a:t>0.720</a:t>
                       </a:r>
-                      <a:endParaRPr lang="en-US" sz="1600" dirty="0">
+                      <a:endParaRPr lang="en-US" sz="1300" dirty="0">
+                        <a:latin typeface="Arial" charset="0"/>
+                        <a:ea typeface="Arial" charset="0"/>
+                        <a:cs typeface="Arial" charset="0"/>
+                      </a:endParaRPr>
+                    </a:p>
+                  </a:txBody>
+                  <a:tcPr marL="91440" marR="91440" marT="45720" marB="45720" anchor="ctr">
+                    <a:lnL w="6350" cap="flat" cmpd="sng" algn="ctr">
+                      <a:solidFill>
+                        <a:srgbClr val="FFFFFF"/>
+                      </a:solidFill>
+                      <a:prstDash val="solid"/>
+                      <a:round/>
+                      <a:headEnd type="none" w="med" len="med"/>
+                      <a:tailEnd type="none" w="med" len="med"/>
+                    </a:lnL>
+                    <a:lnR w="6350" cap="flat" cmpd="sng" algn="ctr">
+                      <a:solidFill>
+                        <a:srgbClr val="FFFFFF"/>
+                      </a:solidFill>
+                      <a:prstDash val="solid"/>
+                      <a:round/>
+                      <a:headEnd type="none" w="med" len="med"/>
+                      <a:tailEnd type="none" w="med" len="med"/>
+                    </a:lnR>
+                    <a:lnT w="6350" cap="flat" cmpd="sng" algn="ctr">
+                      <a:solidFill>
+                        <a:srgbClr val="FFFFFF"/>
+                      </a:solidFill>
+                      <a:prstDash val="solid"/>
+                      <a:round/>
+                      <a:headEnd type="none" w="med" len="med"/>
+                      <a:tailEnd type="none" w="med" len="med"/>
+                    </a:lnT>
+                    <a:lnB w="6350" cap="flat" cmpd="sng" algn="ctr">
+                      <a:solidFill>
+                        <a:srgbClr val="FFFFFF"/>
+                      </a:solidFill>
+                      <a:prstDash val="solid"/>
+                      <a:round/>
+                      <a:headEnd type="none" w="med" len="med"/>
+                      <a:tailEnd type="none" w="med" len="med"/>
+                    </a:lnB>
+                    <a:solidFill>
+                      <a:srgbClr val="FDEBD0"/>
+                    </a:solidFill>
+                  </a:tcPr>
+                </a:tc>
+              </a:tr>
+              <a:tr h="384048">
+                <a:tc>
+                  <a:txBody>
+                    <a:bodyPr/>
+                    <a:lstStyle/>
+                    <a:p>
+                      <a:pPr algn="ctr" indent="0" marL="0">
+                        <a:buNone/>
+                      </a:pPr>
+                      <a:r>
+                        <a:rPr lang="en-US" sz="1300" dirty="0">
+                          <a:solidFill>
+                            <a:srgbClr val="1F2937"/>
+                          </a:solidFill>
+                          <a:latin typeface="Arial" pitchFamily="34" charset="0"/>
+                          <a:ea typeface="Arial" pitchFamily="34" charset="-122"/>
+                          <a:cs typeface="Arial" pitchFamily="34" charset="-120"/>
+                        </a:rPr>
+                        <a:t>7</a:t>
+                      </a:r>
+                      <a:endParaRPr lang="en-US" sz="1300" dirty="0">
+                        <a:latin typeface="Arial" charset="0"/>
+                        <a:ea typeface="Arial" charset="0"/>
+                        <a:cs typeface="Arial" charset="0"/>
+                      </a:endParaRPr>
+                    </a:p>
+                  </a:txBody>
+                  <a:tcPr marL="91440" marR="91440" marT="45720" marB="45720" anchor="ctr">
+                    <a:lnL w="6350" cap="flat" cmpd="sng" algn="ctr">
+                      <a:solidFill>
+                        <a:srgbClr val="FFFFFF"/>
+                      </a:solidFill>
+                      <a:prstDash val="solid"/>
+                      <a:round/>
+                      <a:headEnd type="none" w="med" len="med"/>
+                      <a:tailEnd type="none" w="med" len="med"/>
+                    </a:lnL>
+                    <a:lnR w="6350" cap="flat" cmpd="sng" algn="ctr">
+                      <a:solidFill>
+                        <a:srgbClr val="FFFFFF"/>
+                      </a:solidFill>
+                      <a:prstDash val="solid"/>
+                      <a:round/>
+                      <a:headEnd type="none" w="med" len="med"/>
+                      <a:tailEnd type="none" w="med" len="med"/>
+                    </a:lnR>
+                    <a:lnT w="6350" cap="flat" cmpd="sng" algn="ctr">
+                      <a:solidFill>
+                        <a:srgbClr val="FFFFFF"/>
+                      </a:solidFill>
+                      <a:prstDash val="solid"/>
+                      <a:round/>
+                      <a:headEnd type="none" w="med" len="med"/>
+                      <a:tailEnd type="none" w="med" len="med"/>
+                    </a:lnT>
+                    <a:lnB w="6350" cap="flat" cmpd="sng" algn="ctr">
+                      <a:solidFill>
+                        <a:srgbClr val="FFFFFF"/>
+                      </a:solidFill>
+                      <a:prstDash val="solid"/>
+                      <a:round/>
+                      <a:headEnd type="none" w="med" len="med"/>
+                      <a:tailEnd type="none" w="med" len="med"/>
+                    </a:lnB>
+                    <a:solidFill>
+                      <a:srgbClr val="FDEBD0"/>
+                    </a:solidFill>
+                  </a:tcPr>
+                </a:tc>
+                <a:tc>
+                  <a:txBody>
+                    <a:bodyPr/>
+                    <a:lstStyle/>
+                    <a:p>
+                      <a:pPr algn="ctr" indent="0" marL="0">
+                        <a:buNone/>
+                      </a:pPr>
+                      <a:r>
+                        <a:rPr lang="en-US" sz="1300" dirty="0">
+                          <a:solidFill>
+                            <a:srgbClr val="1F2937"/>
+                          </a:solidFill>
+                          <a:latin typeface="Arial" pitchFamily="34" charset="0"/>
+                          <a:ea typeface="Arial" pitchFamily="34" charset="-122"/>
+                          <a:cs typeface="Arial" pitchFamily="34" charset="-120"/>
+                        </a:rPr>
+                        <a:t>GPT-OSS 120B</a:t>
+                      </a:r>
+                      <a:endParaRPr lang="en-US" sz="1300" dirty="0">
+                        <a:latin typeface="Arial" charset="0"/>
+                        <a:ea typeface="Arial" charset="0"/>
+                        <a:cs typeface="Arial" charset="0"/>
+                      </a:endParaRPr>
+                    </a:p>
+                  </a:txBody>
+                  <a:tcPr marL="91440" marR="91440" marT="45720" marB="45720" anchor="ctr">
+                    <a:lnL w="6350" cap="flat" cmpd="sng" algn="ctr">
+                      <a:solidFill>
+                        <a:srgbClr val="FFFFFF"/>
+                      </a:solidFill>
+                      <a:prstDash val="solid"/>
+                      <a:round/>
+                      <a:headEnd type="none" w="med" len="med"/>
+                      <a:tailEnd type="none" w="med" len="med"/>
+                    </a:lnL>
+                    <a:lnR w="6350" cap="flat" cmpd="sng" algn="ctr">
+                      <a:solidFill>
+                        <a:srgbClr val="FFFFFF"/>
+                      </a:solidFill>
+                      <a:prstDash val="solid"/>
+                      <a:round/>
+                      <a:headEnd type="none" w="med" len="med"/>
+                      <a:tailEnd type="none" w="med" len="med"/>
+                    </a:lnR>
+                    <a:lnT w="6350" cap="flat" cmpd="sng" algn="ctr">
+                      <a:solidFill>
+                        <a:srgbClr val="FFFFFF"/>
+                      </a:solidFill>
+                      <a:prstDash val="solid"/>
+                      <a:round/>
+                      <a:headEnd type="none" w="med" len="med"/>
+                      <a:tailEnd type="none" w="med" len="med"/>
+                    </a:lnT>
+                    <a:lnB w="6350" cap="flat" cmpd="sng" algn="ctr">
+                      <a:solidFill>
+                        <a:srgbClr val="FFFFFF"/>
+                      </a:solidFill>
+                      <a:prstDash val="solid"/>
+                      <a:round/>
+                      <a:headEnd type="none" w="med" len="med"/>
+                      <a:tailEnd type="none" w="med" len="med"/>
+                    </a:lnB>
+                    <a:solidFill>
+                      <a:srgbClr val="FDEBD0"/>
+                    </a:solidFill>
+                  </a:tcPr>
+                </a:tc>
+                <a:tc>
+                  <a:txBody>
+                    <a:bodyPr/>
+                    <a:lstStyle/>
+                    <a:p>
+                      <a:pPr algn="ctr" indent="0" marL="0">
+                        <a:buNone/>
+                      </a:pPr>
+                      <a:r>
+                        <a:rPr lang="en-US" sz="1300" dirty="0">
+                          <a:solidFill>
+                            <a:srgbClr val="1F2937"/>
+                          </a:solidFill>
+                          <a:latin typeface="Arial" pitchFamily="34" charset="0"/>
+                          <a:ea typeface="Arial" pitchFamily="34" charset="-122"/>
+                          <a:cs typeface="Arial" pitchFamily="34" charset="-120"/>
+                        </a:rPr>
+                        <a:t>Zero-Shot</a:t>
+                      </a:r>
+                      <a:endParaRPr lang="en-US" sz="1300" dirty="0">
+                        <a:latin typeface="Arial" charset="0"/>
+                        <a:ea typeface="Arial" charset="0"/>
+                        <a:cs typeface="Arial" charset="0"/>
+                      </a:endParaRPr>
+                    </a:p>
+                  </a:txBody>
+                  <a:tcPr marL="91440" marR="91440" marT="45720" marB="45720" anchor="ctr">
+                    <a:lnL w="6350" cap="flat" cmpd="sng" algn="ctr">
+                      <a:solidFill>
+                        <a:srgbClr val="FFFFFF"/>
+                      </a:solidFill>
+                      <a:prstDash val="solid"/>
+                      <a:round/>
+                      <a:headEnd type="none" w="med" len="med"/>
+                      <a:tailEnd type="none" w="med" len="med"/>
+                    </a:lnL>
+                    <a:lnR w="6350" cap="flat" cmpd="sng" algn="ctr">
+                      <a:solidFill>
+                        <a:srgbClr val="FFFFFF"/>
+                      </a:solidFill>
+                      <a:prstDash val="solid"/>
+                      <a:round/>
+                      <a:headEnd type="none" w="med" len="med"/>
+                      <a:tailEnd type="none" w="med" len="med"/>
+                    </a:lnR>
+                    <a:lnT w="6350" cap="flat" cmpd="sng" algn="ctr">
+                      <a:solidFill>
+                        <a:srgbClr val="FFFFFF"/>
+                      </a:solidFill>
+                      <a:prstDash val="solid"/>
+                      <a:round/>
+                      <a:headEnd type="none" w="med" len="med"/>
+                      <a:tailEnd type="none" w="med" len="med"/>
+                    </a:lnT>
+                    <a:lnB w="6350" cap="flat" cmpd="sng" algn="ctr">
+                      <a:solidFill>
+                        <a:srgbClr val="FFFFFF"/>
+                      </a:solidFill>
+                      <a:prstDash val="solid"/>
+                      <a:round/>
+                      <a:headEnd type="none" w="med" len="med"/>
+                      <a:tailEnd type="none" w="med" len="med"/>
+                    </a:lnB>
+                    <a:solidFill>
+                      <a:srgbClr val="FDEBD0"/>
+                    </a:solidFill>
+                  </a:tcPr>
+                </a:tc>
+                <a:tc>
+                  <a:txBody>
+                    <a:bodyPr/>
+                    <a:lstStyle/>
+                    <a:p>
+                      <a:pPr algn="ctr" indent="0" marL="0">
+                        <a:buNone/>
+                      </a:pPr>
+                      <a:r>
+                        <a:rPr lang="en-US" sz="1300" dirty="0">
+                          <a:solidFill>
+                            <a:srgbClr val="1F2937"/>
+                          </a:solidFill>
+                          <a:latin typeface="Arial" pitchFamily="34" charset="0"/>
+                          <a:ea typeface="Arial" pitchFamily="34" charset="-122"/>
+                          <a:cs typeface="Arial" pitchFamily="34" charset="-120"/>
+                        </a:rPr>
+                        <a:t>0.582</a:t>
+                      </a:r>
+                      <a:endParaRPr lang="en-US" sz="1300" dirty="0">
+                        <a:latin typeface="Arial" charset="0"/>
+                        <a:ea typeface="Arial" charset="0"/>
+                        <a:cs typeface="Arial" charset="0"/>
+                      </a:endParaRPr>
+                    </a:p>
+                  </a:txBody>
+                  <a:tcPr marL="91440" marR="91440" marT="45720" marB="45720" anchor="ctr">
+                    <a:lnL w="6350" cap="flat" cmpd="sng" algn="ctr">
+                      <a:solidFill>
+                        <a:srgbClr val="FFFFFF"/>
+                      </a:solidFill>
+                      <a:prstDash val="solid"/>
+                      <a:round/>
+                      <a:headEnd type="none" w="med" len="med"/>
+                      <a:tailEnd type="none" w="med" len="med"/>
+                    </a:lnL>
+                    <a:lnR w="6350" cap="flat" cmpd="sng" algn="ctr">
+                      <a:solidFill>
+                        <a:srgbClr val="FFFFFF"/>
+                      </a:solidFill>
+                      <a:prstDash val="solid"/>
+                      <a:round/>
+                      <a:headEnd type="none" w="med" len="med"/>
+                      <a:tailEnd type="none" w="med" len="med"/>
+                    </a:lnR>
+                    <a:lnT w="6350" cap="flat" cmpd="sng" algn="ctr">
+                      <a:solidFill>
+                        <a:srgbClr val="FFFFFF"/>
+                      </a:solidFill>
+                      <a:prstDash val="solid"/>
+                      <a:round/>
+                      <a:headEnd type="none" w="med" len="med"/>
+                      <a:tailEnd type="none" w="med" len="med"/>
+                    </a:lnT>
+                    <a:lnB w="6350" cap="flat" cmpd="sng" algn="ctr">
+                      <a:solidFill>
+                        <a:srgbClr val="FFFFFF"/>
+                      </a:solidFill>
+                      <a:prstDash val="solid"/>
+                      <a:round/>
+                      <a:headEnd type="none" w="med" len="med"/>
+                      <a:tailEnd type="none" w="med" len="med"/>
+                    </a:lnB>
+                    <a:solidFill>
+                      <a:srgbClr val="FDEBD0"/>
+                    </a:solidFill>
+                  </a:tcPr>
+                </a:tc>
+                <a:tc>
+                  <a:txBody>
+                    <a:bodyPr/>
+                    <a:lstStyle/>
+                    <a:p>
+                      <a:pPr algn="ctr" indent="0" marL="0">
+                        <a:buNone/>
+                      </a:pPr>
+                      <a:r>
+                        <a:rPr lang="en-US" sz="1300" dirty="0">
+                          <a:solidFill>
+                            <a:srgbClr val="1F2937"/>
+                          </a:solidFill>
+                          <a:latin typeface="Arial" pitchFamily="34" charset="0"/>
+                          <a:ea typeface="Arial" pitchFamily="34" charset="-122"/>
+                          <a:cs typeface="Arial" pitchFamily="34" charset="-120"/>
+                        </a:rPr>
+                        <a:t>0.591</a:t>
+                      </a:r>
+                      <a:endParaRPr lang="en-US" sz="1300" dirty="0">
                         <a:latin typeface="Arial" charset="0"/>
                         <a:ea typeface="Arial" charset="0"/>
                         <a:cs typeface="Arial" charset="0"/>
@@ -28663,7 +31741,7 @@
         </p:nvSpPr>
         <p:spPr>
           <a:xfrm>
-            <a:off x="640080" y="3511296"/>
+            <a:off x="640080" y="4279392"/>
             <a:ext cx="7863840" cy="320040"/>
           </a:xfrm>
           <a:prstGeom prst="rect">
@@ -31222,7 +34300,7 @@
         </p:nvGraphicFramePr>
         <p:xfrm>
           <a:off x="640080" y="1143000"/>
-          <a:ext cx="7863840" cy="2304288"/>
+          <a:ext cx="7863840" cy="2688336"/>
         </p:xfrm>
         <a:graphic>
           <a:graphicData uri="http://schemas.openxmlformats.org/drawingml/2006/table">
@@ -33031,6 +36109,348 @@
                           <a:ea typeface="Arial" pitchFamily="34" charset="-122"/>
                           <a:cs typeface="Arial" pitchFamily="34" charset="-120"/>
                         </a:rPr>
+                        <a:t>Qwen3.6 27B</a:t>
+                      </a:r>
+                      <a:endParaRPr lang="en-US" sz="1600" dirty="0">
+                        <a:latin typeface="Arial" charset="0"/>
+                        <a:ea typeface="Arial" charset="0"/>
+                        <a:cs typeface="Arial" charset="0"/>
+                      </a:endParaRPr>
+                    </a:p>
+                  </a:txBody>
+                  <a:tcPr marL="91440" marR="91440" marT="45720" marB="45720" anchor="ctr">
+                    <a:lnL w="6350" cap="flat" cmpd="sng" algn="ctr">
+                      <a:solidFill>
+                        <a:srgbClr val="FFFFFF"/>
+                      </a:solidFill>
+                      <a:prstDash val="solid"/>
+                      <a:round/>
+                      <a:headEnd type="none" w="med" len="med"/>
+                      <a:tailEnd type="none" w="med" len="med"/>
+                    </a:lnL>
+                    <a:lnR w="6350" cap="flat" cmpd="sng" algn="ctr">
+                      <a:solidFill>
+                        <a:srgbClr val="FFFFFF"/>
+                      </a:solidFill>
+                      <a:prstDash val="solid"/>
+                      <a:round/>
+                      <a:headEnd type="none" w="med" len="med"/>
+                      <a:tailEnd type="none" w="med" len="med"/>
+                    </a:lnR>
+                    <a:lnT w="6350" cap="flat" cmpd="sng" algn="ctr">
+                      <a:solidFill>
+                        <a:srgbClr val="FFFFFF"/>
+                      </a:solidFill>
+                      <a:prstDash val="solid"/>
+                      <a:round/>
+                      <a:headEnd type="none" w="med" len="med"/>
+                      <a:tailEnd type="none" w="med" len="med"/>
+                    </a:lnT>
+                    <a:lnB w="6350" cap="flat" cmpd="sng" algn="ctr">
+                      <a:solidFill>
+                        <a:srgbClr val="FFFFFF"/>
+                      </a:solidFill>
+                      <a:prstDash val="solid"/>
+                      <a:round/>
+                      <a:headEnd type="none" w="med" len="med"/>
+                      <a:tailEnd type="none" w="med" len="med"/>
+                    </a:lnB>
+                    <a:solidFill>
+                      <a:srgbClr val="FDEBD0"/>
+                    </a:solidFill>
+                  </a:tcPr>
+                </a:tc>
+                <a:tc>
+                  <a:txBody>
+                    <a:bodyPr/>
+                    <a:lstStyle/>
+                    <a:p>
+                      <a:pPr algn="ctr" indent="0" marL="0">
+                        <a:buNone/>
+                      </a:pPr>
+                      <a:r>
+                        <a:rPr lang="en-US" sz="1600" dirty="0">
+                          <a:solidFill>
+                            <a:srgbClr val="1F2937"/>
+                          </a:solidFill>
+                          <a:latin typeface="Arial" pitchFamily="34" charset="0"/>
+                          <a:ea typeface="Arial" pitchFamily="34" charset="-122"/>
+                          <a:cs typeface="Arial" pitchFamily="34" charset="-120"/>
+                        </a:rPr>
+                        <a:t>Zero-Shot</a:t>
+                      </a:r>
+                      <a:endParaRPr lang="en-US" sz="1600" dirty="0">
+                        <a:latin typeface="Arial" charset="0"/>
+                        <a:ea typeface="Arial" charset="0"/>
+                        <a:cs typeface="Arial" charset="0"/>
+                      </a:endParaRPr>
+                    </a:p>
+                  </a:txBody>
+                  <a:tcPr marL="91440" marR="91440" marT="45720" marB="45720" anchor="ctr">
+                    <a:lnL w="6350" cap="flat" cmpd="sng" algn="ctr">
+                      <a:solidFill>
+                        <a:srgbClr val="FFFFFF"/>
+                      </a:solidFill>
+                      <a:prstDash val="solid"/>
+                      <a:round/>
+                      <a:headEnd type="none" w="med" len="med"/>
+                      <a:tailEnd type="none" w="med" len="med"/>
+                    </a:lnL>
+                    <a:lnR w="6350" cap="flat" cmpd="sng" algn="ctr">
+                      <a:solidFill>
+                        <a:srgbClr val="FFFFFF"/>
+                      </a:solidFill>
+                      <a:prstDash val="solid"/>
+                      <a:round/>
+                      <a:headEnd type="none" w="med" len="med"/>
+                      <a:tailEnd type="none" w="med" len="med"/>
+                    </a:lnR>
+                    <a:lnT w="6350" cap="flat" cmpd="sng" algn="ctr">
+                      <a:solidFill>
+                        <a:srgbClr val="FFFFFF"/>
+                      </a:solidFill>
+                      <a:prstDash val="solid"/>
+                      <a:round/>
+                      <a:headEnd type="none" w="med" len="med"/>
+                      <a:tailEnd type="none" w="med" len="med"/>
+                    </a:lnT>
+                    <a:lnB w="6350" cap="flat" cmpd="sng" algn="ctr">
+                      <a:solidFill>
+                        <a:srgbClr val="FFFFFF"/>
+                      </a:solidFill>
+                      <a:prstDash val="solid"/>
+                      <a:round/>
+                      <a:headEnd type="none" w="med" len="med"/>
+                      <a:tailEnd type="none" w="med" len="med"/>
+                    </a:lnB>
+                    <a:solidFill>
+                      <a:srgbClr val="FDEBD0"/>
+                    </a:solidFill>
+                  </a:tcPr>
+                </a:tc>
+                <a:tc>
+                  <a:txBody>
+                    <a:bodyPr/>
+                    <a:lstStyle/>
+                    <a:p>
+                      <a:pPr algn="ctr" indent="0" marL="0">
+                        <a:buNone/>
+                      </a:pPr>
+                      <a:r>
+                        <a:rPr lang="en-US" sz="1600" dirty="0">
+                          <a:solidFill>
+                            <a:srgbClr val="1F2937"/>
+                          </a:solidFill>
+                          <a:latin typeface="Arial" pitchFamily="34" charset="0"/>
+                          <a:ea typeface="Arial" pitchFamily="34" charset="-122"/>
+                          <a:cs typeface="Arial" pitchFamily="34" charset="-120"/>
+                        </a:rPr>
+                        <a:t>0.503</a:t>
+                      </a:r>
+                      <a:endParaRPr lang="en-US" sz="1600" dirty="0">
+                        <a:latin typeface="Arial" charset="0"/>
+                        <a:ea typeface="Arial" charset="0"/>
+                        <a:cs typeface="Arial" charset="0"/>
+                      </a:endParaRPr>
+                    </a:p>
+                  </a:txBody>
+                  <a:tcPr marL="91440" marR="91440" marT="45720" marB="45720" anchor="ctr">
+                    <a:lnL w="6350" cap="flat" cmpd="sng" algn="ctr">
+                      <a:solidFill>
+                        <a:srgbClr val="FFFFFF"/>
+                      </a:solidFill>
+                      <a:prstDash val="solid"/>
+                      <a:round/>
+                      <a:headEnd type="none" w="med" len="med"/>
+                      <a:tailEnd type="none" w="med" len="med"/>
+                    </a:lnL>
+                    <a:lnR w="6350" cap="flat" cmpd="sng" algn="ctr">
+                      <a:solidFill>
+                        <a:srgbClr val="FFFFFF"/>
+                      </a:solidFill>
+                      <a:prstDash val="solid"/>
+                      <a:round/>
+                      <a:headEnd type="none" w="med" len="med"/>
+                      <a:tailEnd type="none" w="med" len="med"/>
+                    </a:lnR>
+                    <a:lnT w="6350" cap="flat" cmpd="sng" algn="ctr">
+                      <a:solidFill>
+                        <a:srgbClr val="FFFFFF"/>
+                      </a:solidFill>
+                      <a:prstDash val="solid"/>
+                      <a:round/>
+                      <a:headEnd type="none" w="med" len="med"/>
+                      <a:tailEnd type="none" w="med" len="med"/>
+                    </a:lnT>
+                    <a:lnB w="6350" cap="flat" cmpd="sng" algn="ctr">
+                      <a:solidFill>
+                        <a:srgbClr val="FFFFFF"/>
+                      </a:solidFill>
+                      <a:prstDash val="solid"/>
+                      <a:round/>
+                      <a:headEnd type="none" w="med" len="med"/>
+                      <a:tailEnd type="none" w="med" len="med"/>
+                    </a:lnB>
+                    <a:solidFill>
+                      <a:srgbClr val="FDEBD0"/>
+                    </a:solidFill>
+                  </a:tcPr>
+                </a:tc>
+                <a:tc>
+                  <a:txBody>
+                    <a:bodyPr/>
+                    <a:lstStyle/>
+                    <a:p>
+                      <a:pPr algn="ctr" indent="0" marL="0">
+                        <a:buNone/>
+                      </a:pPr>
+                      <a:r>
+                        <a:rPr lang="en-US" sz="1600" dirty="0">
+                          <a:solidFill>
+                            <a:srgbClr val="1F2937"/>
+                          </a:solidFill>
+                          <a:latin typeface="Arial" pitchFamily="34" charset="0"/>
+                          <a:ea typeface="Arial" pitchFamily="34" charset="-122"/>
+                          <a:cs typeface="Arial" pitchFamily="34" charset="-120"/>
+                        </a:rPr>
+                        <a:t>0.571</a:t>
+                      </a:r>
+                      <a:endParaRPr lang="en-US" sz="1600" dirty="0">
+                        <a:latin typeface="Arial" charset="0"/>
+                        <a:ea typeface="Arial" charset="0"/>
+                        <a:cs typeface="Arial" charset="0"/>
+                      </a:endParaRPr>
+                    </a:p>
+                  </a:txBody>
+                  <a:tcPr marL="91440" marR="91440" marT="45720" marB="45720" anchor="ctr">
+                    <a:lnL w="6350" cap="flat" cmpd="sng" algn="ctr">
+                      <a:solidFill>
+                        <a:srgbClr val="FFFFFF"/>
+                      </a:solidFill>
+                      <a:prstDash val="solid"/>
+                      <a:round/>
+                      <a:headEnd type="none" w="med" len="med"/>
+                      <a:tailEnd type="none" w="med" len="med"/>
+                    </a:lnL>
+                    <a:lnR w="6350" cap="flat" cmpd="sng" algn="ctr">
+                      <a:solidFill>
+                        <a:srgbClr val="FFFFFF"/>
+                      </a:solidFill>
+                      <a:prstDash val="solid"/>
+                      <a:round/>
+                      <a:headEnd type="none" w="med" len="med"/>
+                      <a:tailEnd type="none" w="med" len="med"/>
+                    </a:lnR>
+                    <a:lnT w="6350" cap="flat" cmpd="sng" algn="ctr">
+                      <a:solidFill>
+                        <a:srgbClr val="FFFFFF"/>
+                      </a:solidFill>
+                      <a:prstDash val="solid"/>
+                      <a:round/>
+                      <a:headEnd type="none" w="med" len="med"/>
+                      <a:tailEnd type="none" w="med" len="med"/>
+                    </a:lnT>
+                    <a:lnB w="6350" cap="flat" cmpd="sng" algn="ctr">
+                      <a:solidFill>
+                        <a:srgbClr val="FFFFFF"/>
+                      </a:solidFill>
+                      <a:prstDash val="solid"/>
+                      <a:round/>
+                      <a:headEnd type="none" w="med" len="med"/>
+                      <a:tailEnd type="none" w="med" len="med"/>
+                    </a:lnB>
+                    <a:solidFill>
+                      <a:srgbClr val="FDEBD0"/>
+                    </a:solidFill>
+                  </a:tcPr>
+                </a:tc>
+              </a:tr>
+              <a:tr h="384048">
+                <a:tc>
+                  <a:txBody>
+                    <a:bodyPr/>
+                    <a:lstStyle/>
+                    <a:p>
+                      <a:pPr algn="ctr" indent="0" marL="0">
+                        <a:buNone/>
+                      </a:pPr>
+                      <a:r>
+                        <a:rPr lang="en-US" sz="1600" dirty="0">
+                          <a:solidFill>
+                            <a:srgbClr val="1F2937"/>
+                          </a:solidFill>
+                          <a:latin typeface="Arial" pitchFamily="34" charset="0"/>
+                          <a:ea typeface="Arial" pitchFamily="34" charset="-122"/>
+                          <a:cs typeface="Arial" pitchFamily="34" charset="-120"/>
+                        </a:rPr>
+                        <a:t>6</a:t>
+                      </a:r>
+                      <a:endParaRPr lang="en-US" sz="1600" dirty="0">
+                        <a:latin typeface="Arial" charset="0"/>
+                        <a:ea typeface="Arial" charset="0"/>
+                        <a:cs typeface="Arial" charset="0"/>
+                      </a:endParaRPr>
+                    </a:p>
+                  </a:txBody>
+                  <a:tcPr marL="91440" marR="91440" marT="45720" marB="45720" anchor="ctr">
+                    <a:lnL w="6350" cap="flat" cmpd="sng" algn="ctr">
+                      <a:solidFill>
+                        <a:srgbClr val="FFFFFF"/>
+                      </a:solidFill>
+                      <a:prstDash val="solid"/>
+                      <a:round/>
+                      <a:headEnd type="none" w="med" len="med"/>
+                      <a:tailEnd type="none" w="med" len="med"/>
+                    </a:lnL>
+                    <a:lnR w="6350" cap="flat" cmpd="sng" algn="ctr">
+                      <a:solidFill>
+                        <a:srgbClr val="FFFFFF"/>
+                      </a:solidFill>
+                      <a:prstDash val="solid"/>
+                      <a:round/>
+                      <a:headEnd type="none" w="med" len="med"/>
+                      <a:tailEnd type="none" w="med" len="med"/>
+                    </a:lnR>
+                    <a:lnT w="6350" cap="flat" cmpd="sng" algn="ctr">
+                      <a:solidFill>
+                        <a:srgbClr val="FFFFFF"/>
+                      </a:solidFill>
+                      <a:prstDash val="solid"/>
+                      <a:round/>
+                      <a:headEnd type="none" w="med" len="med"/>
+                      <a:tailEnd type="none" w="med" len="med"/>
+                    </a:lnT>
+                    <a:lnB w="6350" cap="flat" cmpd="sng" algn="ctr">
+                      <a:solidFill>
+                        <a:srgbClr val="FFFFFF"/>
+                      </a:solidFill>
+                      <a:prstDash val="solid"/>
+                      <a:round/>
+                      <a:headEnd type="none" w="med" len="med"/>
+                      <a:tailEnd type="none" w="med" len="med"/>
+                    </a:lnB>
+                    <a:solidFill>
+                      <a:srgbClr val="FDEBD0"/>
+                    </a:solidFill>
+                  </a:tcPr>
+                </a:tc>
+                <a:tc>
+                  <a:txBody>
+                    <a:bodyPr/>
+                    <a:lstStyle/>
+                    <a:p>
+                      <a:pPr algn="ctr" indent="0" marL="0">
+                        <a:buNone/>
+                      </a:pPr>
+                      <a:r>
+                        <a:rPr lang="en-US" sz="1600" dirty="0">
+                          <a:solidFill>
+                            <a:srgbClr val="1F2937"/>
+                          </a:solidFill>
+                          <a:latin typeface="Arial" pitchFamily="34" charset="0"/>
+                          <a:ea typeface="Arial" pitchFamily="34" charset="-122"/>
+                          <a:cs typeface="Arial" pitchFamily="34" charset="-120"/>
+                        </a:rPr>
                         <a:t>Gemini 2.5 Flash</a:t>
                       </a:r>
                       <a:endParaRPr lang="en-US" sz="1600" dirty="0">
@@ -33299,7 +36719,7 @@
         </p:nvSpPr>
         <p:spPr>
           <a:xfrm>
-            <a:off x="640080" y="3511296"/>
+            <a:off x="640080" y="3895344"/>
             <a:ext cx="7863840" cy="320040"/>
           </a:xfrm>
           <a:prstGeom prst="rect">
